--- a/icbb-website/materials/research-methods/unit-05-slides.pptx
+++ b/icbb-website/materials/research-methods/unit-05-slides.pptx
@@ -878,7 +878,7 @@
           <a:p>
             <a:r>
               <a:rPr lang="en-US" dirty="0"/>
-              <a:t>Take-away: Choose the weakest design that still answers your question honestly, then state plainly what it cannot establish. Overclaiming from a cross-sectional study is the most common criticism in peer review.</a:t>
+              <a:t>The point: Choose the weakest design that still answers your question honestly, then state plainly what it cannot establish. Overclaiming from a cross-sectional study is the most common criticism in peer review.</a:t>
             </a:r>
             <a:endParaRPr lang="en-US" dirty="0"/>
           </a:p>
@@ -966,7 +966,7 @@
           <a:p>
             <a:r>
               <a:rPr lang="en-US" dirty="0"/>
-              <a:t>Take-away: Intention to treat is the primary analysis. Report per-protocol as a secondary sensitivity analysis if at all, and never as the headline result.</a:t>
+              <a:t>The point: Intention to treat is the primary analysis. Report per-protocol as a secondary sensitivity analysis if at all, and never as the headline result.</a:t>
             </a:r>
             <a:endParaRPr lang="en-US" dirty="0"/>
           </a:p>
@@ -1318,7 +1318,7 @@
           <a:p>
             <a:r>
               <a:rPr lang="en-US" dirty="0"/>
-              <a:t>Read these out at the start and return to them at the end of the unit.</a:t>
+              <a:t>Read these at the start, and return to them at the end of the unit.</a:t>
             </a:r>
             <a:endParaRPr lang="en-US" dirty="0"/>
           </a:p>
@@ -2038,14 +2038,14 @@
         </p:nvSpPr>
         <p:spPr>
           <a:xfrm>
-            <a:off x="0" y="0"/>
-            <a:ext cx="118872" cy="5148072"/>
+            <a:off x="566928" y="4590288"/>
+            <a:ext cx="8010144" cy="10973"/>
           </a:xfrm>
           <a:prstGeom prst="rect">
             <a:avLst/>
           </a:prstGeom>
           <a:solidFill>
-            <a:srgbClr val="0066CC"/>
+            <a:srgbClr val="D8D3CB"/>
           </a:solidFill>
           <a:ln/>
         </p:spPr>
@@ -2060,7 +2060,7 @@
         </p:nvPicPr>
         <p:blipFill>
           <a:blip r:embed="rId1">
-            <a:alphaModFix amt="18000"/>
+            <a:alphaModFix amt="38000"/>
           </a:blip>
           <a:stretch>
             <a:fillRect/>
@@ -2068,8 +2068,8 @@
         </p:blipFill>
         <p:spPr>
           <a:xfrm>
-            <a:off x="6903720" y="3977640"/>
-            <a:ext cx="1920240" cy="1280160"/>
+            <a:off x="7973568" y="4709160"/>
+            <a:ext cx="566928" cy="374904"/>
           </a:xfrm>
           <a:prstGeom prst="rect">
             <a:avLst/>
@@ -2088,8 +2088,8 @@
         </p:nvSpPr>
         <p:spPr>
           <a:xfrm>
-            <a:off x="8503920" y="4709160"/>
-            <a:ext cx="800000" cy="300000"/>
+            <a:off x="566928" y="4700016"/>
+            <a:ext cx="914400" cy="274320"/>
           </a:xfrm>
           <a:prstGeom prst="rect">
             <a:avLst/>
@@ -2104,10 +2104,13 @@
           <a:bodyPr/>
           <a:lstStyle>
             <a:lvl1pPr>
-              <a:defRPr sz="1000">
-                <a:solidFill>
-                  <a:srgbClr val="6B7280"/>
-                </a:solidFill>
+              <a:defRPr sz="900">
+                <a:solidFill>
+                  <a:srgbClr val="5F6B76"/>
+                </a:solidFill>
+                <a:latin typeface="Corbel"/>
+                <a:ea typeface="Corbel"/>
+                <a:cs typeface="Corbel"/>
               </a:defRPr>
             </a:lvl1pPr>
           </a:lstStyle>
@@ -2135,7 +2138,7 @@
     <p:bg>
       <p:bgPr>
         <a:solidFill>
-          <a:srgbClr val="004D99"/>
+          <a:srgbClr val="132330"/>
         </a:solidFill>
       </p:bgPr>
     </p:bg>
@@ -2161,14 +2164,14 @@
         </p:nvSpPr>
         <p:spPr>
           <a:xfrm>
-            <a:off x="0" y="4526280"/>
-            <a:ext cx="9144000" cy="621792"/>
+            <a:off x="685800" y="1481328"/>
+            <a:ext cx="1051560" cy="25603"/>
           </a:xfrm>
           <a:prstGeom prst="rect">
             <a:avLst/>
           </a:prstGeom>
           <a:solidFill>
-            <a:srgbClr val="00A86B"/>
+            <a:srgbClr val="9A6A3C"/>
           </a:solidFill>
           <a:ln/>
         </p:spPr>
@@ -2183,7 +2186,7 @@
         </p:nvPicPr>
         <p:blipFill>
           <a:blip r:embed="rId1">
-            <a:alphaModFix amt="75000"/>
+            <a:alphaModFix amt="45000"/>
           </a:blip>
           <a:stretch>
             <a:fillRect/>
@@ -2191,8 +2194,8 @@
         </p:blipFill>
         <p:spPr>
           <a:xfrm>
-            <a:off x="7452360" y="384048"/>
-            <a:ext cx="1371600" cy="914400"/>
+            <a:off x="7863840" y="4315968"/>
+            <a:ext cx="676656" cy="448056"/>
           </a:xfrm>
           <a:prstGeom prst="rect">
             <a:avLst/>
@@ -2236,8 +2239,8 @@
         </p:nvSpPr>
         <p:spPr>
           <a:xfrm>
-            <a:off x="8503920" y="4709160"/>
-            <a:ext cx="800000" cy="300000"/>
+            <a:off x="566928" y="4700016"/>
+            <a:ext cx="914400" cy="274320"/>
           </a:xfrm>
           <a:prstGeom prst="rect">
             <a:avLst/>
@@ -2252,10 +2255,13 @@
           <a:bodyPr/>
           <a:lstStyle>
             <a:lvl1pPr>
-              <a:defRPr sz="1000">
-                <a:solidFill>
-                  <a:srgbClr val="6B7280"/>
-                </a:solidFill>
+              <a:defRPr sz="900">
+                <a:solidFill>
+                  <a:srgbClr val="5F6B76"/>
+                </a:solidFill>
+                <a:latin typeface="Corbel"/>
+                <a:ea typeface="Corbel"/>
+                <a:cs typeface="Corbel"/>
               </a:defRPr>
             </a:lvl1pPr>
           </a:lstStyle>
@@ -2556,8 +2562,8 @@
         </p:nvSpPr>
         <p:spPr>
           <a:xfrm>
-            <a:off x="548640" y="1005840"/>
-            <a:ext cx="6675120" cy="274320"/>
+            <a:off x="685800" y="1024128"/>
+            <a:ext cx="6766560" cy="292608"/>
           </a:xfrm>
           <a:prstGeom prst="rect">
             <a:avLst/>
@@ -2573,14 +2579,17 @@
               <a:buNone/>
             </a:pPr>
             <a:r>
-              <a:rPr lang="en-US" sz="1200" b="1" spc="200" kern="0" dirty="0">
-                <a:solidFill>
-                  <a:srgbClr val="00A86B"/>
-                </a:solidFill>
+              <a:rPr lang="en-US" sz="1150" spc="240" kern="0" dirty="0">
+                <a:solidFill>
+                  <a:srgbClr val="C8A67B"/>
+                </a:solidFill>
+                <a:latin typeface="Corbel" pitchFamily="34" charset="0"/>
+                <a:ea typeface="Corbel" pitchFamily="34" charset="-122"/>
+                <a:cs typeface="Corbel" pitchFamily="34" charset="-120"/>
               </a:rPr>
-              <a:t>ICBB-RM101  ·  UNIT 5 OF 10</a:t>
-            </a:r>
-            <a:endParaRPr lang="en-US" sz="1200" dirty="0"/>
+              <a:t>ICBB-RM101   ·   Unit 5 of 10</a:t>
+            </a:r>
+            <a:endParaRPr lang="en-US" sz="1150" dirty="0"/>
           </a:p>
         </p:txBody>
       </p:sp>
@@ -2592,8 +2601,8 @@
         </p:nvSpPr>
         <p:spPr>
           <a:xfrm>
-            <a:off x="548640" y="1371600"/>
-            <a:ext cx="6766560" cy="1371600"/>
+            <a:off x="685800" y="1700784"/>
+            <a:ext cx="6858000" cy="1417320"/>
           </a:xfrm>
           <a:prstGeom prst="rect">
             <a:avLst/>
@@ -2603,95 +2612,107 @@
         </p:spPr>
         <p:txBody>
           <a:bodyPr wrap="square" rtlCol="0" anchor="t"/>
+          <a:lstStyle/>
+          <a:p>
+            <a:pPr indent="0" marL="0">
+              <a:lnSpc>
+                <a:spcPct val="102000"/>
+              </a:lnSpc>
+              <a:buNone/>
+            </a:pPr>
+            <a:r>
+              <a:rPr lang="en-US" sz="3300" dirty="0">
+                <a:solidFill>
+                  <a:srgbClr val="FFFFFF"/>
+                </a:solidFill>
+                <a:latin typeface="Constantia" pitchFamily="34" charset="0"/>
+                <a:ea typeface="Constantia" pitchFamily="34" charset="-122"/>
+                <a:cs typeface="Constantia" pitchFamily="34" charset="-120"/>
+              </a:rPr>
+              <a:t>Quantitative Research Designs</a:t>
+            </a:r>
+            <a:endParaRPr lang="en-US" sz="3300" dirty="0"/>
+          </a:p>
+        </p:txBody>
+      </p:sp>
+      <p:sp>
+        <p:nvSpPr>
+          <p:cNvPr id="4" name="Text 2"/>
+          <p:cNvSpPr/>
+          <p:nvPr/>
+        </p:nvSpPr>
+        <p:spPr>
+          <a:xfrm>
+            <a:off x="685800" y="3127248"/>
+            <a:ext cx="6309360" cy="1051560"/>
+          </a:xfrm>
+          <a:prstGeom prst="rect">
+            <a:avLst/>
+          </a:prstGeom>
+          <a:noFill/>
+          <a:ln/>
+        </p:spPr>
+        <p:txBody>
+          <a:bodyPr wrap="square" rtlCol="0" anchor="t"/>
+          <a:lstStyle/>
+          <a:p>
+            <a:pPr indent="0" marL="0">
+              <a:lnSpc>
+                <a:spcPct val="128000"/>
+              </a:lnSpc>
+              <a:buNone/>
+            </a:pPr>
+            <a:r>
+              <a:rPr lang="en-US" sz="1350" dirty="0">
+                <a:solidFill>
+                  <a:srgbClr val="B9C2CB"/>
+                </a:solidFill>
+                <a:latin typeface="Corbel" pitchFamily="34" charset="0"/>
+                <a:ea typeface="Corbel" pitchFamily="34" charset="-122"/>
+                <a:cs typeface="Corbel" pitchFamily="34" charset="-120"/>
+              </a:rPr>
+              <a:t>The main observational and experimental designs, what each can and cannot establish, and how to choose the weakest design that still answers your question honestly.</a:t>
+            </a:r>
+            <a:endParaRPr lang="en-US" sz="1350" dirty="0"/>
+          </a:p>
+        </p:txBody>
+      </p:sp>
+      <p:sp>
+        <p:nvSpPr>
+          <p:cNvPr id="5" name="Text 3"/>
+          <p:cNvSpPr/>
+          <p:nvPr/>
+        </p:nvSpPr>
+        <p:spPr>
+          <a:xfrm>
+            <a:off x="685800" y="4407408"/>
+            <a:ext cx="4572000" cy="274320"/>
+          </a:xfrm>
+          <a:prstGeom prst="rect">
+            <a:avLst/>
+          </a:prstGeom>
+          <a:noFill/>
+          <a:ln/>
+        </p:spPr>
+        <p:txBody>
+          <a:bodyPr wrap="square" rtlCol="0" anchor="ctr"/>
           <a:lstStyle/>
           <a:p>
             <a:pPr indent="0" marL="0">
               <a:buNone/>
             </a:pPr>
             <a:r>
-              <a:rPr lang="en-US" sz="3400" b="1" dirty="0">
-                <a:solidFill>
-                  <a:srgbClr val="FFFFFF"/>
-                </a:solidFill>
+              <a:rPr lang="en-US" sz="1050" spc="120" kern="0" dirty="0">
+                <a:solidFill>
+                  <a:srgbClr val="8894A0"/>
+                </a:solidFill>
+                <a:latin typeface="Corbel" pitchFamily="34" charset="0"/>
+                <a:ea typeface="Corbel" pitchFamily="34" charset="-122"/>
+                <a:cs typeface="Corbel" pitchFamily="34" charset="-120"/>
               </a:rPr>
-              <a:t>Quantitative Research Designs</a:t>
-            </a:r>
-            <a:endParaRPr lang="en-US" sz="3400" dirty="0"/>
-          </a:p>
-        </p:txBody>
-      </p:sp>
-      <p:sp>
-        <p:nvSpPr>
-          <p:cNvPr id="4" name="Text 2"/>
-          <p:cNvSpPr/>
-          <p:nvPr/>
-        </p:nvSpPr>
-        <p:spPr>
-          <a:xfrm>
-            <a:off x="548640" y="2788920"/>
-            <a:ext cx="6766560" cy="1188720"/>
-          </a:xfrm>
-          <a:prstGeom prst="rect">
-            <a:avLst/>
-          </a:prstGeom>
-          <a:noFill/>
-          <a:ln/>
-        </p:spPr>
-        <p:txBody>
-          <a:bodyPr wrap="square" rtlCol="0" anchor="t"/>
-          <a:lstStyle/>
-          <a:p>
-            <a:pPr indent="0" marL="0">
-              <a:lnSpc>
-                <a:spcPct val="120000"/>
-              </a:lnSpc>
-              <a:buNone/>
-            </a:pPr>
-            <a:r>
-              <a:rPr lang="en-US" sz="1400" dirty="0">
-                <a:solidFill>
-                  <a:srgbClr val="DCE7F5"/>
-                </a:solidFill>
-              </a:rPr>
-              <a:t>The main observational and experimental designs, what each can and cannot establish, and how to choose the weakest design that still answers your question honestly.</a:t>
-            </a:r>
-            <a:endParaRPr lang="en-US" sz="1400" dirty="0"/>
-          </a:p>
-        </p:txBody>
-      </p:sp>
-      <p:sp>
-        <p:nvSpPr>
-          <p:cNvPr id="5" name="Text 3"/>
-          <p:cNvSpPr/>
-          <p:nvPr/>
-        </p:nvSpPr>
-        <p:spPr>
-          <a:xfrm>
-            <a:off x="548640" y="4645152"/>
-            <a:ext cx="5486400" cy="365760"/>
-          </a:xfrm>
-          <a:prstGeom prst="rect">
-            <a:avLst/>
-          </a:prstGeom>
-          <a:noFill/>
-          <a:ln/>
-        </p:spPr>
-        <p:txBody>
-          <a:bodyPr wrap="square" rtlCol="0" anchor="ctr"/>
-          <a:lstStyle/>
-          <a:p>
-            <a:pPr indent="0" marL="0">
-              <a:buNone/>
-            </a:pPr>
-            <a:r>
-              <a:rPr lang="en-US" sz="1200" b="1" dirty="0">
-                <a:solidFill>
-                  <a:srgbClr val="FFFFFF"/>
-                </a:solidFill>
-              </a:rPr>
-              <a:t>Jesse Anak  ·  ICBB</a:t>
-            </a:r>
-            <a:endParaRPr lang="en-US" sz="1200" dirty="0"/>
+              <a:t>Jesse Anak   ·   ICBB</a:t>
+            </a:r>
+            <a:endParaRPr lang="en-US" sz="1050" dirty="0"/>
           </a:p>
         </p:txBody>
       </p:sp>
@@ -2728,8 +2749,8 @@
         </p:nvSpPr>
         <p:spPr>
           <a:xfrm>
-            <a:off x="502920" y="292608"/>
-            <a:ext cx="8046720" cy="228600"/>
+            <a:off x="566928" y="384048"/>
+            <a:ext cx="7772400" cy="237744"/>
           </a:xfrm>
           <a:prstGeom prst="rect">
             <a:avLst/>
@@ -2745,14 +2766,17 @@
               <a:buNone/>
             </a:pPr>
             <a:r>
-              <a:rPr lang="en-US" sz="1100" b="1" spc="150" kern="0" dirty="0">
-                <a:solidFill>
-                  <a:srgbClr val="0066CC"/>
-                </a:solidFill>
+              <a:rPr lang="en-US" sz="1000" spc="200" kern="0" dirty="0">
+                <a:solidFill>
+                  <a:srgbClr val="9A6A3C"/>
+                </a:solidFill>
+                <a:latin typeface="Corbel" pitchFamily="34" charset="0"/>
+                <a:ea typeface="Corbel" pitchFamily="34" charset="-122"/>
+                <a:cs typeface="Corbel" pitchFamily="34" charset="-120"/>
               </a:rPr>
               <a:t>UNIT 5</a:t>
             </a:r>
-            <a:endParaRPr lang="en-US" sz="1100" dirty="0"/>
+            <a:endParaRPr lang="en-US" sz="1000" dirty="0"/>
           </a:p>
         </p:txBody>
       </p:sp>
@@ -2764,8 +2788,8 @@
         </p:nvSpPr>
         <p:spPr>
           <a:xfrm>
-            <a:off x="502920" y="548640"/>
-            <a:ext cx="8046720" cy="640080"/>
+            <a:off x="566928" y="658368"/>
+            <a:ext cx="7772400" cy="658368"/>
           </a:xfrm>
           <a:prstGeom prst="rect">
             <a:avLst/>
@@ -2778,30 +2802,56 @@
           <a:lstStyle/>
           <a:p>
             <a:pPr indent="0" marL="0">
+              <a:lnSpc>
+                <a:spcPct val="100000"/>
+              </a:lnSpc>
               <a:buNone/>
             </a:pPr>
             <a:r>
-              <a:rPr lang="en-US" sz="2400" b="1" dirty="0">
-                <a:solidFill>
-                  <a:srgbClr val="111827"/>
-                </a:solidFill>
+              <a:rPr lang="en-US" sz="2500" dirty="0">
+                <a:solidFill>
+                  <a:srgbClr val="1C3140"/>
+                </a:solidFill>
+                <a:latin typeface="Constantia" pitchFamily="34" charset="0"/>
+                <a:ea typeface="Constantia" pitchFamily="34" charset="-122"/>
+                <a:cs typeface="Constantia" pitchFamily="34" charset="-120"/>
               </a:rPr>
               <a:t>Quasi-experimental designs (2/2)</a:t>
             </a:r>
-            <a:endParaRPr lang="en-US" sz="2400" dirty="0"/>
-          </a:p>
-        </p:txBody>
-      </p:sp>
-      <p:sp>
-        <p:nvSpPr>
-          <p:cNvPr id="4" name="Text 2"/>
+            <a:endParaRPr lang="en-US" sz="2500" dirty="0"/>
+          </a:p>
+        </p:txBody>
+      </p:sp>
+      <p:sp>
+        <p:nvSpPr>
+          <p:cNvPr id="4" name="Shape 2"/>
           <p:cNvSpPr/>
           <p:nvPr/>
         </p:nvSpPr>
         <p:spPr>
           <a:xfrm>
-            <a:off x="685800" y="1325880"/>
-            <a:ext cx="7772400" cy="3200400"/>
+            <a:off x="566928" y="1335024"/>
+            <a:ext cx="566928" cy="20117"/>
+          </a:xfrm>
+          <a:prstGeom prst="rect">
+            <a:avLst/>
+          </a:prstGeom>
+          <a:solidFill>
+            <a:srgbClr val="9A6A3C"/>
+          </a:solidFill>
+          <a:ln/>
+        </p:spPr>
+      </p:sp>
+      <p:sp>
+        <p:nvSpPr>
+          <p:cNvPr id="5" name="Text 3"/>
+          <p:cNvSpPr/>
+          <p:nvPr/>
+        </p:nvSpPr>
+        <p:spPr>
+          <a:xfrm>
+            <a:off x="713232" y="1664208"/>
+            <a:ext cx="7498080" cy="2788920"/>
           </a:xfrm>
           <a:prstGeom prst="rect">
             <a:avLst/>
@@ -2815,19 +2865,22 @@
           <a:p>
             <a:pPr marL="342900" indent="-342900">
               <a:lnSpc>
-                <a:spcPct val="125000"/>
+                <a:spcPct val="130000"/>
               </a:lnSpc>
               <a:spcAft>
-                <a:spcPts val="800"/>
+                <a:spcPts val="1100"/>
               </a:spcAft>
               <a:buSzPct val="100000"/>
-              <a:buChar char="•"/>
+              <a:buChar char="–"/>
             </a:pPr>
             <a:r>
               <a:rPr lang="en-US" sz="1500" dirty="0">
                 <a:solidFill>
-                  <a:srgbClr val="374151"/>
-                </a:solidFill>
+                  <a:srgbClr val="23282E"/>
+                </a:solidFill>
+                <a:latin typeface="Corbel" pitchFamily="34" charset="0"/>
+                <a:ea typeface="Corbel" pitchFamily="34" charset="-122"/>
+                <a:cs typeface="Corbel" pitchFamily="34" charset="-120"/>
               </a:rPr>
               <a:t>Stepped wedge — all clusters eventually receive the intervention, in a randomised order; ethically attractive for programme rollout</a:t>
             </a:r>
@@ -2836,19 +2889,22 @@
           <a:p>
             <a:pPr marL="342900" indent="-342900">
               <a:lnSpc>
-                <a:spcPct val="125000"/>
+                <a:spcPct val="130000"/>
               </a:lnSpc>
               <a:spcAft>
-                <a:spcPts val="800"/>
+                <a:spcPts val="1100"/>
               </a:spcAft>
               <a:buSzPct val="100000"/>
-              <a:buChar char="•"/>
+              <a:buChar char="–"/>
             </a:pPr>
             <a:r>
               <a:rPr lang="en-US" sz="1500" dirty="0">
                 <a:solidFill>
-                  <a:srgbClr val="374151"/>
-                </a:solidFill>
+                  <a:srgbClr val="23282E"/>
+                </a:solidFill>
+                <a:latin typeface="Corbel" pitchFamily="34" charset="0"/>
+                <a:ea typeface="Corbel" pitchFamily="34" charset="-122"/>
+                <a:cs typeface="Corbel" pitchFamily="34" charset="-120"/>
               </a:rPr>
               <a:t>These designs support weaker causal claims and must state the residual threats explicitly</a:t>
             </a:r>
@@ -2868,8 +2924,8 @@
         </p:nvSpPr>
         <p:spPr>
           <a:xfrm>
-            <a:off x="8503920" y="4709160"/>
-            <a:ext cx="800000" cy="300000"/>
+            <a:off x="566928" y="4700016"/>
+            <a:ext cx="914400" cy="274320"/>
           </a:xfrm>
           <a:prstGeom prst="rect">
             <a:avLst/>
@@ -2884,10 +2940,13 @@
           <a:bodyPr/>
           <a:lstStyle>
             <a:lvl1pPr>
-              <a:defRPr sz="1000">
-                <a:solidFill>
-                  <a:srgbClr val="6B7280"/>
-                </a:solidFill>
+              <a:defRPr sz="900">
+                <a:solidFill>
+                  <a:srgbClr val="5F6B76"/>
+                </a:solidFill>
+                <a:latin typeface="Corbel"/>
+                <a:ea typeface="Corbel"/>
+                <a:cs typeface="Corbel"/>
               </a:defRPr>
             </a:lvl1pPr>
           </a:lstStyle>
@@ -2934,8 +2993,8 @@
         </p:nvSpPr>
         <p:spPr>
           <a:xfrm>
-            <a:off x="502920" y="292608"/>
-            <a:ext cx="8046720" cy="228600"/>
+            <a:off x="566928" y="384048"/>
+            <a:ext cx="7772400" cy="237744"/>
           </a:xfrm>
           <a:prstGeom prst="rect">
             <a:avLst/>
@@ -2951,14 +3010,17 @@
               <a:buNone/>
             </a:pPr>
             <a:r>
-              <a:rPr lang="en-US" sz="1100" b="1" spc="150" kern="0" dirty="0">
-                <a:solidFill>
-                  <a:srgbClr val="0066CC"/>
-                </a:solidFill>
+              <a:rPr lang="en-US" sz="1000" spc="200" kern="0" dirty="0">
+                <a:solidFill>
+                  <a:srgbClr val="9A6A3C"/>
+                </a:solidFill>
+                <a:latin typeface="Corbel" pitchFamily="34" charset="0"/>
+                <a:ea typeface="Corbel" pitchFamily="34" charset="-122"/>
+                <a:cs typeface="Corbel" pitchFamily="34" charset="-120"/>
               </a:rPr>
               <a:t>UNIT 5</a:t>
             </a:r>
-            <a:endParaRPr lang="en-US" sz="1100" dirty="0"/>
+            <a:endParaRPr lang="en-US" sz="1000" dirty="0"/>
           </a:p>
         </p:txBody>
       </p:sp>
@@ -2970,8 +3032,8 @@
         </p:nvSpPr>
         <p:spPr>
           <a:xfrm>
-            <a:off x="502920" y="548640"/>
-            <a:ext cx="8046720" cy="640080"/>
+            <a:off x="566928" y="658368"/>
+            <a:ext cx="7772400" cy="658368"/>
           </a:xfrm>
           <a:prstGeom prst="rect">
             <a:avLst/>
@@ -2984,30 +3046,56 @@
           <a:lstStyle/>
           <a:p>
             <a:pPr indent="0" marL="0">
+              <a:lnSpc>
+                <a:spcPct val="100000"/>
+              </a:lnSpc>
               <a:buNone/>
             </a:pPr>
             <a:r>
-              <a:rPr lang="en-US" sz="2400" b="1" dirty="0">
-                <a:solidFill>
-                  <a:srgbClr val="111827"/>
-                </a:solidFill>
+              <a:rPr lang="en-US" sz="2500" dirty="0">
+                <a:solidFill>
+                  <a:srgbClr val="1C3140"/>
+                </a:solidFill>
+                <a:latin typeface="Constantia" pitchFamily="34" charset="0"/>
+                <a:ea typeface="Constantia" pitchFamily="34" charset="-122"/>
+                <a:cs typeface="Constantia" pitchFamily="34" charset="-120"/>
               </a:rPr>
               <a:t>Causation and bias (1/2)</a:t>
             </a:r>
-            <a:endParaRPr lang="en-US" sz="2400" dirty="0"/>
-          </a:p>
-        </p:txBody>
-      </p:sp>
-      <p:sp>
-        <p:nvSpPr>
-          <p:cNvPr id="4" name="Text 2"/>
+            <a:endParaRPr lang="en-US" sz="2500" dirty="0"/>
+          </a:p>
+        </p:txBody>
+      </p:sp>
+      <p:sp>
+        <p:nvSpPr>
+          <p:cNvPr id="4" name="Shape 2"/>
           <p:cNvSpPr/>
           <p:nvPr/>
         </p:nvSpPr>
         <p:spPr>
           <a:xfrm>
-            <a:off x="685800" y="1325880"/>
-            <a:ext cx="7772400" cy="3200400"/>
+            <a:off x="566928" y="1335024"/>
+            <a:ext cx="566928" cy="20117"/>
+          </a:xfrm>
+          <a:prstGeom prst="rect">
+            <a:avLst/>
+          </a:prstGeom>
+          <a:solidFill>
+            <a:srgbClr val="9A6A3C"/>
+          </a:solidFill>
+          <a:ln/>
+        </p:spPr>
+      </p:sp>
+      <p:sp>
+        <p:nvSpPr>
+          <p:cNvPr id="5" name="Text 3"/>
+          <p:cNvSpPr/>
+          <p:nvPr/>
+        </p:nvSpPr>
+        <p:spPr>
+          <a:xfrm>
+            <a:off x="713232" y="1664208"/>
+            <a:ext cx="7498080" cy="2788920"/>
           </a:xfrm>
           <a:prstGeom prst="rect">
             <a:avLst/>
@@ -3021,86 +3109,98 @@
           <a:p>
             <a:pPr marL="342900" indent="-342900">
               <a:lnSpc>
-                <a:spcPct val="125000"/>
+                <a:spcPct val="130000"/>
               </a:lnSpc>
               <a:spcAft>
-                <a:spcPts val="800"/>
+                <a:spcPts val="1100"/>
               </a:spcAft>
               <a:buSzPct val="100000"/>
-              <a:buChar char="•"/>
+              <a:buChar char="–"/>
             </a:pPr>
             <a:r>
-              <a:rPr lang="en-US" sz="1300" dirty="0">
-                <a:solidFill>
-                  <a:srgbClr val="374151"/>
-                </a:solidFill>
+              <a:rPr lang="en-US" sz="1350" dirty="0">
+                <a:solidFill>
+                  <a:srgbClr val="23282E"/>
+                </a:solidFill>
+                <a:latin typeface="Corbel" pitchFamily="34" charset="0"/>
+                <a:ea typeface="Corbel" pitchFamily="34" charset="-122"/>
+                <a:cs typeface="Corbel" pitchFamily="34" charset="-120"/>
               </a:rPr>
               <a:t>Association is necessary but not sufficient for causation</a:t>
             </a:r>
-            <a:endParaRPr lang="en-US" sz="1300" dirty="0"/>
+            <a:endParaRPr lang="en-US" sz="1350" dirty="0"/>
           </a:p>
           <a:p>
             <a:pPr marL="342900" indent="-342900">
               <a:lnSpc>
-                <a:spcPct val="125000"/>
+                <a:spcPct val="130000"/>
               </a:lnSpc>
               <a:spcAft>
-                <a:spcPts val="800"/>
+                <a:spcPts val="1100"/>
               </a:spcAft>
               <a:buSzPct val="100000"/>
-              <a:buChar char="•"/>
+              <a:buChar char="–"/>
             </a:pPr>
             <a:r>
-              <a:rPr lang="en-US" sz="1300" dirty="0">
-                <a:solidFill>
-                  <a:srgbClr val="374151"/>
-                </a:solidFill>
+              <a:rPr lang="en-US" sz="1350" dirty="0">
+                <a:solidFill>
+                  <a:srgbClr val="23282E"/>
+                </a:solidFill>
+                <a:latin typeface="Corbel" pitchFamily="34" charset="0"/>
+                <a:ea typeface="Corbel" pitchFamily="34" charset="-122"/>
+                <a:cs typeface="Corbel" pitchFamily="34" charset="-120"/>
               </a:rPr>
               <a:t>The Bradford Hill considerations — strength, consistency, temporality, biological gradient, plausibility and others — aid judgement but prove nothing individually</a:t>
             </a:r>
-            <a:endParaRPr lang="en-US" sz="1300" dirty="0"/>
+            <a:endParaRPr lang="en-US" sz="1350" dirty="0"/>
           </a:p>
           <a:p>
             <a:pPr marL="342900" indent="-342900">
               <a:lnSpc>
-                <a:spcPct val="125000"/>
+                <a:spcPct val="130000"/>
               </a:lnSpc>
               <a:spcAft>
-                <a:spcPts val="800"/>
+                <a:spcPts val="1100"/>
               </a:spcAft>
               <a:buSzPct val="100000"/>
-              <a:buChar char="•"/>
+              <a:buChar char="–"/>
             </a:pPr>
             <a:r>
-              <a:rPr lang="en-US" sz="1300" dirty="0">
-                <a:solidFill>
-                  <a:srgbClr val="374151"/>
-                </a:solidFill>
+              <a:rPr lang="en-US" sz="1350" dirty="0">
+                <a:solidFill>
+                  <a:srgbClr val="23282E"/>
+                </a:solidFill>
+                <a:latin typeface="Corbel" pitchFamily="34" charset="0"/>
+                <a:ea typeface="Corbel" pitchFamily="34" charset="-122"/>
+                <a:cs typeface="Corbel" pitchFamily="34" charset="-120"/>
               </a:rPr>
               <a:t>Temporality is the only genuinely necessary condition: the cause must precede the effect</a:t>
             </a:r>
-            <a:endParaRPr lang="en-US" sz="1300" dirty="0"/>
+            <a:endParaRPr lang="en-US" sz="1350" dirty="0"/>
           </a:p>
           <a:p>
             <a:pPr marL="342900" indent="-342900">
               <a:lnSpc>
-                <a:spcPct val="125000"/>
+                <a:spcPct val="130000"/>
               </a:lnSpc>
               <a:spcAft>
-                <a:spcPts val="800"/>
+                <a:spcPts val="1100"/>
               </a:spcAft>
               <a:buSzPct val="100000"/>
-              <a:buChar char="•"/>
+              <a:buChar char="–"/>
             </a:pPr>
             <a:r>
-              <a:rPr lang="en-US" sz="1300" dirty="0">
-                <a:solidFill>
-                  <a:srgbClr val="374151"/>
-                </a:solidFill>
+              <a:rPr lang="en-US" sz="1350" dirty="0">
+                <a:solidFill>
+                  <a:srgbClr val="23282E"/>
+                </a:solidFill>
+                <a:latin typeface="Corbel" pitchFamily="34" charset="0"/>
+                <a:ea typeface="Corbel" pitchFamily="34" charset="-122"/>
+                <a:cs typeface="Corbel" pitchFamily="34" charset="-120"/>
               </a:rPr>
               <a:t>Selection bias arises when those included differ systematically from those not included</a:t>
             </a:r>
-            <a:endParaRPr lang="en-US" sz="1300" dirty="0"/>
+            <a:endParaRPr lang="en-US" sz="1350" dirty="0"/>
           </a:p>
         </p:txBody>
       </p:sp>
@@ -3116,8 +3216,8 @@
         </p:nvSpPr>
         <p:spPr>
           <a:xfrm>
-            <a:off x="8503920" y="4709160"/>
-            <a:ext cx="800000" cy="300000"/>
+            <a:off x="566928" y="4700016"/>
+            <a:ext cx="914400" cy="274320"/>
           </a:xfrm>
           <a:prstGeom prst="rect">
             <a:avLst/>
@@ -3132,10 +3232,13 @@
           <a:bodyPr/>
           <a:lstStyle>
             <a:lvl1pPr>
-              <a:defRPr sz="1000">
-                <a:solidFill>
-                  <a:srgbClr val="6B7280"/>
-                </a:solidFill>
+              <a:defRPr sz="900">
+                <a:solidFill>
+                  <a:srgbClr val="5F6B76"/>
+                </a:solidFill>
+                <a:latin typeface="Corbel"/>
+                <a:ea typeface="Corbel"/>
+                <a:cs typeface="Corbel"/>
               </a:defRPr>
             </a:lvl1pPr>
           </a:lstStyle>
@@ -3182,8 +3285,8 @@
         </p:nvSpPr>
         <p:spPr>
           <a:xfrm>
-            <a:off x="502920" y="292608"/>
-            <a:ext cx="8046720" cy="228600"/>
+            <a:off x="566928" y="384048"/>
+            <a:ext cx="7772400" cy="237744"/>
           </a:xfrm>
           <a:prstGeom prst="rect">
             <a:avLst/>
@@ -3199,14 +3302,17 @@
               <a:buNone/>
             </a:pPr>
             <a:r>
-              <a:rPr lang="en-US" sz="1100" b="1" spc="150" kern="0" dirty="0">
-                <a:solidFill>
-                  <a:srgbClr val="0066CC"/>
-                </a:solidFill>
+              <a:rPr lang="en-US" sz="1000" spc="200" kern="0" dirty="0">
+                <a:solidFill>
+                  <a:srgbClr val="9A6A3C"/>
+                </a:solidFill>
+                <a:latin typeface="Corbel" pitchFamily="34" charset="0"/>
+                <a:ea typeface="Corbel" pitchFamily="34" charset="-122"/>
+                <a:cs typeface="Corbel" pitchFamily="34" charset="-120"/>
               </a:rPr>
               <a:t>UNIT 5</a:t>
             </a:r>
-            <a:endParaRPr lang="en-US" sz="1100" dirty="0"/>
+            <a:endParaRPr lang="en-US" sz="1000" dirty="0"/>
           </a:p>
         </p:txBody>
       </p:sp>
@@ -3218,8 +3324,8 @@
         </p:nvSpPr>
         <p:spPr>
           <a:xfrm>
-            <a:off x="502920" y="548640"/>
-            <a:ext cx="8046720" cy="640080"/>
+            <a:off x="566928" y="658368"/>
+            <a:ext cx="7772400" cy="658368"/>
           </a:xfrm>
           <a:prstGeom prst="rect">
             <a:avLst/>
@@ -3232,30 +3338,56 @@
           <a:lstStyle/>
           <a:p>
             <a:pPr indent="0" marL="0">
+              <a:lnSpc>
+                <a:spcPct val="100000"/>
+              </a:lnSpc>
               <a:buNone/>
             </a:pPr>
             <a:r>
-              <a:rPr lang="en-US" sz="2400" b="1" dirty="0">
-                <a:solidFill>
-                  <a:srgbClr val="111827"/>
-                </a:solidFill>
+              <a:rPr lang="en-US" sz="2500" dirty="0">
+                <a:solidFill>
+                  <a:srgbClr val="1C3140"/>
+                </a:solidFill>
+                <a:latin typeface="Constantia" pitchFamily="34" charset="0"/>
+                <a:ea typeface="Constantia" pitchFamily="34" charset="-122"/>
+                <a:cs typeface="Constantia" pitchFamily="34" charset="-120"/>
               </a:rPr>
               <a:t>Causation and bias (2/2)</a:t>
             </a:r>
-            <a:endParaRPr lang="en-US" sz="2400" dirty="0"/>
-          </a:p>
-        </p:txBody>
-      </p:sp>
-      <p:sp>
-        <p:nvSpPr>
-          <p:cNvPr id="4" name="Text 2"/>
+            <a:endParaRPr lang="en-US" sz="2500" dirty="0"/>
+          </a:p>
+        </p:txBody>
+      </p:sp>
+      <p:sp>
+        <p:nvSpPr>
+          <p:cNvPr id="4" name="Shape 2"/>
           <p:cNvSpPr/>
           <p:nvPr/>
         </p:nvSpPr>
         <p:spPr>
           <a:xfrm>
-            <a:off x="685800" y="1325880"/>
-            <a:ext cx="7772400" cy="3200400"/>
+            <a:off x="566928" y="1335024"/>
+            <a:ext cx="566928" cy="20117"/>
+          </a:xfrm>
+          <a:prstGeom prst="rect">
+            <a:avLst/>
+          </a:prstGeom>
+          <a:solidFill>
+            <a:srgbClr val="9A6A3C"/>
+          </a:solidFill>
+          <a:ln/>
+        </p:spPr>
+      </p:sp>
+      <p:sp>
+        <p:nvSpPr>
+          <p:cNvPr id="5" name="Text 3"/>
+          <p:cNvSpPr/>
+          <p:nvPr/>
+        </p:nvSpPr>
+        <p:spPr>
+          <a:xfrm>
+            <a:off x="713232" y="1664208"/>
+            <a:ext cx="7498080" cy="2788920"/>
           </a:xfrm>
           <a:prstGeom prst="rect">
             <a:avLst/>
@@ -3269,19 +3401,22 @@
           <a:p>
             <a:pPr marL="342900" indent="-342900">
               <a:lnSpc>
-                <a:spcPct val="125000"/>
+                <a:spcPct val="130000"/>
               </a:lnSpc>
               <a:spcAft>
-                <a:spcPts val="800"/>
+                <a:spcPts val="1100"/>
               </a:spcAft>
               <a:buSzPct val="100000"/>
-              <a:buChar char="•"/>
+              <a:buChar char="–"/>
             </a:pPr>
             <a:r>
               <a:rPr lang="en-US" sz="1500" dirty="0">
                 <a:solidFill>
-                  <a:srgbClr val="374151"/>
-                </a:solidFill>
+                  <a:srgbClr val="23282E"/>
+                </a:solidFill>
+                <a:latin typeface="Corbel" pitchFamily="34" charset="0"/>
+                <a:ea typeface="Corbel" pitchFamily="34" charset="-122"/>
+                <a:cs typeface="Corbel" pitchFamily="34" charset="-120"/>
               </a:rPr>
               <a:t>Information bias arises from measurement error — including recall bias and interviewer bias</a:t>
             </a:r>
@@ -3290,19 +3425,22 @@
           <a:p>
             <a:pPr marL="342900" indent="-342900">
               <a:lnSpc>
-                <a:spcPct val="125000"/>
+                <a:spcPct val="130000"/>
               </a:lnSpc>
               <a:spcAft>
-                <a:spcPts val="800"/>
+                <a:spcPts val="1100"/>
               </a:spcAft>
               <a:buSzPct val="100000"/>
-              <a:buChar char="•"/>
+              <a:buChar char="–"/>
             </a:pPr>
             <a:r>
               <a:rPr lang="en-US" sz="1500" dirty="0">
                 <a:solidFill>
-                  <a:srgbClr val="374151"/>
-                </a:solidFill>
+                  <a:srgbClr val="23282E"/>
+                </a:solidFill>
+                <a:latin typeface="Corbel" pitchFamily="34" charset="0"/>
+                <a:ea typeface="Corbel" pitchFamily="34" charset="-122"/>
+                <a:cs typeface="Corbel" pitchFamily="34" charset="-120"/>
               </a:rPr>
               <a:t>Confounding arises when a third variable explains the apparent relationship</a:t>
             </a:r>
@@ -3311,19 +3449,22 @@
           <a:p>
             <a:pPr marL="342900" indent="-342900">
               <a:lnSpc>
-                <a:spcPct val="125000"/>
+                <a:spcPct val="130000"/>
               </a:lnSpc>
               <a:spcAft>
-                <a:spcPts val="800"/>
+                <a:spcPts val="1100"/>
               </a:spcAft>
               <a:buSzPct val="100000"/>
-              <a:buChar char="•"/>
+              <a:buChar char="–"/>
             </a:pPr>
             <a:r>
               <a:rPr lang="en-US" sz="1500" dirty="0">
                 <a:solidFill>
-                  <a:srgbClr val="374151"/>
-                </a:solidFill>
+                  <a:srgbClr val="23282E"/>
+                </a:solidFill>
+                <a:latin typeface="Corbel" pitchFamily="34" charset="0"/>
+                <a:ea typeface="Corbel" pitchFamily="34" charset="-122"/>
+                <a:cs typeface="Corbel" pitchFamily="34" charset="-120"/>
               </a:rPr>
               <a:t>Confounding can be handled by design (randomisation, restriction, matching) or by analysis (stratification, regression adjustment)</a:t>
             </a:r>
@@ -3343,8 +3484,8 @@
         </p:nvSpPr>
         <p:spPr>
           <a:xfrm>
-            <a:off x="8503920" y="4709160"/>
-            <a:ext cx="800000" cy="300000"/>
+            <a:off x="566928" y="4700016"/>
+            <a:ext cx="914400" cy="274320"/>
           </a:xfrm>
           <a:prstGeom prst="rect">
             <a:avLst/>
@@ -3359,10 +3500,13 @@
           <a:bodyPr/>
           <a:lstStyle>
             <a:lvl1pPr>
-              <a:defRPr sz="1000">
-                <a:solidFill>
-                  <a:srgbClr val="6B7280"/>
-                </a:solidFill>
+              <a:defRPr sz="900">
+                <a:solidFill>
+                  <a:srgbClr val="5F6B76"/>
+                </a:solidFill>
+                <a:latin typeface="Corbel"/>
+                <a:ea typeface="Corbel"/>
+                <a:cs typeface="Corbel"/>
               </a:defRPr>
             </a:lvl1pPr>
           </a:lstStyle>
@@ -3409,8 +3553,8 @@
         </p:nvSpPr>
         <p:spPr>
           <a:xfrm>
-            <a:off x="502920" y="292608"/>
-            <a:ext cx="8046720" cy="228600"/>
+            <a:off x="566928" y="384048"/>
+            <a:ext cx="7772400" cy="237744"/>
           </a:xfrm>
           <a:prstGeom prst="rect">
             <a:avLst/>
@@ -3426,14 +3570,17 @@
               <a:buNone/>
             </a:pPr>
             <a:r>
-              <a:rPr lang="en-US" sz="1100" b="1" spc="150" kern="0" dirty="0">
-                <a:solidFill>
-                  <a:srgbClr val="00A86B"/>
-                </a:solidFill>
+              <a:rPr lang="en-US" sz="1000" spc="200" kern="0" dirty="0">
+                <a:solidFill>
+                  <a:srgbClr val="9A6A3C"/>
+                </a:solidFill>
+                <a:latin typeface="Corbel" pitchFamily="34" charset="0"/>
+                <a:ea typeface="Corbel" pitchFamily="34" charset="-122"/>
+                <a:cs typeface="Corbel" pitchFamily="34" charset="-120"/>
               </a:rPr>
               <a:t>UNIT 5  ·  WORKED EXAMPLE</a:t>
             </a:r>
-            <a:endParaRPr lang="en-US" sz="1100" dirty="0"/>
+            <a:endParaRPr lang="en-US" sz="1000" dirty="0"/>
           </a:p>
         </p:txBody>
       </p:sp>
@@ -3445,8 +3592,8 @@
         </p:nvSpPr>
         <p:spPr>
           <a:xfrm>
-            <a:off x="502920" y="548640"/>
-            <a:ext cx="8046720" cy="566928"/>
+            <a:off x="566928" y="658368"/>
+            <a:ext cx="7772400" cy="658368"/>
           </a:xfrm>
           <a:prstGeom prst="rect">
             <a:avLst/>
@@ -3459,17 +3606,23 @@
           <a:lstStyle/>
           <a:p>
             <a:pPr indent="0" marL="0">
+              <a:lnSpc>
+                <a:spcPct val="100000"/>
+              </a:lnSpc>
               <a:buNone/>
             </a:pPr>
             <a:r>
-              <a:rPr lang="en-US" sz="2300" b="1" dirty="0">
-                <a:solidFill>
-                  <a:srgbClr val="111827"/>
-                </a:solidFill>
+              <a:rPr lang="en-US" sz="2500" dirty="0">
+                <a:solidFill>
+                  <a:srgbClr val="1C3140"/>
+                </a:solidFill>
+                <a:latin typeface="Constantia" pitchFamily="34" charset="0"/>
+                <a:ea typeface="Constantia" pitchFamily="34" charset="-122"/>
+                <a:cs typeface="Constantia" pitchFamily="34" charset="-120"/>
               </a:rPr>
               <a:t>One question, four designs, four different answers</a:t>
             </a:r>
-            <a:endParaRPr lang="en-US" sz="2300" dirty="0"/>
+            <a:endParaRPr lang="en-US" sz="2500" dirty="0"/>
           </a:p>
         </p:txBody>
       </p:sp>
@@ -3481,21 +3634,16 @@
         </p:nvSpPr>
         <p:spPr>
           <a:xfrm>
-            <a:off x="502920" y="1207008"/>
-            <a:ext cx="8138160" cy="3200400"/>
+            <a:off x="566928" y="1335024"/>
+            <a:ext cx="566928" cy="20117"/>
           </a:xfrm>
           <a:prstGeom prst="rect">
             <a:avLst/>
           </a:prstGeom>
           <a:solidFill>
-            <a:srgbClr val="F3F7FC"/>
+            <a:srgbClr val="9A6A3C"/>
           </a:solidFill>
-          <a:ln w="9525">
-            <a:solidFill>
-              <a:srgbClr val="0066CC"/>
-            </a:solidFill>
-            <a:prstDash val="solid"/>
-          </a:ln>
+          <a:ln/>
         </p:spPr>
       </p:sp>
       <p:sp>
@@ -3506,8 +3654,8 @@
         </p:nvSpPr>
         <p:spPr>
           <a:xfrm>
-            <a:off x="731520" y="1371600"/>
-            <a:ext cx="7680960" cy="1005840"/>
+            <a:off x="566928" y="1645920"/>
+            <a:ext cx="8010144" cy="822960"/>
           </a:xfrm>
           <a:prstGeom prst="rect">
             <a:avLst/>
@@ -3520,137 +3668,170 @@
           <a:lstStyle/>
           <a:p>
             <a:pPr indent="0" marL="0">
+              <a:lnSpc>
+                <a:spcPct val="124000"/>
+              </a:lnSpc>
+              <a:buNone/>
+            </a:pPr>
+            <a:r>
+              <a:rPr lang="en-US" sz="1300" i="1" dirty="0">
+                <a:solidFill>
+                  <a:srgbClr val="5F6B76"/>
+                </a:solidFill>
+                <a:latin typeface="Constantia" pitchFamily="34" charset="0"/>
+                <a:ea typeface="Constantia" pitchFamily="34" charset="-122"/>
+                <a:cs typeface="Constantia" pitchFamily="34" charset="-120"/>
+              </a:rPr>
+              <a:t>Does using an insecticide-treated net reduce malaria in under-fives? The design chosen changes what can honestly be claimed.</a:t>
+            </a:r>
+            <a:endParaRPr lang="en-US" sz="1300" dirty="0"/>
+          </a:p>
+        </p:txBody>
+      </p:sp>
+      <p:sp>
+        <p:nvSpPr>
+          <p:cNvPr id="6" name="Text 4"/>
+          <p:cNvSpPr/>
+          <p:nvPr/>
+        </p:nvSpPr>
+        <p:spPr>
+          <a:xfrm>
+            <a:off x="786384" y="2523744"/>
+            <a:ext cx="7406640" cy="1920240"/>
+          </a:xfrm>
+          <a:prstGeom prst="rect">
+            <a:avLst/>
+          </a:prstGeom>
+          <a:noFill/>
+          <a:ln/>
+        </p:spPr>
+        <p:txBody>
+          <a:bodyPr wrap="square" rtlCol="0" anchor="t"/>
+          <a:lstStyle/>
+          <a:p>
+            <a:pPr marL="342900" indent="-342900">
               <a:lnSpc>
                 <a:spcPct val="120000"/>
               </a:lnSpc>
-              <a:buNone/>
-            </a:pPr>
-            <a:r>
-              <a:rPr lang="en-US" sz="1400" i="1" dirty="0">
-                <a:solidFill>
-                  <a:srgbClr val="374151"/>
-                </a:solidFill>
-              </a:rPr>
-              <a:t>Does using an insecticide-treated net reduce malaria in under-fives? The design chosen changes what can honestly be claimed.</a:t>
-            </a:r>
-            <a:endParaRPr lang="en-US" sz="1400" dirty="0"/>
-          </a:p>
-        </p:txBody>
-      </p:sp>
-      <p:sp>
-        <p:nvSpPr>
-          <p:cNvPr id="6" name="Text 4"/>
-          <p:cNvSpPr/>
-          <p:nvPr/>
-        </p:nvSpPr>
-        <p:spPr>
-          <a:xfrm>
-            <a:off x="868680" y="2395728"/>
-            <a:ext cx="7452360" cy="1920240"/>
-          </a:xfrm>
-          <a:prstGeom prst="rect">
-            <a:avLst/>
-          </a:prstGeom>
-          <a:noFill/>
-          <a:ln/>
-        </p:spPr>
-        <p:txBody>
-          <a:bodyPr wrap="square" rtlCol="0" anchor="t"/>
-          <a:lstStyle/>
-          <a:p>
-            <a:pPr marL="342900" indent="-342900">
-              <a:lnSpc>
-                <a:spcPct val="115000"/>
-              </a:lnSpc>
+              <a:spcAft>
+                <a:spcPts val="500"/>
+              </a:spcAft>
               <a:buSzPct val="100000"/>
               <a:buFont typeface="+mj-lt"/>
               <a:buAutoNum type="arabicPeriod" startAt="1"/>
             </a:pPr>
             <a:r>
-              <a:rPr lang="en-US" sz="1300" dirty="0">
-                <a:solidFill>
-                  <a:srgbClr val="374151"/>
-                </a:solidFill>
+              <a:rPr lang="en-US" sz="1250" dirty="0">
+                <a:solidFill>
+                  <a:srgbClr val="23282E"/>
+                </a:solidFill>
+                <a:latin typeface="Corbel" pitchFamily="34" charset="0"/>
+                <a:ea typeface="Corbel" pitchFamily="34" charset="-122"/>
+                <a:cs typeface="Corbel" pitchFamily="34" charset="-120"/>
               </a:rPr>
               <a:t>Cross-sectional: survey households, record net use and current infection. Shows association only — sick children may have been given nets because they were sick.</a:t>
             </a:r>
-            <a:endParaRPr lang="en-US" sz="1300" dirty="0"/>
+            <a:endParaRPr lang="en-US" sz="1250" dirty="0"/>
           </a:p>
           <a:p>
             <a:pPr marL="342900" indent="-342900">
               <a:lnSpc>
-                <a:spcPct val="115000"/>
+                <a:spcPct val="120000"/>
               </a:lnSpc>
+              <a:spcAft>
+                <a:spcPts val="500"/>
+              </a:spcAft>
               <a:buSzPct val="100000"/>
               <a:buFont typeface="+mj-lt"/>
               <a:buAutoNum type="arabicPeriod" startAt="1"/>
             </a:pPr>
             <a:r>
-              <a:rPr lang="en-US" sz="1300" dirty="0">
-                <a:solidFill>
-                  <a:srgbClr val="374151"/>
-                </a:solidFill>
+              <a:rPr lang="en-US" sz="1250" dirty="0">
+                <a:solidFill>
+                  <a:srgbClr val="23282E"/>
+                </a:solidFill>
+                <a:latin typeface="Corbel" pitchFamily="34" charset="0"/>
+                <a:ea typeface="Corbel" pitchFamily="34" charset="-122"/>
+                <a:cs typeface="Corbel" pitchFamily="34" charset="-120"/>
               </a:rPr>
               <a:t>Case-control: take children with malaria and matched controls, ask about past net use. Efficient, but caregivers of sick children recall exposure differently (recall bias).</a:t>
             </a:r>
-            <a:endParaRPr lang="en-US" sz="1300" dirty="0"/>
+            <a:endParaRPr lang="en-US" sz="1250" dirty="0"/>
           </a:p>
           <a:p>
             <a:pPr marL="342900" indent="-342900">
               <a:lnSpc>
-                <a:spcPct val="115000"/>
+                <a:spcPct val="120000"/>
               </a:lnSpc>
+              <a:spcAft>
+                <a:spcPts val="500"/>
+              </a:spcAft>
               <a:buSzPct val="100000"/>
               <a:buFont typeface="+mj-lt"/>
               <a:buAutoNum type="arabicPeriod" startAt="1"/>
             </a:pPr>
             <a:r>
-              <a:rPr lang="en-US" sz="1300" dirty="0">
-                <a:solidFill>
-                  <a:srgbClr val="374151"/>
-                </a:solidFill>
+              <a:rPr lang="en-US" sz="1250" dirty="0">
+                <a:solidFill>
+                  <a:srgbClr val="23282E"/>
+                </a:solidFill>
+                <a:latin typeface="Corbel" pitchFamily="34" charset="0"/>
+                <a:ea typeface="Corbel" pitchFamily="34" charset="-122"/>
+                <a:cs typeface="Corbel" pitchFamily="34" charset="-120"/>
               </a:rPr>
               <a:t>Cohort: enrol net users and non-users, follow for a season. Establishes sequence, but families choosing nets differ from those who do not.</a:t>
             </a:r>
-            <a:endParaRPr lang="en-US" sz="1300" dirty="0"/>
+            <a:endParaRPr lang="en-US" sz="1250" dirty="0"/>
           </a:p>
           <a:p>
             <a:pPr marL="342900" indent="-342900">
               <a:lnSpc>
-                <a:spcPct val="115000"/>
+                <a:spcPct val="120000"/>
               </a:lnSpc>
+              <a:spcAft>
+                <a:spcPts val="500"/>
+              </a:spcAft>
               <a:buSzPct val="100000"/>
               <a:buFont typeface="+mj-lt"/>
               <a:buAutoNum type="arabicPeriod" startAt="1"/>
             </a:pPr>
             <a:r>
-              <a:rPr lang="en-US" sz="1300" dirty="0">
-                <a:solidFill>
-                  <a:srgbClr val="374151"/>
-                </a:solidFill>
+              <a:rPr lang="en-US" sz="1250" dirty="0">
+                <a:solidFill>
+                  <a:srgbClr val="23282E"/>
+                </a:solidFill>
+                <a:latin typeface="Corbel" pitchFamily="34" charset="0"/>
+                <a:ea typeface="Corbel" pitchFamily="34" charset="-122"/>
+                <a:cs typeface="Corbel" pitchFamily="34" charset="-120"/>
               </a:rPr>
               <a:t>Cluster-randomised trial: randomise villages to receive nets. Balances known and unknown confounders — and answers the causal question.</a:t>
             </a:r>
-            <a:endParaRPr lang="en-US" sz="1300" dirty="0"/>
+            <a:endParaRPr lang="en-US" sz="1250" dirty="0"/>
           </a:p>
           <a:p>
             <a:pPr marL="342900" indent="-342900">
               <a:lnSpc>
-                <a:spcPct val="115000"/>
+                <a:spcPct val="120000"/>
               </a:lnSpc>
+              <a:spcAft>
+                <a:spcPts val="500"/>
+              </a:spcAft>
               <a:buSzPct val="100000"/>
               <a:buFont typeface="+mj-lt"/>
               <a:buAutoNum type="arabicPeriod" startAt="1"/>
             </a:pPr>
             <a:r>
-              <a:rPr lang="en-US" sz="1300" dirty="0">
-                <a:solidFill>
-                  <a:srgbClr val="374151"/>
-                </a:solidFill>
+              <a:rPr lang="en-US" sz="1250" dirty="0">
+                <a:solidFill>
+                  <a:srgbClr val="23282E"/>
+                </a:solidFill>
+                <a:latin typeface="Corbel" pitchFamily="34" charset="0"/>
+                <a:ea typeface="Corbel" pitchFamily="34" charset="-122"/>
+                <a:cs typeface="Corbel" pitchFamily="34" charset="-120"/>
               </a:rPr>
               <a:t>The trial is strongest and also the slowest and most expensive; the cross-sectional study is fastest and answers least.</a:t>
             </a:r>
-            <a:endParaRPr lang="en-US" sz="1300" dirty="0"/>
+            <a:endParaRPr lang="en-US" sz="1250" dirty="0"/>
           </a:p>
         </p:txBody>
       </p:sp>
@@ -3666,8 +3847,8 @@
         </p:nvSpPr>
         <p:spPr>
           <a:xfrm>
-            <a:off x="8503920" y="4709160"/>
-            <a:ext cx="800000" cy="300000"/>
+            <a:off x="566928" y="4700016"/>
+            <a:ext cx="914400" cy="274320"/>
           </a:xfrm>
           <a:prstGeom prst="rect">
             <a:avLst/>
@@ -3682,10 +3863,13 @@
           <a:bodyPr/>
           <a:lstStyle>
             <a:lvl1pPr>
-              <a:defRPr sz="1000">
-                <a:solidFill>
-                  <a:srgbClr val="6B7280"/>
-                </a:solidFill>
+              <a:defRPr sz="900">
+                <a:solidFill>
+                  <a:srgbClr val="5F6B76"/>
+                </a:solidFill>
+                <a:latin typeface="Corbel"/>
+                <a:ea typeface="Corbel"/>
+                <a:cs typeface="Corbel"/>
               </a:defRPr>
             </a:lvl1pPr>
           </a:lstStyle>
@@ -3732,8 +3916,8 @@
         </p:nvSpPr>
         <p:spPr>
           <a:xfrm>
-            <a:off x="502920" y="292608"/>
-            <a:ext cx="8046720" cy="228600"/>
+            <a:off x="566928" y="384048"/>
+            <a:ext cx="7772400" cy="237744"/>
           </a:xfrm>
           <a:prstGeom prst="rect">
             <a:avLst/>
@@ -3749,14 +3933,17 @@
               <a:buNone/>
             </a:pPr>
             <a:r>
-              <a:rPr lang="en-US" sz="1100" b="1" spc="150" kern="0" dirty="0">
-                <a:solidFill>
-                  <a:srgbClr val="00A86B"/>
-                </a:solidFill>
+              <a:rPr lang="en-US" sz="1000" spc="200" kern="0" dirty="0">
+                <a:solidFill>
+                  <a:srgbClr val="9A6A3C"/>
+                </a:solidFill>
+                <a:latin typeface="Corbel" pitchFamily="34" charset="0"/>
+                <a:ea typeface="Corbel" pitchFamily="34" charset="-122"/>
+                <a:cs typeface="Corbel" pitchFamily="34" charset="-120"/>
               </a:rPr>
               <a:t>UNIT 5  ·  WORKED EXAMPLE</a:t>
             </a:r>
-            <a:endParaRPr lang="en-US" sz="1100" dirty="0"/>
+            <a:endParaRPr lang="en-US" sz="1000" dirty="0"/>
           </a:p>
         </p:txBody>
       </p:sp>
@@ -3768,8 +3955,8 @@
         </p:nvSpPr>
         <p:spPr>
           <a:xfrm>
-            <a:off x="502920" y="548640"/>
-            <a:ext cx="8046720" cy="566928"/>
+            <a:off x="566928" y="658368"/>
+            <a:ext cx="7772400" cy="658368"/>
           </a:xfrm>
           <a:prstGeom prst="rect">
             <a:avLst/>
@@ -3782,17 +3969,23 @@
           <a:lstStyle/>
           <a:p>
             <a:pPr indent="0" marL="0">
+              <a:lnSpc>
+                <a:spcPct val="100000"/>
+              </a:lnSpc>
               <a:buNone/>
             </a:pPr>
             <a:r>
-              <a:rPr lang="en-US" sz="2300" b="1" dirty="0">
-                <a:solidFill>
-                  <a:srgbClr val="111827"/>
-                </a:solidFill>
+              <a:rPr lang="en-US" sz="2500" dirty="0">
+                <a:solidFill>
+                  <a:srgbClr val="1C3140"/>
+                </a:solidFill>
+                <a:latin typeface="Constantia" pitchFamily="34" charset="0"/>
+                <a:ea typeface="Constantia" pitchFamily="34" charset="-122"/>
+                <a:cs typeface="Constantia" pitchFamily="34" charset="-120"/>
               </a:rPr>
               <a:t>Why per-protocol analysis quietly breaks a trial</a:t>
             </a:r>
-            <a:endParaRPr lang="en-US" sz="2300" dirty="0"/>
+            <a:endParaRPr lang="en-US" sz="2500" dirty="0"/>
           </a:p>
         </p:txBody>
       </p:sp>
@@ -3804,21 +3997,16 @@
         </p:nvSpPr>
         <p:spPr>
           <a:xfrm>
-            <a:off x="502920" y="1207008"/>
-            <a:ext cx="8138160" cy="3200400"/>
+            <a:off x="566928" y="1335024"/>
+            <a:ext cx="566928" cy="20117"/>
           </a:xfrm>
           <a:prstGeom prst="rect">
             <a:avLst/>
           </a:prstGeom>
           <a:solidFill>
-            <a:srgbClr val="F3F7FC"/>
+            <a:srgbClr val="9A6A3C"/>
           </a:solidFill>
-          <a:ln w="9525">
-            <a:solidFill>
-              <a:srgbClr val="0066CC"/>
-            </a:solidFill>
-            <a:prstDash val="solid"/>
-          </a:ln>
+          <a:ln/>
         </p:spPr>
       </p:sp>
       <p:sp>
@@ -3829,8 +4017,8 @@
         </p:nvSpPr>
         <p:spPr>
           <a:xfrm>
-            <a:off x="731520" y="1371600"/>
-            <a:ext cx="7680960" cy="1005840"/>
+            <a:off x="566928" y="1645920"/>
+            <a:ext cx="8010144" cy="822960"/>
           </a:xfrm>
           <a:prstGeom prst="rect">
             <a:avLst/>
@@ -3843,137 +4031,170 @@
           <a:lstStyle/>
           <a:p>
             <a:pPr indent="0" marL="0">
+              <a:lnSpc>
+                <a:spcPct val="124000"/>
+              </a:lnSpc>
+              <a:buNone/>
+            </a:pPr>
+            <a:r>
+              <a:rPr lang="en-US" sz="1300" i="1" dirty="0">
+                <a:solidFill>
+                  <a:srgbClr val="5F6B76"/>
+                </a:solidFill>
+                <a:latin typeface="Constantia" pitchFamily="34" charset="0"/>
+                <a:ea typeface="Constantia" pitchFamily="34" charset="-122"/>
+                <a:cs typeface="Constantia" pitchFamily="34" charset="-120"/>
+              </a:rPr>
+              <a:t>In a trial of a six-month TB treatment regimen, 15% of the intervention arm stopped taking the drug. The analyst proposes excluding them "so we measure the drug's true effect".</a:t>
+            </a:r>
+            <a:endParaRPr lang="en-US" sz="1300" dirty="0"/>
+          </a:p>
+        </p:txBody>
+      </p:sp>
+      <p:sp>
+        <p:nvSpPr>
+          <p:cNvPr id="6" name="Text 4"/>
+          <p:cNvSpPr/>
+          <p:nvPr/>
+        </p:nvSpPr>
+        <p:spPr>
+          <a:xfrm>
+            <a:off x="786384" y="2523744"/>
+            <a:ext cx="7406640" cy="1920240"/>
+          </a:xfrm>
+          <a:prstGeom prst="rect">
+            <a:avLst/>
+          </a:prstGeom>
+          <a:noFill/>
+          <a:ln/>
+        </p:spPr>
+        <p:txBody>
+          <a:bodyPr wrap="square" rtlCol="0" anchor="t"/>
+          <a:lstStyle/>
+          <a:p>
+            <a:pPr marL="342900" indent="-342900">
               <a:lnSpc>
                 <a:spcPct val="120000"/>
               </a:lnSpc>
-              <a:buNone/>
-            </a:pPr>
-            <a:r>
-              <a:rPr lang="en-US" sz="1400" i="1" dirty="0">
-                <a:solidFill>
-                  <a:srgbClr val="374151"/>
-                </a:solidFill>
-              </a:rPr>
-              <a:t>In a trial of a six-month TB treatment regimen, 15% of the intervention arm stopped taking the drug. The analyst proposes excluding them "so we measure the drug's true effect".</a:t>
-            </a:r>
-            <a:endParaRPr lang="en-US" sz="1400" dirty="0"/>
-          </a:p>
-        </p:txBody>
-      </p:sp>
-      <p:sp>
-        <p:nvSpPr>
-          <p:cNvPr id="6" name="Text 4"/>
-          <p:cNvSpPr/>
-          <p:nvPr/>
-        </p:nvSpPr>
-        <p:spPr>
-          <a:xfrm>
-            <a:off x="868680" y="2395728"/>
-            <a:ext cx="7452360" cy="1920240"/>
-          </a:xfrm>
-          <a:prstGeom prst="rect">
-            <a:avLst/>
-          </a:prstGeom>
-          <a:noFill/>
-          <a:ln/>
-        </p:spPr>
-        <p:txBody>
-          <a:bodyPr wrap="square" rtlCol="0" anchor="t"/>
-          <a:lstStyle/>
-          <a:p>
-            <a:pPr marL="342900" indent="-342900">
-              <a:lnSpc>
-                <a:spcPct val="115000"/>
-              </a:lnSpc>
+              <a:spcAft>
+                <a:spcPts val="500"/>
+              </a:spcAft>
               <a:buSzPct val="100000"/>
               <a:buFont typeface="+mj-lt"/>
               <a:buAutoNum type="arabicPeriod" startAt="1"/>
             </a:pPr>
             <a:r>
-              <a:rPr lang="en-US" sz="1300" dirty="0">
-                <a:solidFill>
-                  <a:srgbClr val="374151"/>
-                </a:solidFill>
+              <a:rPr lang="en-US" sz="1250" dirty="0">
+                <a:solidFill>
+                  <a:srgbClr val="23282E"/>
+                </a:solidFill>
+                <a:latin typeface="Corbel" pitchFamily="34" charset="0"/>
+                <a:ea typeface="Corbel" pitchFamily="34" charset="-122"/>
+                <a:cs typeface="Corbel" pitchFamily="34" charset="-120"/>
               </a:rPr>
               <a:t>Ask who stopped. Typically those with worse side effects, more advanced disease, or less social support.</a:t>
             </a:r>
-            <a:endParaRPr lang="en-US" sz="1300" dirty="0"/>
+            <a:endParaRPr lang="en-US" sz="1250" dirty="0"/>
           </a:p>
           <a:p>
             <a:pPr marL="342900" indent="-342900">
               <a:lnSpc>
-                <a:spcPct val="115000"/>
+                <a:spcPct val="120000"/>
               </a:lnSpc>
+              <a:spcAft>
+                <a:spcPts val="500"/>
+              </a:spcAft>
               <a:buSzPct val="100000"/>
               <a:buFont typeface="+mj-lt"/>
               <a:buAutoNum type="arabicPeriod" startAt="1"/>
             </a:pPr>
             <a:r>
-              <a:rPr lang="en-US" sz="1300" dirty="0">
-                <a:solidFill>
-                  <a:srgbClr val="374151"/>
-                </a:solidFill>
+              <a:rPr lang="en-US" sz="1250" dirty="0">
+                <a:solidFill>
+                  <a:srgbClr val="23282E"/>
+                </a:solidFill>
+                <a:latin typeface="Corbel" pitchFamily="34" charset="0"/>
+                <a:ea typeface="Corbel" pitchFamily="34" charset="-122"/>
+                <a:cs typeface="Corbel" pitchFamily="34" charset="-120"/>
               </a:rPr>
               <a:t>Those same characteristics predict worse outcomes independently of the drug.</a:t>
             </a:r>
-            <a:endParaRPr lang="en-US" sz="1300" dirty="0"/>
+            <a:endParaRPr lang="en-US" sz="1250" dirty="0"/>
           </a:p>
           <a:p>
             <a:pPr marL="342900" indent="-342900">
               <a:lnSpc>
-                <a:spcPct val="115000"/>
+                <a:spcPct val="120000"/>
               </a:lnSpc>
+              <a:spcAft>
+                <a:spcPts val="500"/>
+              </a:spcAft>
               <a:buSzPct val="100000"/>
               <a:buFont typeface="+mj-lt"/>
               <a:buAutoNum type="arabicPeriod" startAt="1"/>
             </a:pPr>
             <a:r>
-              <a:rPr lang="en-US" sz="1300" dirty="0">
-                <a:solidFill>
-                  <a:srgbClr val="374151"/>
-                </a:solidFill>
+              <a:rPr lang="en-US" sz="1250" dirty="0">
+                <a:solidFill>
+                  <a:srgbClr val="23282E"/>
+                </a:solidFill>
+                <a:latin typeface="Corbel" pitchFamily="34" charset="0"/>
+                <a:ea typeface="Corbel" pitchFamily="34" charset="-122"/>
+                <a:cs typeface="Corbel" pitchFamily="34" charset="-120"/>
               </a:rPr>
               <a:t>Removing them leaves a healthier intervention arm compared against an intact control arm.</a:t>
             </a:r>
-            <a:endParaRPr lang="en-US" sz="1300" dirty="0"/>
+            <a:endParaRPr lang="en-US" sz="1250" dirty="0"/>
           </a:p>
           <a:p>
             <a:pPr marL="342900" indent="-342900">
               <a:lnSpc>
-                <a:spcPct val="115000"/>
+                <a:spcPct val="120000"/>
               </a:lnSpc>
+              <a:spcAft>
+                <a:spcPts val="500"/>
+              </a:spcAft>
               <a:buSzPct val="100000"/>
               <a:buFont typeface="+mj-lt"/>
               <a:buAutoNum type="arabicPeriod" startAt="1"/>
             </a:pPr>
             <a:r>
-              <a:rPr lang="en-US" sz="1300" dirty="0">
-                <a:solidFill>
-                  <a:srgbClr val="374151"/>
-                </a:solidFill>
+              <a:rPr lang="en-US" sz="1250" dirty="0">
+                <a:solidFill>
+                  <a:srgbClr val="23282E"/>
+                </a:solidFill>
+                <a:latin typeface="Corbel" pitchFamily="34" charset="0"/>
+                <a:ea typeface="Corbel" pitchFamily="34" charset="-122"/>
+                <a:cs typeface="Corbel" pitchFamily="34" charset="-120"/>
               </a:rPr>
               <a:t>Randomisation guaranteed comparable groups at baseline; this exclusion destroys that guarantee.</a:t>
             </a:r>
-            <a:endParaRPr lang="en-US" sz="1300" dirty="0"/>
+            <a:endParaRPr lang="en-US" sz="1250" dirty="0"/>
           </a:p>
           <a:p>
             <a:pPr marL="342900" indent="-342900">
               <a:lnSpc>
-                <a:spcPct val="115000"/>
+                <a:spcPct val="120000"/>
               </a:lnSpc>
+              <a:spcAft>
+                <a:spcPts val="500"/>
+              </a:spcAft>
               <a:buSzPct val="100000"/>
               <a:buFont typeface="+mj-lt"/>
               <a:buAutoNum type="arabicPeriod" startAt="1"/>
             </a:pPr>
             <a:r>
-              <a:rPr lang="en-US" sz="1300" dirty="0">
-                <a:solidFill>
-                  <a:srgbClr val="374151"/>
-                </a:solidFill>
+              <a:rPr lang="en-US" sz="1250" dirty="0">
+                <a:solidFill>
+                  <a:srgbClr val="23282E"/>
+                </a:solidFill>
+                <a:latin typeface="Corbel" pitchFamily="34" charset="0"/>
+                <a:ea typeface="Corbel" pitchFamily="34" charset="-122"/>
+                <a:cs typeface="Corbel" pitchFamily="34" charset="-120"/>
               </a:rPr>
               <a:t>Intention to treat keeps everyone in the arm they were assigned, and answers the question a clinician actually faces: what happens if I prescribe this?</a:t>
             </a:r>
-            <a:endParaRPr lang="en-US" sz="1300" dirty="0"/>
+            <a:endParaRPr lang="en-US" sz="1250" dirty="0"/>
           </a:p>
         </p:txBody>
       </p:sp>
@@ -3989,8 +4210,8 @@
         </p:nvSpPr>
         <p:spPr>
           <a:xfrm>
-            <a:off x="8503920" y="4709160"/>
-            <a:ext cx="800000" cy="300000"/>
+            <a:off x="566928" y="4700016"/>
+            <a:ext cx="914400" cy="274320"/>
           </a:xfrm>
           <a:prstGeom prst="rect">
             <a:avLst/>
@@ -4005,10 +4226,13 @@
           <a:bodyPr/>
           <a:lstStyle>
             <a:lvl1pPr>
-              <a:defRPr sz="1000">
-                <a:solidFill>
-                  <a:srgbClr val="6B7280"/>
-                </a:solidFill>
+              <a:defRPr sz="900">
+                <a:solidFill>
+                  <a:srgbClr val="5F6B76"/>
+                </a:solidFill>
+                <a:latin typeface="Corbel"/>
+                <a:ea typeface="Corbel"/>
+                <a:cs typeface="Corbel"/>
               </a:defRPr>
             </a:lvl1pPr>
           </a:lstStyle>
@@ -4055,8 +4279,8 @@
         </p:nvSpPr>
         <p:spPr>
           <a:xfrm>
-            <a:off x="502920" y="292608"/>
-            <a:ext cx="8046720" cy="228600"/>
+            <a:off x="566928" y="384048"/>
+            <a:ext cx="7772400" cy="237744"/>
           </a:xfrm>
           <a:prstGeom prst="rect">
             <a:avLst/>
@@ -4072,14 +4296,17 @@
               <a:buNone/>
             </a:pPr>
             <a:r>
-              <a:rPr lang="en-US" sz="1100" b="1" spc="150" kern="0" dirty="0">
-                <a:solidFill>
-                  <a:srgbClr val="0066CC"/>
-                </a:solidFill>
+              <a:rPr lang="en-US" sz="1000" spc="200" kern="0" dirty="0">
+                <a:solidFill>
+                  <a:srgbClr val="9A6A3C"/>
+                </a:solidFill>
+                <a:latin typeface="Corbel" pitchFamily="34" charset="0"/>
+                <a:ea typeface="Corbel" pitchFamily="34" charset="-122"/>
+                <a:cs typeface="Corbel" pitchFamily="34" charset="-120"/>
               </a:rPr>
               <a:t>UNIT 5</a:t>
             </a:r>
-            <a:endParaRPr lang="en-US" sz="1100" dirty="0"/>
+            <a:endParaRPr lang="en-US" sz="1000" dirty="0"/>
           </a:p>
         </p:txBody>
       </p:sp>
@@ -4091,8 +4318,8 @@
         </p:nvSpPr>
         <p:spPr>
           <a:xfrm>
-            <a:off x="502920" y="548640"/>
-            <a:ext cx="8046720" cy="640080"/>
+            <a:off x="566928" y="658368"/>
+            <a:ext cx="7772400" cy="658368"/>
           </a:xfrm>
           <a:prstGeom prst="rect">
             <a:avLst/>
@@ -4105,30 +4332,56 @@
           <a:lstStyle/>
           <a:p>
             <a:pPr indent="0" marL="0">
+              <a:lnSpc>
+                <a:spcPct val="100000"/>
+              </a:lnSpc>
               <a:buNone/>
             </a:pPr>
             <a:r>
-              <a:rPr lang="en-US" sz="2400" b="1" dirty="0">
-                <a:solidFill>
-                  <a:srgbClr val="111827"/>
-                </a:solidFill>
+              <a:rPr lang="en-US" sz="2500" dirty="0">
+                <a:solidFill>
+                  <a:srgbClr val="1C3140"/>
+                </a:solidFill>
+                <a:latin typeface="Constantia" pitchFamily="34" charset="0"/>
+                <a:ea typeface="Constantia" pitchFamily="34" charset="-122"/>
+                <a:cs typeface="Constantia" pitchFamily="34" charset="-120"/>
               </a:rPr>
               <a:t>Key terms (1/2)</a:t>
             </a:r>
-            <a:endParaRPr lang="en-US" sz="2400" dirty="0"/>
-          </a:p>
-        </p:txBody>
-      </p:sp>
-      <p:sp>
-        <p:nvSpPr>
-          <p:cNvPr id="4" name="Text 2"/>
+            <a:endParaRPr lang="en-US" sz="2500" dirty="0"/>
+          </a:p>
+        </p:txBody>
+      </p:sp>
+      <p:sp>
+        <p:nvSpPr>
+          <p:cNvPr id="4" name="Shape 2"/>
           <p:cNvSpPr/>
           <p:nvPr/>
         </p:nvSpPr>
         <p:spPr>
           <a:xfrm>
-            <a:off x="685800" y="1325880"/>
-            <a:ext cx="7772400" cy="3200400"/>
+            <a:off x="566928" y="1335024"/>
+            <a:ext cx="566928" cy="20117"/>
+          </a:xfrm>
+          <a:prstGeom prst="rect">
+            <a:avLst/>
+          </a:prstGeom>
+          <a:solidFill>
+            <a:srgbClr val="9A6A3C"/>
+          </a:solidFill>
+          <a:ln/>
+        </p:spPr>
+      </p:sp>
+      <p:sp>
+        <p:nvSpPr>
+          <p:cNvPr id="5" name="Text 3"/>
+          <p:cNvSpPr/>
+          <p:nvPr/>
+        </p:nvSpPr>
+        <p:spPr>
+          <a:xfrm>
+            <a:off x="713232" y="1664208"/>
+            <a:ext cx="7498080" cy="2788920"/>
           </a:xfrm>
           <a:prstGeom prst="rect">
             <a:avLst/>
@@ -4142,19 +4395,22 @@
           <a:p>
             <a:pPr marL="342900" indent="-342900">
               <a:lnSpc>
-                <a:spcPct val="125000"/>
+                <a:spcPct val="130000"/>
               </a:lnSpc>
               <a:spcAft>
-                <a:spcPts val="800"/>
+                <a:spcPts val="1100"/>
               </a:spcAft>
               <a:buSzPct val="100000"/>
-              <a:buChar char="•"/>
+              <a:buChar char="–"/>
             </a:pPr>
             <a:r>
               <a:rPr lang="en-US" sz="1500" dirty="0">
                 <a:solidFill>
-                  <a:srgbClr val="374151"/>
-                </a:solidFill>
+                  <a:srgbClr val="23282E"/>
+                </a:solidFill>
+                <a:latin typeface="Corbel" pitchFamily="34" charset="0"/>
+                <a:ea typeface="Corbel" pitchFamily="34" charset="-122"/>
+                <a:cs typeface="Corbel" pitchFamily="34" charset="-120"/>
               </a:rPr>
               <a:t>Incidence — The rate of new cases arising in a population over a defined period.</a:t>
             </a:r>
@@ -4163,19 +4419,22 @@
           <a:p>
             <a:pPr marL="342900" indent="-342900">
               <a:lnSpc>
-                <a:spcPct val="125000"/>
+                <a:spcPct val="130000"/>
               </a:lnSpc>
               <a:spcAft>
-                <a:spcPts val="800"/>
+                <a:spcPts val="1100"/>
               </a:spcAft>
               <a:buSzPct val="100000"/>
-              <a:buChar char="•"/>
+              <a:buChar char="–"/>
             </a:pPr>
             <a:r>
               <a:rPr lang="en-US" sz="1500" dirty="0">
                 <a:solidFill>
-                  <a:srgbClr val="374151"/>
-                </a:solidFill>
+                  <a:srgbClr val="23282E"/>
+                </a:solidFill>
+                <a:latin typeface="Corbel" pitchFamily="34" charset="0"/>
+                <a:ea typeface="Corbel" pitchFamily="34" charset="-122"/>
+                <a:cs typeface="Corbel" pitchFamily="34" charset="-120"/>
               </a:rPr>
               <a:t>Prevalence — The proportion of a population having the condition at a point in time.</a:t>
             </a:r>
@@ -4184,19 +4443,22 @@
           <a:p>
             <a:pPr marL="342900" indent="-342900">
               <a:lnSpc>
-                <a:spcPct val="125000"/>
+                <a:spcPct val="130000"/>
               </a:lnSpc>
               <a:spcAft>
-                <a:spcPts val="800"/>
+                <a:spcPts val="1100"/>
               </a:spcAft>
               <a:buSzPct val="100000"/>
-              <a:buChar char="•"/>
+              <a:buChar char="–"/>
             </a:pPr>
             <a:r>
               <a:rPr lang="en-US" sz="1500" dirty="0">
                 <a:solidFill>
-                  <a:srgbClr val="374151"/>
-                </a:solidFill>
+                  <a:srgbClr val="23282E"/>
+                </a:solidFill>
+                <a:latin typeface="Corbel" pitchFamily="34" charset="0"/>
+                <a:ea typeface="Corbel" pitchFamily="34" charset="-122"/>
+                <a:cs typeface="Corbel" pitchFamily="34" charset="-120"/>
               </a:rPr>
               <a:t>Odds ratio — The ratio of the odds of exposure in cases to the odds in controls; the standard measure from case-control studies.</a:t>
             </a:r>
@@ -4205,19 +4467,22 @@
           <a:p>
             <a:pPr marL="342900" indent="-342900">
               <a:lnSpc>
-                <a:spcPct val="125000"/>
+                <a:spcPct val="130000"/>
               </a:lnSpc>
               <a:spcAft>
-                <a:spcPts val="800"/>
+                <a:spcPts val="1100"/>
               </a:spcAft>
               <a:buSzPct val="100000"/>
-              <a:buChar char="•"/>
+              <a:buChar char="–"/>
             </a:pPr>
             <a:r>
               <a:rPr lang="en-US" sz="1500" dirty="0">
                 <a:solidFill>
-                  <a:srgbClr val="374151"/>
-                </a:solidFill>
+                  <a:srgbClr val="23282E"/>
+                </a:solidFill>
+                <a:latin typeface="Corbel" pitchFamily="34" charset="0"/>
+                <a:ea typeface="Corbel" pitchFamily="34" charset="-122"/>
+                <a:cs typeface="Corbel" pitchFamily="34" charset="-120"/>
               </a:rPr>
               <a:t>Allocation concealment — Preventing those enrolling participants from knowing the upcoming assignment.</a:t>
             </a:r>
@@ -4237,8 +4502,8 @@
         </p:nvSpPr>
         <p:spPr>
           <a:xfrm>
-            <a:off x="8503920" y="4709160"/>
-            <a:ext cx="800000" cy="300000"/>
+            <a:off x="566928" y="4700016"/>
+            <a:ext cx="914400" cy="274320"/>
           </a:xfrm>
           <a:prstGeom prst="rect">
             <a:avLst/>
@@ -4253,10 +4518,13 @@
           <a:bodyPr/>
           <a:lstStyle>
             <a:lvl1pPr>
-              <a:defRPr sz="1000">
-                <a:solidFill>
-                  <a:srgbClr val="6B7280"/>
-                </a:solidFill>
+              <a:defRPr sz="900">
+                <a:solidFill>
+                  <a:srgbClr val="5F6B76"/>
+                </a:solidFill>
+                <a:latin typeface="Corbel"/>
+                <a:ea typeface="Corbel"/>
+                <a:cs typeface="Corbel"/>
               </a:defRPr>
             </a:lvl1pPr>
           </a:lstStyle>
@@ -4303,8 +4571,8 @@
         </p:nvSpPr>
         <p:spPr>
           <a:xfrm>
-            <a:off x="502920" y="292608"/>
-            <a:ext cx="8046720" cy="228600"/>
+            <a:off x="566928" y="384048"/>
+            <a:ext cx="7772400" cy="237744"/>
           </a:xfrm>
           <a:prstGeom prst="rect">
             <a:avLst/>
@@ -4320,14 +4588,17 @@
               <a:buNone/>
             </a:pPr>
             <a:r>
-              <a:rPr lang="en-US" sz="1100" b="1" spc="150" kern="0" dirty="0">
-                <a:solidFill>
-                  <a:srgbClr val="0066CC"/>
-                </a:solidFill>
+              <a:rPr lang="en-US" sz="1000" spc="200" kern="0" dirty="0">
+                <a:solidFill>
+                  <a:srgbClr val="9A6A3C"/>
+                </a:solidFill>
+                <a:latin typeface="Corbel" pitchFamily="34" charset="0"/>
+                <a:ea typeface="Corbel" pitchFamily="34" charset="-122"/>
+                <a:cs typeface="Corbel" pitchFamily="34" charset="-120"/>
               </a:rPr>
               <a:t>UNIT 5</a:t>
             </a:r>
-            <a:endParaRPr lang="en-US" sz="1100" dirty="0"/>
+            <a:endParaRPr lang="en-US" sz="1000" dirty="0"/>
           </a:p>
         </p:txBody>
       </p:sp>
@@ -4339,8 +4610,8 @@
         </p:nvSpPr>
         <p:spPr>
           <a:xfrm>
-            <a:off x="502920" y="548640"/>
-            <a:ext cx="8046720" cy="640080"/>
+            <a:off x="566928" y="658368"/>
+            <a:ext cx="7772400" cy="658368"/>
           </a:xfrm>
           <a:prstGeom prst="rect">
             <a:avLst/>
@@ -4353,30 +4624,56 @@
           <a:lstStyle/>
           <a:p>
             <a:pPr indent="0" marL="0">
+              <a:lnSpc>
+                <a:spcPct val="100000"/>
+              </a:lnSpc>
               <a:buNone/>
             </a:pPr>
             <a:r>
-              <a:rPr lang="en-US" sz="2400" b="1" dirty="0">
-                <a:solidFill>
-                  <a:srgbClr val="111827"/>
-                </a:solidFill>
+              <a:rPr lang="en-US" sz="2500" dirty="0">
+                <a:solidFill>
+                  <a:srgbClr val="1C3140"/>
+                </a:solidFill>
+                <a:latin typeface="Constantia" pitchFamily="34" charset="0"/>
+                <a:ea typeface="Constantia" pitchFamily="34" charset="-122"/>
+                <a:cs typeface="Constantia" pitchFamily="34" charset="-120"/>
               </a:rPr>
               <a:t>Key terms (2/2)</a:t>
             </a:r>
-            <a:endParaRPr lang="en-US" sz="2400" dirty="0"/>
-          </a:p>
-        </p:txBody>
-      </p:sp>
-      <p:sp>
-        <p:nvSpPr>
-          <p:cNvPr id="4" name="Text 2"/>
+            <a:endParaRPr lang="en-US" sz="2500" dirty="0"/>
+          </a:p>
+        </p:txBody>
+      </p:sp>
+      <p:sp>
+        <p:nvSpPr>
+          <p:cNvPr id="4" name="Shape 2"/>
           <p:cNvSpPr/>
           <p:nvPr/>
         </p:nvSpPr>
         <p:spPr>
           <a:xfrm>
-            <a:off x="685800" y="1325880"/>
-            <a:ext cx="7772400" cy="3200400"/>
+            <a:off x="566928" y="1335024"/>
+            <a:ext cx="566928" cy="20117"/>
+          </a:xfrm>
+          <a:prstGeom prst="rect">
+            <a:avLst/>
+          </a:prstGeom>
+          <a:solidFill>
+            <a:srgbClr val="9A6A3C"/>
+          </a:solidFill>
+          <a:ln/>
+        </p:spPr>
+      </p:sp>
+      <p:sp>
+        <p:nvSpPr>
+          <p:cNvPr id="5" name="Text 3"/>
+          <p:cNvSpPr/>
+          <p:nvPr/>
+        </p:nvSpPr>
+        <p:spPr>
+          <a:xfrm>
+            <a:off x="713232" y="1664208"/>
+            <a:ext cx="7498080" cy="2788920"/>
           </a:xfrm>
           <a:prstGeom prst="rect">
             <a:avLst/>
@@ -4390,19 +4687,22 @@
           <a:p>
             <a:pPr marL="342900" indent="-342900">
               <a:lnSpc>
-                <a:spcPct val="125000"/>
+                <a:spcPct val="130000"/>
               </a:lnSpc>
               <a:spcAft>
-                <a:spcPts val="800"/>
+                <a:spcPts val="1100"/>
               </a:spcAft>
               <a:buSzPct val="100000"/>
-              <a:buChar char="•"/>
+              <a:buChar char="–"/>
             </a:pPr>
             <a:r>
               <a:rPr lang="en-US" sz="1500" dirty="0">
                 <a:solidFill>
-                  <a:srgbClr val="374151"/>
-                </a:solidFill>
+                  <a:srgbClr val="23282E"/>
+                </a:solidFill>
+                <a:latin typeface="Corbel" pitchFamily="34" charset="0"/>
+                <a:ea typeface="Corbel" pitchFamily="34" charset="-122"/>
+                <a:cs typeface="Corbel" pitchFamily="34" charset="-120"/>
               </a:rPr>
               <a:t>Intention to treat — Analysing participants in the arm to which they were randomised, regardless of adherence.</a:t>
             </a:r>
@@ -4411,19 +4711,22 @@
           <a:p>
             <a:pPr marL="342900" indent="-342900">
               <a:lnSpc>
-                <a:spcPct val="125000"/>
+                <a:spcPct val="130000"/>
               </a:lnSpc>
               <a:spcAft>
-                <a:spcPts val="800"/>
+                <a:spcPts val="1100"/>
               </a:spcAft>
               <a:buSzPct val="100000"/>
-              <a:buChar char="•"/>
+              <a:buChar char="–"/>
             </a:pPr>
             <a:r>
               <a:rPr lang="en-US" sz="1500" dirty="0">
                 <a:solidFill>
-                  <a:srgbClr val="374151"/>
-                </a:solidFill>
+                  <a:srgbClr val="23282E"/>
+                </a:solidFill>
+                <a:latin typeface="Corbel" pitchFamily="34" charset="0"/>
+                <a:ea typeface="Corbel" pitchFamily="34" charset="-122"/>
+                <a:cs typeface="Corbel" pitchFamily="34" charset="-120"/>
               </a:rPr>
               <a:t>Ecological fallacy — Wrongly inferring something about individuals from a relationship observed between groups.</a:t>
             </a:r>
@@ -4432,19 +4735,22 @@
           <a:p>
             <a:pPr marL="342900" indent="-342900">
               <a:lnSpc>
-                <a:spcPct val="125000"/>
+                <a:spcPct val="130000"/>
               </a:lnSpc>
               <a:spcAft>
-                <a:spcPts val="800"/>
+                <a:spcPts val="1100"/>
               </a:spcAft>
               <a:buSzPct val="100000"/>
-              <a:buChar char="•"/>
+              <a:buChar char="–"/>
             </a:pPr>
             <a:r>
               <a:rPr lang="en-US" sz="1500" dirty="0">
                 <a:solidFill>
-                  <a:srgbClr val="374151"/>
-                </a:solidFill>
+                  <a:srgbClr val="23282E"/>
+                </a:solidFill>
+                <a:latin typeface="Corbel" pitchFamily="34" charset="0"/>
+                <a:ea typeface="Corbel" pitchFamily="34" charset="-122"/>
+                <a:cs typeface="Corbel" pitchFamily="34" charset="-120"/>
               </a:rPr>
               <a:t>Confounding — Distortion of an exposure-outcome association by a third variable related to both.</a:t>
             </a:r>
@@ -4464,8 +4770,8 @@
         </p:nvSpPr>
         <p:spPr>
           <a:xfrm>
-            <a:off x="8503920" y="4709160"/>
-            <a:ext cx="800000" cy="300000"/>
+            <a:off x="566928" y="4700016"/>
+            <a:ext cx="914400" cy="274320"/>
           </a:xfrm>
           <a:prstGeom prst="rect">
             <a:avLst/>
@@ -4480,10 +4786,13 @@
           <a:bodyPr/>
           <a:lstStyle>
             <a:lvl1pPr>
-              <a:defRPr sz="1000">
-                <a:solidFill>
-                  <a:srgbClr val="6B7280"/>
-                </a:solidFill>
+              <a:defRPr sz="900">
+                <a:solidFill>
+                  <a:srgbClr val="5F6B76"/>
+                </a:solidFill>
+                <a:latin typeface="Corbel"/>
+                <a:ea typeface="Corbel"/>
+                <a:cs typeface="Corbel"/>
               </a:defRPr>
             </a:lvl1pPr>
           </a:lstStyle>
@@ -4530,8 +4839,8 @@
         </p:nvSpPr>
         <p:spPr>
           <a:xfrm>
-            <a:off x="502920" y="292608"/>
-            <a:ext cx="8046720" cy="228600"/>
+            <a:off x="685800" y="1024128"/>
+            <a:ext cx="6766560" cy="292608"/>
           </a:xfrm>
           <a:prstGeom prst="rect">
             <a:avLst/>
@@ -4547,14 +4856,17 @@
               <a:buNone/>
             </a:pPr>
             <a:r>
-              <a:rPr lang="en-US" sz="1100" b="1" spc="150" kern="0" dirty="0">
-                <a:solidFill>
-                  <a:srgbClr val="0066CC"/>
-                </a:solidFill>
+              <a:rPr lang="en-US" sz="1150" spc="240" kern="0" dirty="0">
+                <a:solidFill>
+                  <a:srgbClr val="C8A67B"/>
+                </a:solidFill>
+                <a:latin typeface="Corbel" pitchFamily="34" charset="0"/>
+                <a:ea typeface="Corbel" pitchFamily="34" charset="-122"/>
+                <a:cs typeface="Corbel" pitchFamily="34" charset="-120"/>
               </a:rPr>
-              <a:t>UNIT 5  ·  OVER TO YOU</a:t>
-            </a:r>
-            <a:endParaRPr lang="en-US" sz="1100" dirty="0"/>
+              <a:t>Over to you</a:t>
+            </a:r>
+            <a:endParaRPr lang="en-US" sz="1150" dirty="0"/>
           </a:p>
         </p:txBody>
       </p:sp>
@@ -4566,8 +4878,8 @@
         </p:nvSpPr>
         <p:spPr>
           <a:xfrm>
-            <a:off x="502920" y="548640"/>
-            <a:ext cx="8046720" cy="640080"/>
+            <a:off x="685800" y="1700784"/>
+            <a:ext cx="6858000" cy="640080"/>
           </a:xfrm>
           <a:prstGeom prst="rect">
             <a:avLst/>
@@ -4583,14 +4895,17 @@
               <a:buNone/>
             </a:pPr>
             <a:r>
-              <a:rPr lang="en-US" sz="2400" b="1" dirty="0">
-                <a:solidFill>
-                  <a:srgbClr val="111827"/>
-                </a:solidFill>
+              <a:rPr lang="en-US" sz="3000" dirty="0">
+                <a:solidFill>
+                  <a:srgbClr val="FFFFFF"/>
+                </a:solidFill>
+                <a:latin typeface="Constantia" pitchFamily="34" charset="0"/>
+                <a:ea typeface="Constantia" pitchFamily="34" charset="-122"/>
+                <a:cs typeface="Constantia" pitchFamily="34" charset="-120"/>
               </a:rPr>
               <a:t>Activity</a:t>
             </a:r>
-            <a:endParaRPr lang="en-US" sz="2400" dirty="0"/>
+            <a:endParaRPr lang="en-US" sz="3000" dirty="0"/>
           </a:p>
         </p:txBody>
       </p:sp>
@@ -4602,8 +4917,8 @@
         </p:nvSpPr>
         <p:spPr>
           <a:xfrm>
-            <a:off x="685800" y="1325880"/>
-            <a:ext cx="7772400" cy="3200400"/>
+            <a:off x="685800" y="2487168"/>
+            <a:ext cx="6949440" cy="1737360"/>
           </a:xfrm>
           <a:prstGeom prst="rect">
             <a:avLst/>
@@ -4615,70 +4930,24 @@
           <a:bodyPr wrap="square" rtlCol="0" anchor="t"/>
           <a:lstStyle/>
           <a:p>
-            <a:pPr marL="342900" indent="-342900">
+            <a:pPr indent="0" marL="0">
               <a:lnSpc>
-                <a:spcPct val="125000"/>
+                <a:spcPct val="134000"/>
               </a:lnSpc>
-              <a:spcAft>
-                <a:spcPts val="800"/>
-              </a:spcAft>
-              <a:buSzPct val="100000"/>
-              <a:buChar char="•"/>
+              <a:buNone/>
             </a:pPr>
             <a:r>
-              <a:rPr lang="en-US" sz="1300" dirty="0">
-                <a:solidFill>
-                  <a:srgbClr val="374151"/>
-                </a:solidFill>
+              <a:rPr lang="en-US" sz="1450" dirty="0">
+                <a:solidFill>
+                  <a:srgbClr val="C4CCD4"/>
+                </a:solidFill>
+                <a:latin typeface="Corbel" pitchFamily="34" charset="0"/>
+                <a:ea typeface="Corbel" pitchFamily="34" charset="-122"/>
+                <a:cs typeface="Corbel" pitchFamily="34" charset="-120"/>
               </a:rPr>
               <a:t>You are asked whether a new community health worker programme reduced under-five mortality. Randomisation is refused by the district. Propose two quasi-experimental designs, state what each can and cannot establish, and name the biases you would have to acknowledge.</a:t>
             </a:r>
-            <a:endParaRPr lang="en-US" sz="1300" dirty="0"/>
-          </a:p>
-        </p:txBody>
-      </p:sp>
-      <p:sp>
-        <p:nvSpPr>
-          <p:cNvPr id="25" name="Slide Number Placeholder 0"/>
-          <p:cNvSpPr>
-            <a:spLocks noGrp="1"/>
-          </p:cNvSpPr>
-          <p:nvPr>
-            <p:ph type="sldNum" sz="quarter" idx="4294967295"/>
-          </p:nvPr>
-        </p:nvSpPr>
-        <p:spPr>
-          <a:xfrm>
-            <a:off x="8503920" y="4709160"/>
-            <a:ext cx="800000" cy="300000"/>
-          </a:xfrm>
-          <a:prstGeom prst="rect">
-            <a:avLst/>
-          </a:prstGeom>
-          <a:extLst>
-            <a:ext uri="{C572A759-6A51-4108-AA02-DFA0A04FC94B}">
-              <ma14:wrappingTextBoxFlag xmlns:ma14="http://schemas.microsoft.com/office/mac/drawingml/2011/main" val="0"/>
-            </a:ext>
-          </a:extLst>
-        </p:spPr>
-        <p:txBody>
-          <a:bodyPr/>
-          <a:lstStyle>
-            <a:lvl1pPr>
-              <a:defRPr sz="1000">
-                <a:solidFill>
-                  <a:srgbClr val="6B7280"/>
-                </a:solidFill>
-              </a:defRPr>
-            </a:lvl1pPr>
-          </a:lstStyle>
-          <a:p>
-            <a:pPr algn="l"/>
-            <a:fld id="{F7021451-1387-4CA6-816F-3879F97B5CBC}" type="slidenum">
-              <a:rPr b="0" lang="en-US"/>
-              <a:t>17</a:t>
-            </a:fld>
-            <a:endParaRPr lang="en-US"/>
+            <a:endParaRPr lang="en-US" sz="1450" dirty="0"/>
           </a:p>
         </p:txBody>
       </p:sp>
@@ -4715,8 +4984,8 @@
         </p:nvSpPr>
         <p:spPr>
           <a:xfrm>
-            <a:off x="502920" y="292608"/>
-            <a:ext cx="8046720" cy="228600"/>
+            <a:off x="566928" y="384048"/>
+            <a:ext cx="7772400" cy="237744"/>
           </a:xfrm>
           <a:prstGeom prst="rect">
             <a:avLst/>
@@ -4732,14 +5001,17 @@
               <a:buNone/>
             </a:pPr>
             <a:r>
-              <a:rPr lang="en-US" sz="1100" b="1" spc="150" kern="0" dirty="0">
-                <a:solidFill>
-                  <a:srgbClr val="0066CC"/>
-                </a:solidFill>
+              <a:rPr lang="en-US" sz="1000" spc="200" kern="0" dirty="0">
+                <a:solidFill>
+                  <a:srgbClr val="9A6A3C"/>
+                </a:solidFill>
+                <a:latin typeface="Corbel" pitchFamily="34" charset="0"/>
+                <a:ea typeface="Corbel" pitchFamily="34" charset="-122"/>
+                <a:cs typeface="Corbel" pitchFamily="34" charset="-120"/>
               </a:rPr>
               <a:t>UNIT 5</a:t>
             </a:r>
-            <a:endParaRPr lang="en-US" sz="1100" dirty="0"/>
+            <a:endParaRPr lang="en-US" sz="1000" dirty="0"/>
           </a:p>
         </p:txBody>
       </p:sp>
@@ -4751,8 +5023,8 @@
         </p:nvSpPr>
         <p:spPr>
           <a:xfrm>
-            <a:off x="502920" y="548640"/>
-            <a:ext cx="8046720" cy="640080"/>
+            <a:off x="566928" y="658368"/>
+            <a:ext cx="7772400" cy="658368"/>
           </a:xfrm>
           <a:prstGeom prst="rect">
             <a:avLst/>
@@ -4765,30 +5037,56 @@
           <a:lstStyle/>
           <a:p>
             <a:pPr indent="0" marL="0">
+              <a:lnSpc>
+                <a:spcPct val="100000"/>
+              </a:lnSpc>
               <a:buNone/>
             </a:pPr>
             <a:r>
-              <a:rPr lang="en-US" sz="2400" b="1" dirty="0">
-                <a:solidFill>
-                  <a:srgbClr val="111827"/>
-                </a:solidFill>
+              <a:rPr lang="en-US" sz="2500" dirty="0">
+                <a:solidFill>
+                  <a:srgbClr val="1C3140"/>
+                </a:solidFill>
+                <a:latin typeface="Constantia" pitchFamily="34" charset="0"/>
+                <a:ea typeface="Constantia" pitchFamily="34" charset="-122"/>
+                <a:cs typeface="Constantia" pitchFamily="34" charset="-120"/>
               </a:rPr>
               <a:t>What you will be able to do</a:t>
             </a:r>
-            <a:endParaRPr lang="en-US" sz="2400" dirty="0"/>
-          </a:p>
-        </p:txBody>
-      </p:sp>
-      <p:sp>
-        <p:nvSpPr>
-          <p:cNvPr id="4" name="Text 2"/>
+            <a:endParaRPr lang="en-US" sz="2500" dirty="0"/>
+          </a:p>
+        </p:txBody>
+      </p:sp>
+      <p:sp>
+        <p:nvSpPr>
+          <p:cNvPr id="4" name="Shape 2"/>
           <p:cNvSpPr/>
           <p:nvPr/>
         </p:nvSpPr>
         <p:spPr>
           <a:xfrm>
-            <a:off x="685800" y="1325880"/>
-            <a:ext cx="7772400" cy="3200400"/>
+            <a:off x="566928" y="1335024"/>
+            <a:ext cx="566928" cy="20117"/>
+          </a:xfrm>
+          <a:prstGeom prst="rect">
+            <a:avLst/>
+          </a:prstGeom>
+          <a:solidFill>
+            <a:srgbClr val="9A6A3C"/>
+          </a:solidFill>
+          <a:ln/>
+        </p:spPr>
+      </p:sp>
+      <p:sp>
+        <p:nvSpPr>
+          <p:cNvPr id="5" name="Text 3"/>
+          <p:cNvSpPr/>
+          <p:nvPr/>
+        </p:nvSpPr>
+        <p:spPr>
+          <a:xfrm>
+            <a:off x="713232" y="1664208"/>
+            <a:ext cx="7498080" cy="2788920"/>
           </a:xfrm>
           <a:prstGeom prst="rect">
             <a:avLst/>
@@ -4802,19 +5100,22 @@
           <a:p>
             <a:pPr marL="342900" indent="-342900">
               <a:lnSpc>
-                <a:spcPct val="125000"/>
+                <a:spcPct val="130000"/>
               </a:lnSpc>
               <a:spcAft>
-                <a:spcPts val="800"/>
+                <a:spcPts val="1100"/>
               </a:spcAft>
               <a:buSzPct val="100000"/>
-              <a:buChar char="•"/>
+              <a:buChar char="–"/>
             </a:pPr>
             <a:r>
               <a:rPr lang="en-US" sz="1800" dirty="0">
                 <a:solidFill>
-                  <a:srgbClr val="374151"/>
-                </a:solidFill>
+                  <a:srgbClr val="23282E"/>
+                </a:solidFill>
+                <a:latin typeface="Corbel" pitchFamily="34" charset="0"/>
+                <a:ea typeface="Corbel" pitchFamily="34" charset="-122"/>
+                <a:cs typeface="Corbel" pitchFamily="34" charset="-120"/>
               </a:rPr>
               <a:t>Describe cross-sectional, case-control, cohort and experimental designs</a:t>
             </a:r>
@@ -4823,19 +5124,22 @@
           <a:p>
             <a:pPr marL="342900" indent="-342900">
               <a:lnSpc>
-                <a:spcPct val="125000"/>
+                <a:spcPct val="130000"/>
               </a:lnSpc>
               <a:spcAft>
-                <a:spcPts val="800"/>
+                <a:spcPts val="1100"/>
               </a:spcAft>
               <a:buSzPct val="100000"/>
-              <a:buChar char="•"/>
+              <a:buChar char="–"/>
             </a:pPr>
             <a:r>
               <a:rPr lang="en-US" sz="1800" dirty="0">
                 <a:solidFill>
-                  <a:srgbClr val="374151"/>
-                </a:solidFill>
+                  <a:srgbClr val="23282E"/>
+                </a:solidFill>
+                <a:latin typeface="Corbel" pitchFamily="34" charset="0"/>
+                <a:ea typeface="Corbel" pitchFamily="34" charset="-122"/>
+                <a:cs typeface="Corbel" pitchFamily="34" charset="-120"/>
               </a:rPr>
               <a:t>Match a design to a research question and justify the choice</a:t>
             </a:r>
@@ -4844,19 +5148,22 @@
           <a:p>
             <a:pPr marL="342900" indent="-342900">
               <a:lnSpc>
-                <a:spcPct val="125000"/>
+                <a:spcPct val="130000"/>
               </a:lnSpc>
               <a:spcAft>
-                <a:spcPts val="800"/>
+                <a:spcPts val="1100"/>
               </a:spcAft>
               <a:buSzPct val="100000"/>
-              <a:buChar char="•"/>
+              <a:buChar char="–"/>
             </a:pPr>
             <a:r>
               <a:rPr lang="en-US" sz="1800" dirty="0">
                 <a:solidFill>
-                  <a:srgbClr val="374151"/>
-                </a:solidFill>
+                  <a:srgbClr val="23282E"/>
+                </a:solidFill>
+                <a:latin typeface="Corbel" pitchFamily="34" charset="0"/>
+                <a:ea typeface="Corbel" pitchFamily="34" charset="-122"/>
+                <a:cs typeface="Corbel" pitchFamily="34" charset="-120"/>
               </a:rPr>
               <a:t>Explain why association does not establish causation and what would</a:t>
             </a:r>
@@ -4865,19 +5172,22 @@
           <a:p>
             <a:pPr marL="342900" indent="-342900">
               <a:lnSpc>
-                <a:spcPct val="125000"/>
+                <a:spcPct val="130000"/>
               </a:lnSpc>
               <a:spcAft>
-                <a:spcPts val="800"/>
+                <a:spcPts val="1100"/>
               </a:spcAft>
               <a:buSzPct val="100000"/>
-              <a:buChar char="•"/>
+              <a:buChar char="–"/>
             </a:pPr>
             <a:r>
               <a:rPr lang="en-US" sz="1800" dirty="0">
                 <a:solidFill>
-                  <a:srgbClr val="374151"/>
-                </a:solidFill>
+                  <a:srgbClr val="23282E"/>
+                </a:solidFill>
+                <a:latin typeface="Corbel" pitchFamily="34" charset="0"/>
+                <a:ea typeface="Corbel" pitchFamily="34" charset="-122"/>
+                <a:cs typeface="Corbel" pitchFamily="34" charset="-120"/>
               </a:rPr>
               <a:t>Identify the principal biases threatening each design</a:t>
             </a:r>
@@ -4886,19 +5196,22 @@
           <a:p>
             <a:pPr marL="342900" indent="-342900">
               <a:lnSpc>
-                <a:spcPct val="125000"/>
+                <a:spcPct val="130000"/>
               </a:lnSpc>
               <a:spcAft>
-                <a:spcPts val="800"/>
+                <a:spcPts val="1100"/>
               </a:spcAft>
               <a:buSzPct val="100000"/>
-              <a:buChar char="•"/>
+              <a:buChar char="–"/>
             </a:pPr>
             <a:r>
               <a:rPr lang="en-US" sz="1800" dirty="0">
                 <a:solidFill>
-                  <a:srgbClr val="374151"/>
-                </a:solidFill>
+                  <a:srgbClr val="23282E"/>
+                </a:solidFill>
+                <a:latin typeface="Corbel" pitchFamily="34" charset="0"/>
+                <a:ea typeface="Corbel" pitchFamily="34" charset="-122"/>
+                <a:cs typeface="Corbel" pitchFamily="34" charset="-120"/>
               </a:rPr>
               <a:t>Explain randomisation, blinding and allocation concealment</a:t>
             </a:r>
@@ -4907,19 +5220,22 @@
           <a:p>
             <a:pPr marL="342900" indent="-342900">
               <a:lnSpc>
-                <a:spcPct val="125000"/>
+                <a:spcPct val="130000"/>
               </a:lnSpc>
               <a:spcAft>
-                <a:spcPts val="800"/>
+                <a:spcPts val="1100"/>
               </a:spcAft>
               <a:buSzPct val="100000"/>
-              <a:buChar char="•"/>
+              <a:buChar char="–"/>
             </a:pPr>
             <a:r>
               <a:rPr lang="en-US" sz="1800" dirty="0">
                 <a:solidFill>
-                  <a:srgbClr val="374151"/>
-                </a:solidFill>
+                  <a:srgbClr val="23282E"/>
+                </a:solidFill>
+                <a:latin typeface="Corbel" pitchFamily="34" charset="0"/>
+                <a:ea typeface="Corbel" pitchFamily="34" charset="-122"/>
+                <a:cs typeface="Corbel" pitchFamily="34" charset="-120"/>
               </a:rPr>
               <a:t>Recognise quasi-experimental designs and when they are the honest option</a:t>
             </a:r>
@@ -4939,8 +5255,8 @@
         </p:nvSpPr>
         <p:spPr>
           <a:xfrm>
-            <a:off x="8503920" y="4709160"/>
-            <a:ext cx="800000" cy="300000"/>
+            <a:off x="566928" y="4700016"/>
+            <a:ext cx="914400" cy="274320"/>
           </a:xfrm>
           <a:prstGeom prst="rect">
             <a:avLst/>
@@ -4955,10 +5271,13 @@
           <a:bodyPr/>
           <a:lstStyle>
             <a:lvl1pPr>
-              <a:defRPr sz="1000">
-                <a:solidFill>
-                  <a:srgbClr val="6B7280"/>
-                </a:solidFill>
+              <a:defRPr sz="900">
+                <a:solidFill>
+                  <a:srgbClr val="5F6B76"/>
+                </a:solidFill>
+                <a:latin typeface="Corbel"/>
+                <a:ea typeface="Corbel"/>
+                <a:cs typeface="Corbel"/>
               </a:defRPr>
             </a:lvl1pPr>
           </a:lstStyle>
@@ -5005,8 +5324,8 @@
         </p:nvSpPr>
         <p:spPr>
           <a:xfrm>
-            <a:off x="502920" y="292608"/>
-            <a:ext cx="8046720" cy="228600"/>
+            <a:off x="566928" y="384048"/>
+            <a:ext cx="7772400" cy="237744"/>
           </a:xfrm>
           <a:prstGeom prst="rect">
             <a:avLst/>
@@ -5022,14 +5341,17 @@
               <a:buNone/>
             </a:pPr>
             <a:r>
-              <a:rPr lang="en-US" sz="1100" b="1" spc="150" kern="0" dirty="0">
-                <a:solidFill>
-                  <a:srgbClr val="0066CC"/>
-                </a:solidFill>
+              <a:rPr lang="en-US" sz="1000" spc="200" kern="0" dirty="0">
+                <a:solidFill>
+                  <a:srgbClr val="9A6A3C"/>
+                </a:solidFill>
+                <a:latin typeface="Corbel" pitchFamily="34" charset="0"/>
+                <a:ea typeface="Corbel" pitchFamily="34" charset="-122"/>
+                <a:cs typeface="Corbel" pitchFamily="34" charset="-120"/>
               </a:rPr>
               <a:t>UNIT 5</a:t>
             </a:r>
-            <a:endParaRPr lang="en-US" sz="1100" dirty="0"/>
+            <a:endParaRPr lang="en-US" sz="1000" dirty="0"/>
           </a:p>
         </p:txBody>
       </p:sp>
@@ -5041,8 +5363,8 @@
         </p:nvSpPr>
         <p:spPr>
           <a:xfrm>
-            <a:off x="502920" y="548640"/>
-            <a:ext cx="8046720" cy="640080"/>
+            <a:off x="566928" y="658368"/>
+            <a:ext cx="7772400" cy="658368"/>
           </a:xfrm>
           <a:prstGeom prst="rect">
             <a:avLst/>
@@ -5055,30 +5377,56 @@
           <a:lstStyle/>
           <a:p>
             <a:pPr indent="0" marL="0">
+              <a:lnSpc>
+                <a:spcPct val="100000"/>
+              </a:lnSpc>
               <a:buNone/>
             </a:pPr>
             <a:r>
-              <a:rPr lang="en-US" sz="2400" b="1" dirty="0">
-                <a:solidFill>
-                  <a:srgbClr val="111827"/>
-                </a:solidFill>
+              <a:rPr lang="en-US" sz="2500" dirty="0">
+                <a:solidFill>
+                  <a:srgbClr val="1C3140"/>
+                </a:solidFill>
+                <a:latin typeface="Constantia" pitchFamily="34" charset="0"/>
+                <a:ea typeface="Constantia" pitchFamily="34" charset="-122"/>
+                <a:cs typeface="Constantia" pitchFamily="34" charset="-120"/>
               </a:rPr>
               <a:t>Observational designs (1/2)</a:t>
             </a:r>
-            <a:endParaRPr lang="en-US" sz="2400" dirty="0"/>
-          </a:p>
-        </p:txBody>
-      </p:sp>
-      <p:sp>
-        <p:nvSpPr>
-          <p:cNvPr id="4" name="Text 2"/>
+            <a:endParaRPr lang="en-US" sz="2500" dirty="0"/>
+          </a:p>
+        </p:txBody>
+      </p:sp>
+      <p:sp>
+        <p:nvSpPr>
+          <p:cNvPr id="4" name="Shape 2"/>
           <p:cNvSpPr/>
           <p:nvPr/>
         </p:nvSpPr>
         <p:spPr>
           <a:xfrm>
-            <a:off x="685800" y="1325880"/>
-            <a:ext cx="7772400" cy="3200400"/>
+            <a:off x="566928" y="1335024"/>
+            <a:ext cx="566928" cy="20117"/>
+          </a:xfrm>
+          <a:prstGeom prst="rect">
+            <a:avLst/>
+          </a:prstGeom>
+          <a:solidFill>
+            <a:srgbClr val="9A6A3C"/>
+          </a:solidFill>
+          <a:ln/>
+        </p:spPr>
+      </p:sp>
+      <p:sp>
+        <p:nvSpPr>
+          <p:cNvPr id="5" name="Text 3"/>
+          <p:cNvSpPr/>
+          <p:nvPr/>
+        </p:nvSpPr>
+        <p:spPr>
+          <a:xfrm>
+            <a:off x="713232" y="1664208"/>
+            <a:ext cx="7498080" cy="2788920"/>
           </a:xfrm>
           <a:prstGeom prst="rect">
             <a:avLst/>
@@ -5092,65 +5440,50 @@
           <a:p>
             <a:pPr marL="342900" indent="-342900">
               <a:lnSpc>
-                <a:spcPct val="125000"/>
+                <a:spcPct val="130000"/>
               </a:lnSpc>
               <a:spcAft>
-                <a:spcPts val="800"/>
+                <a:spcPts val="1100"/>
               </a:spcAft>
               <a:buSzPct val="100000"/>
-              <a:buChar char="•"/>
+              <a:buChar char="–"/>
             </a:pPr>
             <a:r>
-              <a:rPr lang="en-US" sz="1300" dirty="0">
-                <a:solidFill>
-                  <a:srgbClr val="374151"/>
-                </a:solidFill>
+              <a:rPr lang="en-US" sz="1350" dirty="0">
+                <a:solidFill>
+                  <a:srgbClr val="23282E"/>
+                </a:solidFill>
+                <a:latin typeface="Corbel" pitchFamily="34" charset="0"/>
+                <a:ea typeface="Corbel" pitchFamily="34" charset="-122"/>
+                <a:cs typeface="Corbel" pitchFamily="34" charset="-120"/>
               </a:rPr>
               <a:t>Cross-sectional — exposure and outcome measured at the same moment; fast and cheap; gives prevalence but cannot establish which came first</a:t>
             </a:r>
-            <a:endParaRPr lang="en-US" sz="1300" dirty="0"/>
+            <a:endParaRPr lang="en-US" sz="1350" dirty="0"/>
           </a:p>
           <a:p>
             <a:pPr marL="342900" indent="-342900">
               <a:lnSpc>
-                <a:spcPct val="125000"/>
+                <a:spcPct val="130000"/>
               </a:lnSpc>
               <a:spcAft>
-                <a:spcPts val="800"/>
+                <a:spcPts val="1100"/>
               </a:spcAft>
               <a:buSzPct val="100000"/>
-              <a:buChar char="•"/>
+              <a:buChar char="–"/>
             </a:pPr>
             <a:r>
-              <a:rPr lang="en-US" sz="1300" dirty="0">
-                <a:solidFill>
-                  <a:srgbClr val="374151"/>
-                </a:solidFill>
+              <a:rPr lang="en-US" sz="1350" dirty="0">
+                <a:solidFill>
+                  <a:srgbClr val="23282E"/>
+                </a:solidFill>
+                <a:latin typeface="Corbel" pitchFamily="34" charset="0"/>
+                <a:ea typeface="Corbel" pitchFamily="34" charset="-122"/>
+                <a:cs typeface="Corbel" pitchFamily="34" charset="-120"/>
               </a:rPr>
               <a:t>Case-control — starts from the outcome and looks backward at exposure; efficient for rare outcomes; vulnerable to recall and selection bias; yields an odds ratio</a:t>
             </a:r>
-            <a:endParaRPr lang="en-US" sz="1300" dirty="0"/>
-          </a:p>
-          <a:p>
-            <a:pPr marL="342900" indent="-342900">
-              <a:lnSpc>
-                <a:spcPct val="125000"/>
-              </a:lnSpc>
-              <a:spcAft>
-                <a:spcPts val="800"/>
-              </a:spcAft>
-              <a:buSzPct val="100000"/>
-              <a:buChar char="•"/>
-            </a:pPr>
-            <a:r>
-              <a:rPr lang="en-US" sz="1300" dirty="0">
-                <a:solidFill>
-                  <a:srgbClr val="374151"/>
-                </a:solidFill>
-              </a:rPr>
-              <a:t>Cohort — starts from exposure and follows forward to outcome; establishes temporal sequence; expensive and vulnerable to loss to follow-up; yields relative risk and incidence</a:t>
-            </a:r>
-            <a:endParaRPr lang="en-US" sz="1300" dirty="0"/>
+            <a:endParaRPr lang="en-US" sz="1350" dirty="0"/>
           </a:p>
         </p:txBody>
       </p:sp>
@@ -5166,8 +5499,8 @@
         </p:nvSpPr>
         <p:spPr>
           <a:xfrm>
-            <a:off x="8503920" y="4709160"/>
-            <a:ext cx="800000" cy="300000"/>
+            <a:off x="566928" y="4700016"/>
+            <a:ext cx="914400" cy="274320"/>
           </a:xfrm>
           <a:prstGeom prst="rect">
             <a:avLst/>
@@ -5182,10 +5515,13 @@
           <a:bodyPr/>
           <a:lstStyle>
             <a:lvl1pPr>
-              <a:defRPr sz="1000">
-                <a:solidFill>
-                  <a:srgbClr val="6B7280"/>
-                </a:solidFill>
+              <a:defRPr sz="900">
+                <a:solidFill>
+                  <a:srgbClr val="5F6B76"/>
+                </a:solidFill>
+                <a:latin typeface="Corbel"/>
+                <a:ea typeface="Corbel"/>
+                <a:cs typeface="Corbel"/>
               </a:defRPr>
             </a:lvl1pPr>
           </a:lstStyle>
@@ -5232,8 +5568,8 @@
         </p:nvSpPr>
         <p:spPr>
           <a:xfrm>
-            <a:off x="502920" y="292608"/>
-            <a:ext cx="8046720" cy="228600"/>
+            <a:off x="566928" y="384048"/>
+            <a:ext cx="7772400" cy="237744"/>
           </a:xfrm>
           <a:prstGeom prst="rect">
             <a:avLst/>
@@ -5249,14 +5585,17 @@
               <a:buNone/>
             </a:pPr>
             <a:r>
-              <a:rPr lang="en-US" sz="1100" b="1" spc="150" kern="0" dirty="0">
-                <a:solidFill>
-                  <a:srgbClr val="0066CC"/>
-                </a:solidFill>
+              <a:rPr lang="en-US" sz="1000" spc="200" kern="0" dirty="0">
+                <a:solidFill>
+                  <a:srgbClr val="9A6A3C"/>
+                </a:solidFill>
+                <a:latin typeface="Corbel" pitchFamily="34" charset="0"/>
+                <a:ea typeface="Corbel" pitchFamily="34" charset="-122"/>
+                <a:cs typeface="Corbel" pitchFamily="34" charset="-120"/>
               </a:rPr>
               <a:t>UNIT 5</a:t>
             </a:r>
-            <a:endParaRPr lang="en-US" sz="1100" dirty="0"/>
+            <a:endParaRPr lang="en-US" sz="1000" dirty="0"/>
           </a:p>
         </p:txBody>
       </p:sp>
@@ -5268,8 +5607,8 @@
         </p:nvSpPr>
         <p:spPr>
           <a:xfrm>
-            <a:off x="502920" y="548640"/>
-            <a:ext cx="8046720" cy="640080"/>
+            <a:off x="566928" y="658368"/>
+            <a:ext cx="7772400" cy="658368"/>
           </a:xfrm>
           <a:prstGeom prst="rect">
             <a:avLst/>
@@ -5282,30 +5621,56 @@
           <a:lstStyle/>
           <a:p>
             <a:pPr indent="0" marL="0">
+              <a:lnSpc>
+                <a:spcPct val="100000"/>
+              </a:lnSpc>
               <a:buNone/>
             </a:pPr>
             <a:r>
-              <a:rPr lang="en-US" sz="2400" b="1" dirty="0">
-                <a:solidFill>
-                  <a:srgbClr val="111827"/>
-                </a:solidFill>
+              <a:rPr lang="en-US" sz="2500" dirty="0">
+                <a:solidFill>
+                  <a:srgbClr val="1C3140"/>
+                </a:solidFill>
+                <a:latin typeface="Constantia" pitchFamily="34" charset="0"/>
+                <a:ea typeface="Constantia" pitchFamily="34" charset="-122"/>
+                <a:cs typeface="Constantia" pitchFamily="34" charset="-120"/>
               </a:rPr>
               <a:t>Observational designs (2/2)</a:t>
             </a:r>
-            <a:endParaRPr lang="en-US" sz="2400" dirty="0"/>
-          </a:p>
-        </p:txBody>
-      </p:sp>
-      <p:sp>
-        <p:nvSpPr>
-          <p:cNvPr id="4" name="Text 2"/>
+            <a:endParaRPr lang="en-US" sz="2500" dirty="0"/>
+          </a:p>
+        </p:txBody>
+      </p:sp>
+      <p:sp>
+        <p:nvSpPr>
+          <p:cNvPr id="4" name="Shape 2"/>
           <p:cNvSpPr/>
           <p:nvPr/>
         </p:nvSpPr>
         <p:spPr>
           <a:xfrm>
-            <a:off x="685800" y="1325880"/>
-            <a:ext cx="7772400" cy="3200400"/>
+            <a:off x="566928" y="1335024"/>
+            <a:ext cx="566928" cy="20117"/>
+          </a:xfrm>
+          <a:prstGeom prst="rect">
+            <a:avLst/>
+          </a:prstGeom>
+          <a:solidFill>
+            <a:srgbClr val="9A6A3C"/>
+          </a:solidFill>
+          <a:ln/>
+        </p:spPr>
+      </p:sp>
+      <p:sp>
+        <p:nvSpPr>
+          <p:cNvPr id="5" name="Text 3"/>
+          <p:cNvSpPr/>
+          <p:nvPr/>
+        </p:nvSpPr>
+        <p:spPr>
+          <a:xfrm>
+            <a:off x="713232" y="1664208"/>
+            <a:ext cx="7498080" cy="2788920"/>
           </a:xfrm>
           <a:prstGeom prst="rect">
             <a:avLst/>
@@ -5319,44 +5684,74 @@
           <a:p>
             <a:pPr marL="342900" indent="-342900">
               <a:lnSpc>
-                <a:spcPct val="125000"/>
+                <a:spcPct val="130000"/>
               </a:lnSpc>
               <a:spcAft>
-                <a:spcPts val="800"/>
+                <a:spcPts val="1100"/>
               </a:spcAft>
               <a:buSzPct val="100000"/>
-              <a:buChar char="•"/>
+              <a:buChar char="–"/>
             </a:pPr>
             <a:r>
-              <a:rPr lang="en-US" sz="1700" dirty="0">
-                <a:solidFill>
-                  <a:srgbClr val="374151"/>
-                </a:solidFill>
+              <a:rPr lang="en-US" sz="1350" dirty="0">
+                <a:solidFill>
+                  <a:srgbClr val="23282E"/>
+                </a:solidFill>
+                <a:latin typeface="Corbel" pitchFamily="34" charset="0"/>
+                <a:ea typeface="Corbel" pitchFamily="34" charset="-122"/>
+                <a:cs typeface="Corbel" pitchFamily="34" charset="-120"/>
+              </a:rPr>
+              <a:t>Cohort — starts from exposure and follows forward to outcome; establishes temporal sequence; expensive and vulnerable to loss to follow-up; yields relative risk and incidence</a:t>
+            </a:r>
+            <a:endParaRPr lang="en-US" sz="1350" dirty="0"/>
+          </a:p>
+          <a:p>
+            <a:pPr marL="342900" indent="-342900">
+              <a:lnSpc>
+                <a:spcPct val="130000"/>
+              </a:lnSpc>
+              <a:spcAft>
+                <a:spcPts val="1100"/>
+              </a:spcAft>
+              <a:buSzPct val="100000"/>
+              <a:buChar char="–"/>
+            </a:pPr>
+            <a:r>
+              <a:rPr lang="en-US" sz="1350" dirty="0">
+                <a:solidFill>
+                  <a:srgbClr val="23282E"/>
+                </a:solidFill>
+                <a:latin typeface="Corbel" pitchFamily="34" charset="0"/>
+                <a:ea typeface="Corbel" pitchFamily="34" charset="-122"/>
+                <a:cs typeface="Corbel" pitchFamily="34" charset="-120"/>
               </a:rPr>
               <a:t>Ecological — units of analysis are groups rather than individuals; cheap but subject to the ecological fallacy</a:t>
             </a:r>
-            <a:endParaRPr lang="en-US" sz="1700" dirty="0"/>
+            <a:endParaRPr lang="en-US" sz="1350" dirty="0"/>
           </a:p>
           <a:p>
             <a:pPr marL="342900" indent="-342900">
               <a:lnSpc>
-                <a:spcPct val="125000"/>
+                <a:spcPct val="130000"/>
               </a:lnSpc>
               <a:spcAft>
-                <a:spcPts val="800"/>
+                <a:spcPts val="1100"/>
               </a:spcAft>
               <a:buSzPct val="100000"/>
-              <a:buChar char="•"/>
+              <a:buChar char="–"/>
             </a:pPr>
             <a:r>
-              <a:rPr lang="en-US" sz="1700" dirty="0">
-                <a:solidFill>
-                  <a:srgbClr val="374151"/>
-                </a:solidFill>
+              <a:rPr lang="en-US" sz="1350" dirty="0">
+                <a:solidFill>
+                  <a:srgbClr val="23282E"/>
+                </a:solidFill>
+                <a:latin typeface="Corbel" pitchFamily="34" charset="0"/>
+                <a:ea typeface="Corbel" pitchFamily="34" charset="-122"/>
+                <a:cs typeface="Corbel" pitchFamily="34" charset="-120"/>
               </a:rPr>
               <a:t>Case series and case reports — descriptive only, no comparison group, hypothesis-generating at best</a:t>
             </a:r>
-            <a:endParaRPr lang="en-US" sz="1700" dirty="0"/>
+            <a:endParaRPr lang="en-US" sz="1350" dirty="0"/>
           </a:p>
         </p:txBody>
       </p:sp>
@@ -5372,8 +5767,8 @@
         </p:nvSpPr>
         <p:spPr>
           <a:xfrm>
-            <a:off x="8503920" y="4709160"/>
-            <a:ext cx="800000" cy="300000"/>
+            <a:off x="566928" y="4700016"/>
+            <a:ext cx="914400" cy="274320"/>
           </a:xfrm>
           <a:prstGeom prst="rect">
             <a:avLst/>
@@ -5388,10 +5783,13 @@
           <a:bodyPr/>
           <a:lstStyle>
             <a:lvl1pPr>
-              <a:defRPr sz="1000">
-                <a:solidFill>
-                  <a:srgbClr val="6B7280"/>
-                </a:solidFill>
+              <a:defRPr sz="900">
+                <a:solidFill>
+                  <a:srgbClr val="5F6B76"/>
+                </a:solidFill>
+                <a:latin typeface="Corbel"/>
+                <a:ea typeface="Corbel"/>
+                <a:cs typeface="Corbel"/>
               </a:defRPr>
             </a:lvl1pPr>
           </a:lstStyle>
@@ -5438,8 +5836,8 @@
         </p:nvSpPr>
         <p:spPr>
           <a:xfrm>
-            <a:off x="502920" y="292608"/>
-            <a:ext cx="8046720" cy="228600"/>
+            <a:off x="566928" y="384048"/>
+            <a:ext cx="7772400" cy="237744"/>
           </a:xfrm>
           <a:prstGeom prst="rect">
             <a:avLst/>
@@ -5455,14 +5853,17 @@
               <a:buNone/>
             </a:pPr>
             <a:r>
-              <a:rPr lang="en-US" sz="1100" b="1" spc="150" kern="0" dirty="0">
-                <a:solidFill>
-                  <a:srgbClr val="0066CC"/>
-                </a:solidFill>
+              <a:rPr lang="en-US" sz="1000" spc="200" kern="0" dirty="0">
+                <a:solidFill>
+                  <a:srgbClr val="9A6A3C"/>
+                </a:solidFill>
+                <a:latin typeface="Corbel" pitchFamily="34" charset="0"/>
+                <a:ea typeface="Corbel" pitchFamily="34" charset="-122"/>
+                <a:cs typeface="Corbel" pitchFamily="34" charset="-120"/>
               </a:rPr>
               <a:t>UNIT 5</a:t>
             </a:r>
-            <a:endParaRPr lang="en-US" sz="1100" dirty="0"/>
+            <a:endParaRPr lang="en-US" sz="1000" dirty="0"/>
           </a:p>
         </p:txBody>
       </p:sp>
@@ -5474,8 +5875,8 @@
         </p:nvSpPr>
         <p:spPr>
           <a:xfrm>
-            <a:off x="502920" y="548640"/>
-            <a:ext cx="8046720" cy="548640"/>
+            <a:off x="566928" y="658368"/>
+            <a:ext cx="7772400" cy="658368"/>
           </a:xfrm>
           <a:prstGeom prst="rect">
             <a:avLst/>
@@ -5488,19 +5889,45 @@
           <a:lstStyle/>
           <a:p>
             <a:pPr indent="0" marL="0">
+              <a:lnSpc>
+                <a:spcPct val="100000"/>
+              </a:lnSpc>
               <a:buNone/>
             </a:pPr>
             <a:r>
-              <a:rPr lang="en-US" sz="2200" b="1" dirty="0">
-                <a:solidFill>
-                  <a:srgbClr val="111827"/>
-                </a:solidFill>
+              <a:rPr lang="en-US" sz="2500" dirty="0">
+                <a:solidFill>
+                  <a:srgbClr val="1C3140"/>
+                </a:solidFill>
+                <a:latin typeface="Constantia" pitchFamily="34" charset="0"/>
+                <a:ea typeface="Constantia" pitchFamily="34" charset="-122"/>
+                <a:cs typeface="Constantia" pitchFamily="34" charset="-120"/>
               </a:rPr>
               <a:t>Choosing an observational design</a:t>
             </a:r>
-            <a:endParaRPr lang="en-US" sz="2200" dirty="0"/>
-          </a:p>
-        </p:txBody>
+            <a:endParaRPr lang="en-US" sz="2500" dirty="0"/>
+          </a:p>
+        </p:txBody>
+      </p:sp>
+      <p:sp>
+        <p:nvSpPr>
+          <p:cNvPr id="4" name="Shape 2"/>
+          <p:cNvSpPr/>
+          <p:nvPr/>
+        </p:nvSpPr>
+        <p:spPr>
+          <a:xfrm>
+            <a:off x="566928" y="1335024"/>
+            <a:ext cx="566928" cy="20117"/>
+          </a:xfrm>
+          <a:prstGeom prst="rect">
+            <a:avLst/>
+          </a:prstGeom>
+          <a:solidFill>
+            <a:srgbClr val="9A6A3C"/>
+          </a:solidFill>
+          <a:ln/>
+        </p:spPr>
       </p:sp>
       <p:graphicFrame>
         <p:nvGraphicFramePr>
@@ -5517,18 +5944,18 @@
           </p:nvPr>
         </p:nvGraphicFramePr>
         <p:xfrm>
-          <a:off x="502920" y="1234440"/>
-          <a:ext cx="8138160" cy="914400"/>
+          <a:off x="566928" y="1627632"/>
+          <a:ext cx="8010144" cy="914400"/>
         </p:xfrm>
         <a:graphic>
           <a:graphicData uri="http://schemas.openxmlformats.org/drawingml/2006/table">
             <a:tbl>
               <a:tblPr/>
               <a:tblGrid>
-                <a:gridCol w="2034540"/>
-                <a:gridCol w="2034540"/>
-                <a:gridCol w="2034540"/>
-                <a:gridCol w="2034540"/>
+                <a:gridCol w="2002536"/>
+                <a:gridCol w="2002536"/>
+                <a:gridCol w="2002536"/>
+                <a:gridCol w="2002536"/>
               </a:tblGrid>
               <a:tr h="0">
                 <a:tc>
@@ -5542,45 +5969,52 @@
                       <a:r>
                         <a:rPr lang="en-US" sz="1100" b="1" dirty="0">
                           <a:solidFill>
-                            <a:srgbClr val="FFFFFF"/>
+                            <a:srgbClr val="1C3140"/>
                           </a:solidFill>
+                          <a:latin typeface="Corbel" pitchFamily="34" charset="0"/>
+                          <a:ea typeface="Corbel" pitchFamily="34" charset="-122"/>
+                          <a:cs typeface="Corbel" pitchFamily="34" charset="-120"/>
                         </a:rPr>
                         <a:t>Design</a:t>
                       </a:r>
-                      <a:endParaRPr lang="en-US" sz="1100" dirty="0"/>
+                      <a:endParaRPr lang="en-US" sz="1100" dirty="0">
+                        <a:latin typeface="Corbel" charset="0"/>
+                        <a:ea typeface="Corbel" charset="0"/>
+                        <a:cs typeface="Corbel" charset="0"/>
+                      </a:endParaRPr>
                     </a:p>
                   </a:txBody>
-                  <a:tcPr marL="91440" marR="91440" marT="45720" marB="45720" anchor="t">
-                    <a:lnL w="6350" cap="flat" cmpd="sng" algn="ctr">
+                  <a:tcPr marL="76200" marR="76200" marT="76200" marB="76200" anchor="t">
+                    <a:lnL w="5080" cap="flat" cmpd="sng" algn="ctr">
                       <a:solidFill>
-                        <a:srgbClr val="D1D5DB"/>
+                        <a:srgbClr val="D8D3CB"/>
                       </a:solidFill>
                       <a:prstDash val="solid"/>
                       <a:round/>
                       <a:headEnd type="none" w="med" len="med"/>
                       <a:tailEnd type="none" w="med" len="med"/>
                     </a:lnL>
-                    <a:lnR w="6350" cap="flat" cmpd="sng" algn="ctr">
+                    <a:lnR w="5080" cap="flat" cmpd="sng" algn="ctr">
                       <a:solidFill>
-                        <a:srgbClr val="D1D5DB"/>
+                        <a:srgbClr val="D8D3CB"/>
                       </a:solidFill>
                       <a:prstDash val="solid"/>
                       <a:round/>
                       <a:headEnd type="none" w="med" len="med"/>
                       <a:tailEnd type="none" w="med" len="med"/>
                     </a:lnR>
-                    <a:lnT w="6350" cap="flat" cmpd="sng" algn="ctr">
+                    <a:lnT w="5080" cap="flat" cmpd="sng" algn="ctr">
                       <a:solidFill>
-                        <a:srgbClr val="D1D5DB"/>
+                        <a:srgbClr val="D8D3CB"/>
                       </a:solidFill>
                       <a:prstDash val="solid"/>
                       <a:round/>
                       <a:headEnd type="none" w="med" len="med"/>
                       <a:tailEnd type="none" w="med" len="med"/>
                     </a:lnT>
-                    <a:lnB w="6350" cap="flat" cmpd="sng" algn="ctr">
+                    <a:lnB w="5080" cap="flat" cmpd="sng" algn="ctr">
                       <a:solidFill>
-                        <a:srgbClr val="D1D5DB"/>
+                        <a:srgbClr val="D8D3CB"/>
                       </a:solidFill>
                       <a:prstDash val="solid"/>
                       <a:round/>
@@ -5588,7 +6022,7 @@
                       <a:tailEnd type="none" w="med" len="med"/>
                     </a:lnB>
                     <a:solidFill>
-                      <a:srgbClr val="004D99"/>
+                      <a:srgbClr val="F6F4F0"/>
                     </a:solidFill>
                   </a:tcPr>
                 </a:tc>
@@ -5603,45 +6037,52 @@
                       <a:r>
                         <a:rPr lang="en-US" sz="1100" b="1" dirty="0">
                           <a:solidFill>
-                            <a:srgbClr val="FFFFFF"/>
+                            <a:srgbClr val="1C3140"/>
                           </a:solidFill>
+                          <a:latin typeface="Corbel" pitchFamily="34" charset="0"/>
+                          <a:ea typeface="Corbel" pitchFamily="34" charset="-122"/>
+                          <a:cs typeface="Corbel" pitchFamily="34" charset="-120"/>
                         </a:rPr>
                         <a:t>Starts from</a:t>
                       </a:r>
-                      <a:endParaRPr lang="en-US" sz="1100" dirty="0"/>
+                      <a:endParaRPr lang="en-US" sz="1100" dirty="0">
+                        <a:latin typeface="Corbel" charset="0"/>
+                        <a:ea typeface="Corbel" charset="0"/>
+                        <a:cs typeface="Corbel" charset="0"/>
+                      </a:endParaRPr>
                     </a:p>
                   </a:txBody>
-                  <a:tcPr marL="91440" marR="91440" marT="45720" marB="45720" anchor="t">
-                    <a:lnL w="6350" cap="flat" cmpd="sng" algn="ctr">
+                  <a:tcPr marL="76200" marR="76200" marT="76200" marB="76200" anchor="t">
+                    <a:lnL w="5080" cap="flat" cmpd="sng" algn="ctr">
                       <a:solidFill>
-                        <a:srgbClr val="D1D5DB"/>
+                        <a:srgbClr val="D8D3CB"/>
                       </a:solidFill>
                       <a:prstDash val="solid"/>
                       <a:round/>
                       <a:headEnd type="none" w="med" len="med"/>
                       <a:tailEnd type="none" w="med" len="med"/>
                     </a:lnL>
-                    <a:lnR w="6350" cap="flat" cmpd="sng" algn="ctr">
+                    <a:lnR w="5080" cap="flat" cmpd="sng" algn="ctr">
                       <a:solidFill>
-                        <a:srgbClr val="D1D5DB"/>
+                        <a:srgbClr val="D8D3CB"/>
                       </a:solidFill>
                       <a:prstDash val="solid"/>
                       <a:round/>
                       <a:headEnd type="none" w="med" len="med"/>
                       <a:tailEnd type="none" w="med" len="med"/>
                     </a:lnR>
-                    <a:lnT w="6350" cap="flat" cmpd="sng" algn="ctr">
+                    <a:lnT w="5080" cap="flat" cmpd="sng" algn="ctr">
                       <a:solidFill>
-                        <a:srgbClr val="D1D5DB"/>
+                        <a:srgbClr val="D8D3CB"/>
                       </a:solidFill>
                       <a:prstDash val="solid"/>
                       <a:round/>
                       <a:headEnd type="none" w="med" len="med"/>
                       <a:tailEnd type="none" w="med" len="med"/>
                     </a:lnT>
-                    <a:lnB w="6350" cap="flat" cmpd="sng" algn="ctr">
+                    <a:lnB w="5080" cap="flat" cmpd="sng" algn="ctr">
                       <a:solidFill>
-                        <a:srgbClr val="D1D5DB"/>
+                        <a:srgbClr val="D8D3CB"/>
                       </a:solidFill>
                       <a:prstDash val="solid"/>
                       <a:round/>
@@ -5649,7 +6090,7 @@
                       <a:tailEnd type="none" w="med" len="med"/>
                     </a:lnB>
                     <a:solidFill>
-                      <a:srgbClr val="004D99"/>
+                      <a:srgbClr val="F6F4F0"/>
                     </a:solidFill>
                   </a:tcPr>
                 </a:tc>
@@ -5664,45 +6105,52 @@
                       <a:r>
                         <a:rPr lang="en-US" sz="1100" b="1" dirty="0">
                           <a:solidFill>
-                            <a:srgbClr val="FFFFFF"/>
+                            <a:srgbClr val="1C3140"/>
                           </a:solidFill>
+                          <a:latin typeface="Corbel" pitchFamily="34" charset="0"/>
+                          <a:ea typeface="Corbel" pitchFamily="34" charset="-122"/>
+                          <a:cs typeface="Corbel" pitchFamily="34" charset="-120"/>
                         </a:rPr>
                         <a:t>Best for</a:t>
                       </a:r>
-                      <a:endParaRPr lang="en-US" sz="1100" dirty="0"/>
+                      <a:endParaRPr lang="en-US" sz="1100" dirty="0">
+                        <a:latin typeface="Corbel" charset="0"/>
+                        <a:ea typeface="Corbel" charset="0"/>
+                        <a:cs typeface="Corbel" charset="0"/>
+                      </a:endParaRPr>
                     </a:p>
                   </a:txBody>
-                  <a:tcPr marL="91440" marR="91440" marT="45720" marB="45720" anchor="t">
-                    <a:lnL w="6350" cap="flat" cmpd="sng" algn="ctr">
+                  <a:tcPr marL="76200" marR="76200" marT="76200" marB="76200" anchor="t">
+                    <a:lnL w="5080" cap="flat" cmpd="sng" algn="ctr">
                       <a:solidFill>
-                        <a:srgbClr val="D1D5DB"/>
+                        <a:srgbClr val="D8D3CB"/>
                       </a:solidFill>
                       <a:prstDash val="solid"/>
                       <a:round/>
                       <a:headEnd type="none" w="med" len="med"/>
                       <a:tailEnd type="none" w="med" len="med"/>
                     </a:lnL>
-                    <a:lnR w="6350" cap="flat" cmpd="sng" algn="ctr">
+                    <a:lnR w="5080" cap="flat" cmpd="sng" algn="ctr">
                       <a:solidFill>
-                        <a:srgbClr val="D1D5DB"/>
+                        <a:srgbClr val="D8D3CB"/>
                       </a:solidFill>
                       <a:prstDash val="solid"/>
                       <a:round/>
                       <a:headEnd type="none" w="med" len="med"/>
                       <a:tailEnd type="none" w="med" len="med"/>
                     </a:lnR>
-                    <a:lnT w="6350" cap="flat" cmpd="sng" algn="ctr">
+                    <a:lnT w="5080" cap="flat" cmpd="sng" algn="ctr">
                       <a:solidFill>
-                        <a:srgbClr val="D1D5DB"/>
+                        <a:srgbClr val="D8D3CB"/>
                       </a:solidFill>
                       <a:prstDash val="solid"/>
                       <a:round/>
                       <a:headEnd type="none" w="med" len="med"/>
                       <a:tailEnd type="none" w="med" len="med"/>
                     </a:lnT>
-                    <a:lnB w="6350" cap="flat" cmpd="sng" algn="ctr">
+                    <a:lnB w="5080" cap="flat" cmpd="sng" algn="ctr">
                       <a:solidFill>
-                        <a:srgbClr val="D1D5DB"/>
+                        <a:srgbClr val="D8D3CB"/>
                       </a:solidFill>
                       <a:prstDash val="solid"/>
                       <a:round/>
@@ -5710,7 +6158,7 @@
                       <a:tailEnd type="none" w="med" len="med"/>
                     </a:lnB>
                     <a:solidFill>
-                      <a:srgbClr val="004D99"/>
+                      <a:srgbClr val="F6F4F0"/>
                     </a:solidFill>
                   </a:tcPr>
                 </a:tc>
@@ -5725,45 +6173,52 @@
                       <a:r>
                         <a:rPr lang="en-US" sz="1100" b="1" dirty="0">
                           <a:solidFill>
-                            <a:srgbClr val="FFFFFF"/>
+                            <a:srgbClr val="1C3140"/>
                           </a:solidFill>
+                          <a:latin typeface="Corbel" pitchFamily="34" charset="0"/>
+                          <a:ea typeface="Corbel" pitchFamily="34" charset="-122"/>
+                          <a:cs typeface="Corbel" pitchFamily="34" charset="-120"/>
                         </a:rPr>
                         <a:t>Main weakness</a:t>
                       </a:r>
-                      <a:endParaRPr lang="en-US" sz="1100" dirty="0"/>
+                      <a:endParaRPr lang="en-US" sz="1100" dirty="0">
+                        <a:latin typeface="Corbel" charset="0"/>
+                        <a:ea typeface="Corbel" charset="0"/>
+                        <a:cs typeface="Corbel" charset="0"/>
+                      </a:endParaRPr>
                     </a:p>
                   </a:txBody>
-                  <a:tcPr marL="91440" marR="91440" marT="45720" marB="45720" anchor="t">
-                    <a:lnL w="6350" cap="flat" cmpd="sng" algn="ctr">
+                  <a:tcPr marL="76200" marR="76200" marT="76200" marB="76200" anchor="t">
+                    <a:lnL w="5080" cap="flat" cmpd="sng" algn="ctr">
                       <a:solidFill>
-                        <a:srgbClr val="D1D5DB"/>
+                        <a:srgbClr val="D8D3CB"/>
                       </a:solidFill>
                       <a:prstDash val="solid"/>
                       <a:round/>
                       <a:headEnd type="none" w="med" len="med"/>
                       <a:tailEnd type="none" w="med" len="med"/>
                     </a:lnL>
-                    <a:lnR w="6350" cap="flat" cmpd="sng" algn="ctr">
+                    <a:lnR w="5080" cap="flat" cmpd="sng" algn="ctr">
                       <a:solidFill>
-                        <a:srgbClr val="D1D5DB"/>
+                        <a:srgbClr val="D8D3CB"/>
                       </a:solidFill>
                       <a:prstDash val="solid"/>
                       <a:round/>
                       <a:headEnd type="none" w="med" len="med"/>
                       <a:tailEnd type="none" w="med" len="med"/>
                     </a:lnR>
-                    <a:lnT w="6350" cap="flat" cmpd="sng" algn="ctr">
+                    <a:lnT w="5080" cap="flat" cmpd="sng" algn="ctr">
                       <a:solidFill>
-                        <a:srgbClr val="D1D5DB"/>
+                        <a:srgbClr val="D8D3CB"/>
                       </a:solidFill>
                       <a:prstDash val="solid"/>
                       <a:round/>
                       <a:headEnd type="none" w="med" len="med"/>
                       <a:tailEnd type="none" w="med" len="med"/>
                     </a:lnT>
-                    <a:lnB w="6350" cap="flat" cmpd="sng" algn="ctr">
+                    <a:lnB w="5080" cap="flat" cmpd="sng" algn="ctr">
                       <a:solidFill>
-                        <a:srgbClr val="D1D5DB"/>
+                        <a:srgbClr val="D8D3CB"/>
                       </a:solidFill>
                       <a:prstDash val="solid"/>
                       <a:round/>
@@ -5771,7 +6226,7 @@
                       <a:tailEnd type="none" w="med" len="med"/>
                     </a:lnB>
                     <a:solidFill>
-                      <a:srgbClr val="004D99"/>
+                      <a:srgbClr val="F6F4F0"/>
                     </a:solidFill>
                   </a:tcPr>
                 </a:tc>
@@ -5788,45 +6243,52 @@
                       <a:r>
                         <a:rPr lang="en-US" sz="1100" dirty="0">
                           <a:solidFill>
-                            <a:srgbClr val="374151"/>
+                            <a:srgbClr val="23282E"/>
                           </a:solidFill>
+                          <a:latin typeface="Corbel" pitchFamily="34" charset="0"/>
+                          <a:ea typeface="Corbel" pitchFamily="34" charset="-122"/>
+                          <a:cs typeface="Corbel" pitchFamily="34" charset="-120"/>
                         </a:rPr>
                         <a:t>Cross-sectional</a:t>
                       </a:r>
-                      <a:endParaRPr lang="en-US" sz="1100" dirty="0"/>
+                      <a:endParaRPr lang="en-US" sz="1100" dirty="0">
+                        <a:latin typeface="Corbel" charset="0"/>
+                        <a:ea typeface="Corbel" charset="0"/>
+                        <a:cs typeface="Corbel" charset="0"/>
+                      </a:endParaRPr>
                     </a:p>
                   </a:txBody>
-                  <a:tcPr marL="91440" marR="91440" marT="45720" marB="45720" anchor="t">
-                    <a:lnL w="6350" cap="flat" cmpd="sng" algn="ctr">
+                  <a:tcPr marL="76200" marR="76200" marT="76200" marB="76200" anchor="t">
+                    <a:lnL w="5080" cap="flat" cmpd="sng" algn="ctr">
                       <a:solidFill>
-                        <a:srgbClr val="D1D5DB"/>
+                        <a:srgbClr val="D8D3CB"/>
                       </a:solidFill>
                       <a:prstDash val="solid"/>
                       <a:round/>
                       <a:headEnd type="none" w="med" len="med"/>
                       <a:tailEnd type="none" w="med" len="med"/>
                     </a:lnL>
-                    <a:lnR w="6350" cap="flat" cmpd="sng" algn="ctr">
+                    <a:lnR w="5080" cap="flat" cmpd="sng" algn="ctr">
                       <a:solidFill>
-                        <a:srgbClr val="D1D5DB"/>
+                        <a:srgbClr val="D8D3CB"/>
                       </a:solidFill>
                       <a:prstDash val="solid"/>
                       <a:round/>
                       <a:headEnd type="none" w="med" len="med"/>
                       <a:tailEnd type="none" w="med" len="med"/>
                     </a:lnR>
-                    <a:lnT w="6350" cap="flat" cmpd="sng" algn="ctr">
+                    <a:lnT w="5080" cap="flat" cmpd="sng" algn="ctr">
                       <a:solidFill>
-                        <a:srgbClr val="D1D5DB"/>
+                        <a:srgbClr val="D8D3CB"/>
                       </a:solidFill>
                       <a:prstDash val="solid"/>
                       <a:round/>
                       <a:headEnd type="none" w="med" len="med"/>
                       <a:tailEnd type="none" w="med" len="med"/>
                     </a:lnT>
-                    <a:lnB w="6350" cap="flat" cmpd="sng" algn="ctr">
+                    <a:lnB w="5080" cap="flat" cmpd="sng" algn="ctr">
                       <a:solidFill>
-                        <a:srgbClr val="D1D5DB"/>
+                        <a:srgbClr val="D8D3CB"/>
                       </a:solidFill>
                       <a:prstDash val="solid"/>
                       <a:round/>
@@ -5849,45 +6311,52 @@
                       <a:r>
                         <a:rPr lang="en-US" sz="1100" dirty="0">
                           <a:solidFill>
-                            <a:srgbClr val="374151"/>
+                            <a:srgbClr val="23282E"/>
                           </a:solidFill>
+                          <a:latin typeface="Corbel" pitchFamily="34" charset="0"/>
+                          <a:ea typeface="Corbel" pitchFamily="34" charset="-122"/>
+                          <a:cs typeface="Corbel" pitchFamily="34" charset="-120"/>
                         </a:rPr>
                         <a:t>A population at one time</a:t>
                       </a:r>
-                      <a:endParaRPr lang="en-US" sz="1100" dirty="0"/>
+                      <a:endParaRPr lang="en-US" sz="1100" dirty="0">
+                        <a:latin typeface="Corbel" charset="0"/>
+                        <a:ea typeface="Corbel" charset="0"/>
+                        <a:cs typeface="Corbel" charset="0"/>
+                      </a:endParaRPr>
                     </a:p>
                   </a:txBody>
-                  <a:tcPr marL="91440" marR="91440" marT="45720" marB="45720" anchor="t">
-                    <a:lnL w="6350" cap="flat" cmpd="sng" algn="ctr">
+                  <a:tcPr marL="76200" marR="76200" marT="76200" marB="76200" anchor="t">
+                    <a:lnL w="5080" cap="flat" cmpd="sng" algn="ctr">
                       <a:solidFill>
-                        <a:srgbClr val="D1D5DB"/>
+                        <a:srgbClr val="D8D3CB"/>
                       </a:solidFill>
                       <a:prstDash val="solid"/>
                       <a:round/>
                       <a:headEnd type="none" w="med" len="med"/>
                       <a:tailEnd type="none" w="med" len="med"/>
                     </a:lnL>
-                    <a:lnR w="6350" cap="flat" cmpd="sng" algn="ctr">
+                    <a:lnR w="5080" cap="flat" cmpd="sng" algn="ctr">
                       <a:solidFill>
-                        <a:srgbClr val="D1D5DB"/>
+                        <a:srgbClr val="D8D3CB"/>
                       </a:solidFill>
                       <a:prstDash val="solid"/>
                       <a:round/>
                       <a:headEnd type="none" w="med" len="med"/>
                       <a:tailEnd type="none" w="med" len="med"/>
                     </a:lnR>
-                    <a:lnT w="6350" cap="flat" cmpd="sng" algn="ctr">
+                    <a:lnT w="5080" cap="flat" cmpd="sng" algn="ctr">
                       <a:solidFill>
-                        <a:srgbClr val="D1D5DB"/>
+                        <a:srgbClr val="D8D3CB"/>
                       </a:solidFill>
                       <a:prstDash val="solid"/>
                       <a:round/>
                       <a:headEnd type="none" w="med" len="med"/>
                       <a:tailEnd type="none" w="med" len="med"/>
                     </a:lnT>
-                    <a:lnB w="6350" cap="flat" cmpd="sng" algn="ctr">
+                    <a:lnB w="5080" cap="flat" cmpd="sng" algn="ctr">
                       <a:solidFill>
-                        <a:srgbClr val="D1D5DB"/>
+                        <a:srgbClr val="D8D3CB"/>
                       </a:solidFill>
                       <a:prstDash val="solid"/>
                       <a:round/>
@@ -5910,45 +6379,52 @@
                       <a:r>
                         <a:rPr lang="en-US" sz="1100" dirty="0">
                           <a:solidFill>
-                            <a:srgbClr val="374151"/>
+                            <a:srgbClr val="23282E"/>
                           </a:solidFill>
+                          <a:latin typeface="Corbel" pitchFamily="34" charset="0"/>
+                          <a:ea typeface="Corbel" pitchFamily="34" charset="-122"/>
+                          <a:cs typeface="Corbel" pitchFamily="34" charset="-120"/>
                         </a:rPr>
                         <a:t>Prevalence, associations</a:t>
                       </a:r>
-                      <a:endParaRPr lang="en-US" sz="1100" dirty="0"/>
+                      <a:endParaRPr lang="en-US" sz="1100" dirty="0">
+                        <a:latin typeface="Corbel" charset="0"/>
+                        <a:ea typeface="Corbel" charset="0"/>
+                        <a:cs typeface="Corbel" charset="0"/>
+                      </a:endParaRPr>
                     </a:p>
                   </a:txBody>
-                  <a:tcPr marL="91440" marR="91440" marT="45720" marB="45720" anchor="t">
-                    <a:lnL w="6350" cap="flat" cmpd="sng" algn="ctr">
+                  <a:tcPr marL="76200" marR="76200" marT="76200" marB="76200" anchor="t">
+                    <a:lnL w="5080" cap="flat" cmpd="sng" algn="ctr">
                       <a:solidFill>
-                        <a:srgbClr val="D1D5DB"/>
+                        <a:srgbClr val="D8D3CB"/>
                       </a:solidFill>
                       <a:prstDash val="solid"/>
                       <a:round/>
                       <a:headEnd type="none" w="med" len="med"/>
                       <a:tailEnd type="none" w="med" len="med"/>
                     </a:lnL>
-                    <a:lnR w="6350" cap="flat" cmpd="sng" algn="ctr">
+                    <a:lnR w="5080" cap="flat" cmpd="sng" algn="ctr">
                       <a:solidFill>
-                        <a:srgbClr val="D1D5DB"/>
+                        <a:srgbClr val="D8D3CB"/>
                       </a:solidFill>
                       <a:prstDash val="solid"/>
                       <a:round/>
                       <a:headEnd type="none" w="med" len="med"/>
                       <a:tailEnd type="none" w="med" len="med"/>
                     </a:lnR>
-                    <a:lnT w="6350" cap="flat" cmpd="sng" algn="ctr">
+                    <a:lnT w="5080" cap="flat" cmpd="sng" algn="ctr">
                       <a:solidFill>
-                        <a:srgbClr val="D1D5DB"/>
+                        <a:srgbClr val="D8D3CB"/>
                       </a:solidFill>
                       <a:prstDash val="solid"/>
                       <a:round/>
                       <a:headEnd type="none" w="med" len="med"/>
                       <a:tailEnd type="none" w="med" len="med"/>
                     </a:lnT>
-                    <a:lnB w="6350" cap="flat" cmpd="sng" algn="ctr">
+                    <a:lnB w="5080" cap="flat" cmpd="sng" algn="ctr">
                       <a:solidFill>
-                        <a:srgbClr val="D1D5DB"/>
+                        <a:srgbClr val="D8D3CB"/>
                       </a:solidFill>
                       <a:prstDash val="solid"/>
                       <a:round/>
@@ -5971,45 +6447,52 @@
                       <a:r>
                         <a:rPr lang="en-US" sz="1100" dirty="0">
                           <a:solidFill>
-                            <a:srgbClr val="374151"/>
+                            <a:srgbClr val="23282E"/>
                           </a:solidFill>
+                          <a:latin typeface="Corbel" pitchFamily="34" charset="0"/>
+                          <a:ea typeface="Corbel" pitchFamily="34" charset="-122"/>
+                          <a:cs typeface="Corbel" pitchFamily="34" charset="-120"/>
                         </a:rPr>
                         <a:t>No temporal sequence</a:t>
                       </a:r>
-                      <a:endParaRPr lang="en-US" sz="1100" dirty="0"/>
+                      <a:endParaRPr lang="en-US" sz="1100" dirty="0">
+                        <a:latin typeface="Corbel" charset="0"/>
+                        <a:ea typeface="Corbel" charset="0"/>
+                        <a:cs typeface="Corbel" charset="0"/>
+                      </a:endParaRPr>
                     </a:p>
                   </a:txBody>
-                  <a:tcPr marL="91440" marR="91440" marT="45720" marB="45720" anchor="t">
-                    <a:lnL w="6350" cap="flat" cmpd="sng" algn="ctr">
+                  <a:tcPr marL="76200" marR="76200" marT="76200" marB="76200" anchor="t">
+                    <a:lnL w="5080" cap="flat" cmpd="sng" algn="ctr">
                       <a:solidFill>
-                        <a:srgbClr val="D1D5DB"/>
+                        <a:srgbClr val="D8D3CB"/>
                       </a:solidFill>
                       <a:prstDash val="solid"/>
                       <a:round/>
                       <a:headEnd type="none" w="med" len="med"/>
                       <a:tailEnd type="none" w="med" len="med"/>
                     </a:lnL>
-                    <a:lnR w="6350" cap="flat" cmpd="sng" algn="ctr">
+                    <a:lnR w="5080" cap="flat" cmpd="sng" algn="ctr">
                       <a:solidFill>
-                        <a:srgbClr val="D1D5DB"/>
+                        <a:srgbClr val="D8D3CB"/>
                       </a:solidFill>
                       <a:prstDash val="solid"/>
                       <a:round/>
                       <a:headEnd type="none" w="med" len="med"/>
                       <a:tailEnd type="none" w="med" len="med"/>
                     </a:lnR>
-                    <a:lnT w="6350" cap="flat" cmpd="sng" algn="ctr">
+                    <a:lnT w="5080" cap="flat" cmpd="sng" algn="ctr">
                       <a:solidFill>
-                        <a:srgbClr val="D1D5DB"/>
+                        <a:srgbClr val="D8D3CB"/>
                       </a:solidFill>
                       <a:prstDash val="solid"/>
                       <a:round/>
                       <a:headEnd type="none" w="med" len="med"/>
                       <a:tailEnd type="none" w="med" len="med"/>
                     </a:lnT>
-                    <a:lnB w="6350" cap="flat" cmpd="sng" algn="ctr">
+                    <a:lnB w="5080" cap="flat" cmpd="sng" algn="ctr">
                       <a:solidFill>
-                        <a:srgbClr val="D1D5DB"/>
+                        <a:srgbClr val="D8D3CB"/>
                       </a:solidFill>
                       <a:prstDash val="solid"/>
                       <a:round/>
@@ -6034,291 +6517,52 @@
                       <a:r>
                         <a:rPr lang="en-US" sz="1100" dirty="0">
                           <a:solidFill>
-                            <a:srgbClr val="374151"/>
+                            <a:srgbClr val="23282E"/>
                           </a:solidFill>
+                          <a:latin typeface="Corbel" pitchFamily="34" charset="0"/>
+                          <a:ea typeface="Corbel" pitchFamily="34" charset="-122"/>
+                          <a:cs typeface="Corbel" pitchFamily="34" charset="-120"/>
                         </a:rPr>
                         <a:t>Case-control</a:t>
                       </a:r>
-                      <a:endParaRPr lang="en-US" sz="1100" dirty="0"/>
+                      <a:endParaRPr lang="en-US" sz="1100" dirty="0">
+                        <a:latin typeface="Corbel" charset="0"/>
+                        <a:ea typeface="Corbel" charset="0"/>
+                        <a:cs typeface="Corbel" charset="0"/>
+                      </a:endParaRPr>
                     </a:p>
                   </a:txBody>
-                  <a:tcPr marL="91440" marR="91440" marT="45720" marB="45720" anchor="t">
-                    <a:lnL w="6350" cap="flat" cmpd="sng" algn="ctr">
+                  <a:tcPr marL="76200" marR="76200" marT="76200" marB="76200" anchor="t">
+                    <a:lnL w="5080" cap="flat" cmpd="sng" algn="ctr">
                       <a:solidFill>
-                        <a:srgbClr val="D1D5DB"/>
+                        <a:srgbClr val="D8D3CB"/>
                       </a:solidFill>
                       <a:prstDash val="solid"/>
                       <a:round/>
                       <a:headEnd type="none" w="med" len="med"/>
                       <a:tailEnd type="none" w="med" len="med"/>
                     </a:lnL>
-                    <a:lnR w="6350" cap="flat" cmpd="sng" algn="ctr">
+                    <a:lnR w="5080" cap="flat" cmpd="sng" algn="ctr">
                       <a:solidFill>
-                        <a:srgbClr val="D1D5DB"/>
+                        <a:srgbClr val="D8D3CB"/>
                       </a:solidFill>
                       <a:prstDash val="solid"/>
                       <a:round/>
                       <a:headEnd type="none" w="med" len="med"/>
                       <a:tailEnd type="none" w="med" len="med"/>
                     </a:lnR>
-                    <a:lnT w="6350" cap="flat" cmpd="sng" algn="ctr">
+                    <a:lnT w="5080" cap="flat" cmpd="sng" algn="ctr">
                       <a:solidFill>
-                        <a:srgbClr val="D1D5DB"/>
+                        <a:srgbClr val="D8D3CB"/>
                       </a:solidFill>
                       <a:prstDash val="solid"/>
                       <a:round/>
                       <a:headEnd type="none" w="med" len="med"/>
                       <a:tailEnd type="none" w="med" len="med"/>
                     </a:lnT>
-                    <a:lnB w="6350" cap="flat" cmpd="sng" algn="ctr">
+                    <a:lnB w="5080" cap="flat" cmpd="sng" algn="ctr">
                       <a:solidFill>
-                        <a:srgbClr val="D1D5DB"/>
-                      </a:solidFill>
-                      <a:prstDash val="solid"/>
-                      <a:round/>
-                      <a:headEnd type="none" w="med" len="med"/>
-                      <a:tailEnd type="none" w="med" len="med"/>
-                    </a:lnB>
-                    <a:solidFill>
-                      <a:srgbClr val="F9FAFB"/>
-                    </a:solidFill>
-                  </a:tcPr>
-                </a:tc>
-                <a:tc>
-                  <a:txBody>
-                    <a:bodyPr/>
-                    <a:lstStyle/>
-                    <a:p>
-                      <a:pPr indent="0" marL="0">
-                        <a:buNone/>
-                      </a:pPr>
-                      <a:r>
-                        <a:rPr lang="en-US" sz="1100" dirty="0">
-                          <a:solidFill>
-                            <a:srgbClr val="374151"/>
-                          </a:solidFill>
-                        </a:rPr>
-                        <a:t>The outcome</a:t>
-                      </a:r>
-                      <a:endParaRPr lang="en-US" sz="1100" dirty="0"/>
-                    </a:p>
-                  </a:txBody>
-                  <a:tcPr marL="91440" marR="91440" marT="45720" marB="45720" anchor="t">
-                    <a:lnL w="6350" cap="flat" cmpd="sng" algn="ctr">
-                      <a:solidFill>
-                        <a:srgbClr val="D1D5DB"/>
-                      </a:solidFill>
-                      <a:prstDash val="solid"/>
-                      <a:round/>
-                      <a:headEnd type="none" w="med" len="med"/>
-                      <a:tailEnd type="none" w="med" len="med"/>
-                    </a:lnL>
-                    <a:lnR w="6350" cap="flat" cmpd="sng" algn="ctr">
-                      <a:solidFill>
-                        <a:srgbClr val="D1D5DB"/>
-                      </a:solidFill>
-                      <a:prstDash val="solid"/>
-                      <a:round/>
-                      <a:headEnd type="none" w="med" len="med"/>
-                      <a:tailEnd type="none" w="med" len="med"/>
-                    </a:lnR>
-                    <a:lnT w="6350" cap="flat" cmpd="sng" algn="ctr">
-                      <a:solidFill>
-                        <a:srgbClr val="D1D5DB"/>
-                      </a:solidFill>
-                      <a:prstDash val="solid"/>
-                      <a:round/>
-                      <a:headEnd type="none" w="med" len="med"/>
-                      <a:tailEnd type="none" w="med" len="med"/>
-                    </a:lnT>
-                    <a:lnB w="6350" cap="flat" cmpd="sng" algn="ctr">
-                      <a:solidFill>
-                        <a:srgbClr val="D1D5DB"/>
-                      </a:solidFill>
-                      <a:prstDash val="solid"/>
-                      <a:round/>
-                      <a:headEnd type="none" w="med" len="med"/>
-                      <a:tailEnd type="none" w="med" len="med"/>
-                    </a:lnB>
-                    <a:solidFill>
-                      <a:srgbClr val="F9FAFB"/>
-                    </a:solidFill>
-                  </a:tcPr>
-                </a:tc>
-                <a:tc>
-                  <a:txBody>
-                    <a:bodyPr/>
-                    <a:lstStyle/>
-                    <a:p>
-                      <a:pPr indent="0" marL="0">
-                        <a:buNone/>
-                      </a:pPr>
-                      <a:r>
-                        <a:rPr lang="en-US" sz="1100" dirty="0">
-                          <a:solidFill>
-                            <a:srgbClr val="374151"/>
-                          </a:solidFill>
-                        </a:rPr>
-                        <a:t>Rare outcomes, long latency</a:t>
-                      </a:r>
-                      <a:endParaRPr lang="en-US" sz="1100" dirty="0"/>
-                    </a:p>
-                  </a:txBody>
-                  <a:tcPr marL="91440" marR="91440" marT="45720" marB="45720" anchor="t">
-                    <a:lnL w="6350" cap="flat" cmpd="sng" algn="ctr">
-                      <a:solidFill>
-                        <a:srgbClr val="D1D5DB"/>
-                      </a:solidFill>
-                      <a:prstDash val="solid"/>
-                      <a:round/>
-                      <a:headEnd type="none" w="med" len="med"/>
-                      <a:tailEnd type="none" w="med" len="med"/>
-                    </a:lnL>
-                    <a:lnR w="6350" cap="flat" cmpd="sng" algn="ctr">
-                      <a:solidFill>
-                        <a:srgbClr val="D1D5DB"/>
-                      </a:solidFill>
-                      <a:prstDash val="solid"/>
-                      <a:round/>
-                      <a:headEnd type="none" w="med" len="med"/>
-                      <a:tailEnd type="none" w="med" len="med"/>
-                    </a:lnR>
-                    <a:lnT w="6350" cap="flat" cmpd="sng" algn="ctr">
-                      <a:solidFill>
-                        <a:srgbClr val="D1D5DB"/>
-                      </a:solidFill>
-                      <a:prstDash val="solid"/>
-                      <a:round/>
-                      <a:headEnd type="none" w="med" len="med"/>
-                      <a:tailEnd type="none" w="med" len="med"/>
-                    </a:lnT>
-                    <a:lnB w="6350" cap="flat" cmpd="sng" algn="ctr">
-                      <a:solidFill>
-                        <a:srgbClr val="D1D5DB"/>
-                      </a:solidFill>
-                      <a:prstDash val="solid"/>
-                      <a:round/>
-                      <a:headEnd type="none" w="med" len="med"/>
-                      <a:tailEnd type="none" w="med" len="med"/>
-                    </a:lnB>
-                    <a:solidFill>
-                      <a:srgbClr val="F9FAFB"/>
-                    </a:solidFill>
-                  </a:tcPr>
-                </a:tc>
-                <a:tc>
-                  <a:txBody>
-                    <a:bodyPr/>
-                    <a:lstStyle/>
-                    <a:p>
-                      <a:pPr indent="0" marL="0">
-                        <a:buNone/>
-                      </a:pPr>
-                      <a:r>
-                        <a:rPr lang="en-US" sz="1100" dirty="0">
-                          <a:solidFill>
-                            <a:srgbClr val="374151"/>
-                          </a:solidFill>
-                        </a:rPr>
-                        <a:t>Recall and selection bias</a:t>
-                      </a:r>
-                      <a:endParaRPr lang="en-US" sz="1100" dirty="0"/>
-                    </a:p>
-                  </a:txBody>
-                  <a:tcPr marL="91440" marR="91440" marT="45720" marB="45720" anchor="t">
-                    <a:lnL w="6350" cap="flat" cmpd="sng" algn="ctr">
-                      <a:solidFill>
-                        <a:srgbClr val="D1D5DB"/>
-                      </a:solidFill>
-                      <a:prstDash val="solid"/>
-                      <a:round/>
-                      <a:headEnd type="none" w="med" len="med"/>
-                      <a:tailEnd type="none" w="med" len="med"/>
-                    </a:lnL>
-                    <a:lnR w="6350" cap="flat" cmpd="sng" algn="ctr">
-                      <a:solidFill>
-                        <a:srgbClr val="D1D5DB"/>
-                      </a:solidFill>
-                      <a:prstDash val="solid"/>
-                      <a:round/>
-                      <a:headEnd type="none" w="med" len="med"/>
-                      <a:tailEnd type="none" w="med" len="med"/>
-                    </a:lnR>
-                    <a:lnT w="6350" cap="flat" cmpd="sng" algn="ctr">
-                      <a:solidFill>
-                        <a:srgbClr val="D1D5DB"/>
-                      </a:solidFill>
-                      <a:prstDash val="solid"/>
-                      <a:round/>
-                      <a:headEnd type="none" w="med" len="med"/>
-                      <a:tailEnd type="none" w="med" len="med"/>
-                    </a:lnT>
-                    <a:lnB w="6350" cap="flat" cmpd="sng" algn="ctr">
-                      <a:solidFill>
-                        <a:srgbClr val="D1D5DB"/>
-                      </a:solidFill>
-                      <a:prstDash val="solid"/>
-                      <a:round/>
-                      <a:headEnd type="none" w="med" len="med"/>
-                      <a:tailEnd type="none" w="med" len="med"/>
-                    </a:lnB>
-                    <a:solidFill>
-                      <a:srgbClr val="F9FAFB"/>
-                    </a:solidFill>
-                  </a:tcPr>
-                </a:tc>
-              </a:tr>
-              <a:tr h="0">
-                <a:tc>
-                  <a:txBody>
-                    <a:bodyPr/>
-                    <a:lstStyle/>
-                    <a:p>
-                      <a:pPr indent="0" marL="0">
-                        <a:buNone/>
-                      </a:pPr>
-                      <a:r>
-                        <a:rPr lang="en-US" sz="1100" dirty="0">
-                          <a:solidFill>
-                            <a:srgbClr val="374151"/>
-                          </a:solidFill>
-                        </a:rPr>
-                        <a:t>Cohort</a:t>
-                      </a:r>
-                      <a:endParaRPr lang="en-US" sz="1100" dirty="0"/>
-                    </a:p>
-                  </a:txBody>
-                  <a:tcPr marL="91440" marR="91440" marT="45720" marB="45720" anchor="t">
-                    <a:lnL w="6350" cap="flat" cmpd="sng" algn="ctr">
-                      <a:solidFill>
-                        <a:srgbClr val="D1D5DB"/>
-                      </a:solidFill>
-                      <a:prstDash val="solid"/>
-                      <a:round/>
-                      <a:headEnd type="none" w="med" len="med"/>
-                      <a:tailEnd type="none" w="med" len="med"/>
-                    </a:lnL>
-                    <a:lnR w="6350" cap="flat" cmpd="sng" algn="ctr">
-                      <a:solidFill>
-                        <a:srgbClr val="D1D5DB"/>
-                      </a:solidFill>
-                      <a:prstDash val="solid"/>
-                      <a:round/>
-                      <a:headEnd type="none" w="med" len="med"/>
-                      <a:tailEnd type="none" w="med" len="med"/>
-                    </a:lnR>
-                    <a:lnT w="6350" cap="flat" cmpd="sng" algn="ctr">
-                      <a:solidFill>
-                        <a:srgbClr val="D1D5DB"/>
-                      </a:solidFill>
-                      <a:prstDash val="solid"/>
-                      <a:round/>
-                      <a:headEnd type="none" w="med" len="med"/>
-                      <a:tailEnd type="none" w="med" len="med"/>
-                    </a:lnT>
-                    <a:lnB w="6350" cap="flat" cmpd="sng" algn="ctr">
-                      <a:solidFill>
-                        <a:srgbClr val="D1D5DB"/>
+                        <a:srgbClr val="D8D3CB"/>
                       </a:solidFill>
                       <a:prstDash val="solid"/>
                       <a:round/>
@@ -6341,45 +6585,52 @@
                       <a:r>
                         <a:rPr lang="en-US" sz="1100" dirty="0">
                           <a:solidFill>
-                            <a:srgbClr val="374151"/>
+                            <a:srgbClr val="23282E"/>
                           </a:solidFill>
+                          <a:latin typeface="Corbel" pitchFamily="34" charset="0"/>
+                          <a:ea typeface="Corbel" pitchFamily="34" charset="-122"/>
+                          <a:cs typeface="Corbel" pitchFamily="34" charset="-120"/>
                         </a:rPr>
-                        <a:t>The exposure</a:t>
+                        <a:t>The outcome</a:t>
                       </a:r>
-                      <a:endParaRPr lang="en-US" sz="1100" dirty="0"/>
+                      <a:endParaRPr lang="en-US" sz="1100" dirty="0">
+                        <a:latin typeface="Corbel" charset="0"/>
+                        <a:ea typeface="Corbel" charset="0"/>
+                        <a:cs typeface="Corbel" charset="0"/>
+                      </a:endParaRPr>
                     </a:p>
                   </a:txBody>
-                  <a:tcPr marL="91440" marR="91440" marT="45720" marB="45720" anchor="t">
-                    <a:lnL w="6350" cap="flat" cmpd="sng" algn="ctr">
+                  <a:tcPr marL="76200" marR="76200" marT="76200" marB="76200" anchor="t">
+                    <a:lnL w="5080" cap="flat" cmpd="sng" algn="ctr">
                       <a:solidFill>
-                        <a:srgbClr val="D1D5DB"/>
+                        <a:srgbClr val="D8D3CB"/>
                       </a:solidFill>
                       <a:prstDash val="solid"/>
                       <a:round/>
                       <a:headEnd type="none" w="med" len="med"/>
                       <a:tailEnd type="none" w="med" len="med"/>
                     </a:lnL>
-                    <a:lnR w="6350" cap="flat" cmpd="sng" algn="ctr">
+                    <a:lnR w="5080" cap="flat" cmpd="sng" algn="ctr">
                       <a:solidFill>
-                        <a:srgbClr val="D1D5DB"/>
+                        <a:srgbClr val="D8D3CB"/>
                       </a:solidFill>
                       <a:prstDash val="solid"/>
                       <a:round/>
                       <a:headEnd type="none" w="med" len="med"/>
                       <a:tailEnd type="none" w="med" len="med"/>
                     </a:lnR>
-                    <a:lnT w="6350" cap="flat" cmpd="sng" algn="ctr">
+                    <a:lnT w="5080" cap="flat" cmpd="sng" algn="ctr">
                       <a:solidFill>
-                        <a:srgbClr val="D1D5DB"/>
+                        <a:srgbClr val="D8D3CB"/>
                       </a:solidFill>
                       <a:prstDash val="solid"/>
                       <a:round/>
                       <a:headEnd type="none" w="med" len="med"/>
                       <a:tailEnd type="none" w="med" len="med"/>
                     </a:lnT>
-                    <a:lnB w="6350" cap="flat" cmpd="sng" algn="ctr">
+                    <a:lnB w="5080" cap="flat" cmpd="sng" algn="ctr">
                       <a:solidFill>
-                        <a:srgbClr val="D1D5DB"/>
+                        <a:srgbClr val="D8D3CB"/>
                       </a:solidFill>
                       <a:prstDash val="solid"/>
                       <a:round/>
@@ -6402,45 +6653,52 @@
                       <a:r>
                         <a:rPr lang="en-US" sz="1100" dirty="0">
                           <a:solidFill>
-                            <a:srgbClr val="374151"/>
+                            <a:srgbClr val="23282E"/>
                           </a:solidFill>
+                          <a:latin typeface="Corbel" pitchFamily="34" charset="0"/>
+                          <a:ea typeface="Corbel" pitchFamily="34" charset="-122"/>
+                          <a:cs typeface="Corbel" pitchFamily="34" charset="-120"/>
                         </a:rPr>
-                        <a:t>Incidence, temporal sequence</a:t>
+                        <a:t>Rare outcomes, long latency</a:t>
                       </a:r>
-                      <a:endParaRPr lang="en-US" sz="1100" dirty="0"/>
+                      <a:endParaRPr lang="en-US" sz="1100" dirty="0">
+                        <a:latin typeface="Corbel" charset="0"/>
+                        <a:ea typeface="Corbel" charset="0"/>
+                        <a:cs typeface="Corbel" charset="0"/>
+                      </a:endParaRPr>
                     </a:p>
                   </a:txBody>
-                  <a:tcPr marL="91440" marR="91440" marT="45720" marB="45720" anchor="t">
-                    <a:lnL w="6350" cap="flat" cmpd="sng" algn="ctr">
+                  <a:tcPr marL="76200" marR="76200" marT="76200" marB="76200" anchor="t">
+                    <a:lnL w="5080" cap="flat" cmpd="sng" algn="ctr">
                       <a:solidFill>
-                        <a:srgbClr val="D1D5DB"/>
+                        <a:srgbClr val="D8D3CB"/>
                       </a:solidFill>
                       <a:prstDash val="solid"/>
                       <a:round/>
                       <a:headEnd type="none" w="med" len="med"/>
                       <a:tailEnd type="none" w="med" len="med"/>
                     </a:lnL>
-                    <a:lnR w="6350" cap="flat" cmpd="sng" algn="ctr">
+                    <a:lnR w="5080" cap="flat" cmpd="sng" algn="ctr">
                       <a:solidFill>
-                        <a:srgbClr val="D1D5DB"/>
+                        <a:srgbClr val="D8D3CB"/>
                       </a:solidFill>
                       <a:prstDash val="solid"/>
                       <a:round/>
                       <a:headEnd type="none" w="med" len="med"/>
                       <a:tailEnd type="none" w="med" len="med"/>
                     </a:lnR>
-                    <a:lnT w="6350" cap="flat" cmpd="sng" algn="ctr">
+                    <a:lnT w="5080" cap="flat" cmpd="sng" algn="ctr">
                       <a:solidFill>
-                        <a:srgbClr val="D1D5DB"/>
+                        <a:srgbClr val="D8D3CB"/>
                       </a:solidFill>
                       <a:prstDash val="solid"/>
                       <a:round/>
                       <a:headEnd type="none" w="med" len="med"/>
                       <a:tailEnd type="none" w="med" len="med"/>
                     </a:lnT>
-                    <a:lnB w="6350" cap="flat" cmpd="sng" algn="ctr">
+                    <a:lnB w="5080" cap="flat" cmpd="sng" algn="ctr">
                       <a:solidFill>
-                        <a:srgbClr val="D1D5DB"/>
+                        <a:srgbClr val="D8D3CB"/>
                       </a:solidFill>
                       <a:prstDash val="solid"/>
                       <a:round/>
@@ -6463,45 +6721,52 @@
                       <a:r>
                         <a:rPr lang="en-US" sz="1100" dirty="0">
                           <a:solidFill>
-                            <a:srgbClr val="374151"/>
+                            <a:srgbClr val="23282E"/>
                           </a:solidFill>
+                          <a:latin typeface="Corbel" pitchFamily="34" charset="0"/>
+                          <a:ea typeface="Corbel" pitchFamily="34" charset="-122"/>
+                          <a:cs typeface="Corbel" pitchFamily="34" charset="-120"/>
                         </a:rPr>
-                        <a:t>Cost, attrition</a:t>
+                        <a:t>Recall and selection bias</a:t>
                       </a:r>
-                      <a:endParaRPr lang="en-US" sz="1100" dirty="0"/>
+                      <a:endParaRPr lang="en-US" sz="1100" dirty="0">
+                        <a:latin typeface="Corbel" charset="0"/>
+                        <a:ea typeface="Corbel" charset="0"/>
+                        <a:cs typeface="Corbel" charset="0"/>
+                      </a:endParaRPr>
                     </a:p>
                   </a:txBody>
-                  <a:tcPr marL="91440" marR="91440" marT="45720" marB="45720" anchor="t">
-                    <a:lnL w="6350" cap="flat" cmpd="sng" algn="ctr">
+                  <a:tcPr marL="76200" marR="76200" marT="76200" marB="76200" anchor="t">
+                    <a:lnL w="5080" cap="flat" cmpd="sng" algn="ctr">
                       <a:solidFill>
-                        <a:srgbClr val="D1D5DB"/>
+                        <a:srgbClr val="D8D3CB"/>
                       </a:solidFill>
                       <a:prstDash val="solid"/>
                       <a:round/>
                       <a:headEnd type="none" w="med" len="med"/>
                       <a:tailEnd type="none" w="med" len="med"/>
                     </a:lnL>
-                    <a:lnR w="6350" cap="flat" cmpd="sng" algn="ctr">
+                    <a:lnR w="5080" cap="flat" cmpd="sng" algn="ctr">
                       <a:solidFill>
-                        <a:srgbClr val="D1D5DB"/>
+                        <a:srgbClr val="D8D3CB"/>
                       </a:solidFill>
                       <a:prstDash val="solid"/>
                       <a:round/>
                       <a:headEnd type="none" w="med" len="med"/>
                       <a:tailEnd type="none" w="med" len="med"/>
                     </a:lnR>
-                    <a:lnT w="6350" cap="flat" cmpd="sng" algn="ctr">
+                    <a:lnT w="5080" cap="flat" cmpd="sng" algn="ctr">
                       <a:solidFill>
-                        <a:srgbClr val="D1D5DB"/>
+                        <a:srgbClr val="D8D3CB"/>
                       </a:solidFill>
                       <a:prstDash val="solid"/>
                       <a:round/>
                       <a:headEnd type="none" w="med" len="med"/>
                       <a:tailEnd type="none" w="med" len="med"/>
                     </a:lnT>
-                    <a:lnB w="6350" cap="flat" cmpd="sng" algn="ctr">
+                    <a:lnB w="5080" cap="flat" cmpd="sng" algn="ctr">
                       <a:solidFill>
-                        <a:srgbClr val="D1D5DB"/>
+                        <a:srgbClr val="D8D3CB"/>
                       </a:solidFill>
                       <a:prstDash val="solid"/>
                       <a:round/>
@@ -6526,45 +6791,52 @@
                       <a:r>
                         <a:rPr lang="en-US" sz="1100" dirty="0">
                           <a:solidFill>
-                            <a:srgbClr val="374151"/>
+                            <a:srgbClr val="23282E"/>
                           </a:solidFill>
+                          <a:latin typeface="Corbel" pitchFamily="34" charset="0"/>
+                          <a:ea typeface="Corbel" pitchFamily="34" charset="-122"/>
+                          <a:cs typeface="Corbel" pitchFamily="34" charset="-120"/>
                         </a:rPr>
-                        <a:t>Ecological</a:t>
+                        <a:t>Cohort</a:t>
                       </a:r>
-                      <a:endParaRPr lang="en-US" sz="1100" dirty="0"/>
+                      <a:endParaRPr lang="en-US" sz="1100" dirty="0">
+                        <a:latin typeface="Corbel" charset="0"/>
+                        <a:ea typeface="Corbel" charset="0"/>
+                        <a:cs typeface="Corbel" charset="0"/>
+                      </a:endParaRPr>
                     </a:p>
                   </a:txBody>
-                  <a:tcPr marL="91440" marR="91440" marT="45720" marB="45720" anchor="t">
-                    <a:lnL w="6350" cap="flat" cmpd="sng" algn="ctr">
+                  <a:tcPr marL="76200" marR="76200" marT="76200" marB="76200" anchor="t">
+                    <a:lnL w="5080" cap="flat" cmpd="sng" algn="ctr">
                       <a:solidFill>
-                        <a:srgbClr val="D1D5DB"/>
+                        <a:srgbClr val="D8D3CB"/>
                       </a:solidFill>
                       <a:prstDash val="solid"/>
                       <a:round/>
                       <a:headEnd type="none" w="med" len="med"/>
                       <a:tailEnd type="none" w="med" len="med"/>
                     </a:lnL>
-                    <a:lnR w="6350" cap="flat" cmpd="sng" algn="ctr">
+                    <a:lnR w="5080" cap="flat" cmpd="sng" algn="ctr">
                       <a:solidFill>
-                        <a:srgbClr val="D1D5DB"/>
+                        <a:srgbClr val="D8D3CB"/>
                       </a:solidFill>
                       <a:prstDash val="solid"/>
                       <a:round/>
                       <a:headEnd type="none" w="med" len="med"/>
                       <a:tailEnd type="none" w="med" len="med"/>
                     </a:lnR>
-                    <a:lnT w="6350" cap="flat" cmpd="sng" algn="ctr">
+                    <a:lnT w="5080" cap="flat" cmpd="sng" algn="ctr">
                       <a:solidFill>
-                        <a:srgbClr val="D1D5DB"/>
+                        <a:srgbClr val="D8D3CB"/>
                       </a:solidFill>
                       <a:prstDash val="solid"/>
                       <a:round/>
                       <a:headEnd type="none" w="med" len="med"/>
                       <a:tailEnd type="none" w="med" len="med"/>
                     </a:lnT>
-                    <a:lnB w="6350" cap="flat" cmpd="sng" algn="ctr">
+                    <a:lnB w="5080" cap="flat" cmpd="sng" algn="ctr">
                       <a:solidFill>
-                        <a:srgbClr val="D1D5DB"/>
+                        <a:srgbClr val="D8D3CB"/>
                       </a:solidFill>
                       <a:prstDash val="solid"/>
                       <a:round/>
@@ -6572,7 +6844,7 @@
                       <a:tailEnd type="none" w="med" len="med"/>
                     </a:lnB>
                     <a:solidFill>
-                      <a:srgbClr val="F9FAFB"/>
+                      <a:srgbClr val="FFFFFF"/>
                     </a:solidFill>
                   </a:tcPr>
                 </a:tc>
@@ -6587,45 +6859,52 @@
                       <a:r>
                         <a:rPr lang="en-US" sz="1100" dirty="0">
                           <a:solidFill>
-                            <a:srgbClr val="374151"/>
+                            <a:srgbClr val="23282E"/>
                           </a:solidFill>
+                          <a:latin typeface="Corbel" pitchFamily="34" charset="0"/>
+                          <a:ea typeface="Corbel" pitchFamily="34" charset="-122"/>
+                          <a:cs typeface="Corbel" pitchFamily="34" charset="-120"/>
                         </a:rPr>
-                        <a:t>Groups</a:t>
+                        <a:t>The exposure</a:t>
                       </a:r>
-                      <a:endParaRPr lang="en-US" sz="1100" dirty="0"/>
+                      <a:endParaRPr lang="en-US" sz="1100" dirty="0">
+                        <a:latin typeface="Corbel" charset="0"/>
+                        <a:ea typeface="Corbel" charset="0"/>
+                        <a:cs typeface="Corbel" charset="0"/>
+                      </a:endParaRPr>
                     </a:p>
                   </a:txBody>
-                  <a:tcPr marL="91440" marR="91440" marT="45720" marB="45720" anchor="t">
-                    <a:lnL w="6350" cap="flat" cmpd="sng" algn="ctr">
+                  <a:tcPr marL="76200" marR="76200" marT="76200" marB="76200" anchor="t">
+                    <a:lnL w="5080" cap="flat" cmpd="sng" algn="ctr">
                       <a:solidFill>
-                        <a:srgbClr val="D1D5DB"/>
+                        <a:srgbClr val="D8D3CB"/>
                       </a:solidFill>
                       <a:prstDash val="solid"/>
                       <a:round/>
                       <a:headEnd type="none" w="med" len="med"/>
                       <a:tailEnd type="none" w="med" len="med"/>
                     </a:lnL>
-                    <a:lnR w="6350" cap="flat" cmpd="sng" algn="ctr">
+                    <a:lnR w="5080" cap="flat" cmpd="sng" algn="ctr">
                       <a:solidFill>
-                        <a:srgbClr val="D1D5DB"/>
+                        <a:srgbClr val="D8D3CB"/>
                       </a:solidFill>
                       <a:prstDash val="solid"/>
                       <a:round/>
                       <a:headEnd type="none" w="med" len="med"/>
                       <a:tailEnd type="none" w="med" len="med"/>
                     </a:lnR>
-                    <a:lnT w="6350" cap="flat" cmpd="sng" algn="ctr">
+                    <a:lnT w="5080" cap="flat" cmpd="sng" algn="ctr">
                       <a:solidFill>
-                        <a:srgbClr val="D1D5DB"/>
+                        <a:srgbClr val="D8D3CB"/>
                       </a:solidFill>
                       <a:prstDash val="solid"/>
                       <a:round/>
                       <a:headEnd type="none" w="med" len="med"/>
                       <a:tailEnd type="none" w="med" len="med"/>
                     </a:lnT>
-                    <a:lnB w="6350" cap="flat" cmpd="sng" algn="ctr">
+                    <a:lnB w="5080" cap="flat" cmpd="sng" algn="ctr">
                       <a:solidFill>
-                        <a:srgbClr val="D1D5DB"/>
+                        <a:srgbClr val="D8D3CB"/>
                       </a:solidFill>
                       <a:prstDash val="solid"/>
                       <a:round/>
@@ -6633,7 +6912,7 @@
                       <a:tailEnd type="none" w="med" len="med"/>
                     </a:lnB>
                     <a:solidFill>
-                      <a:srgbClr val="F9FAFB"/>
+                      <a:srgbClr val="FFFFFF"/>
                     </a:solidFill>
                   </a:tcPr>
                 </a:tc>
@@ -6648,45 +6927,52 @@
                       <a:r>
                         <a:rPr lang="en-US" sz="1100" dirty="0">
                           <a:solidFill>
-                            <a:srgbClr val="374151"/>
+                            <a:srgbClr val="23282E"/>
                           </a:solidFill>
+                          <a:latin typeface="Corbel" pitchFamily="34" charset="0"/>
+                          <a:ea typeface="Corbel" pitchFamily="34" charset="-122"/>
+                          <a:cs typeface="Corbel" pitchFamily="34" charset="-120"/>
                         </a:rPr>
-                        <a:t>Population-level hypotheses</a:t>
+                        <a:t>Incidence, temporal sequence</a:t>
                       </a:r>
-                      <a:endParaRPr lang="en-US" sz="1100" dirty="0"/>
+                      <a:endParaRPr lang="en-US" sz="1100" dirty="0">
+                        <a:latin typeface="Corbel" charset="0"/>
+                        <a:ea typeface="Corbel" charset="0"/>
+                        <a:cs typeface="Corbel" charset="0"/>
+                      </a:endParaRPr>
                     </a:p>
                   </a:txBody>
-                  <a:tcPr marL="91440" marR="91440" marT="45720" marB="45720" anchor="t">
-                    <a:lnL w="6350" cap="flat" cmpd="sng" algn="ctr">
+                  <a:tcPr marL="76200" marR="76200" marT="76200" marB="76200" anchor="t">
+                    <a:lnL w="5080" cap="flat" cmpd="sng" algn="ctr">
                       <a:solidFill>
-                        <a:srgbClr val="D1D5DB"/>
+                        <a:srgbClr val="D8D3CB"/>
                       </a:solidFill>
                       <a:prstDash val="solid"/>
                       <a:round/>
                       <a:headEnd type="none" w="med" len="med"/>
                       <a:tailEnd type="none" w="med" len="med"/>
                     </a:lnL>
-                    <a:lnR w="6350" cap="flat" cmpd="sng" algn="ctr">
+                    <a:lnR w="5080" cap="flat" cmpd="sng" algn="ctr">
                       <a:solidFill>
-                        <a:srgbClr val="D1D5DB"/>
+                        <a:srgbClr val="D8D3CB"/>
                       </a:solidFill>
                       <a:prstDash val="solid"/>
                       <a:round/>
                       <a:headEnd type="none" w="med" len="med"/>
                       <a:tailEnd type="none" w="med" len="med"/>
                     </a:lnR>
-                    <a:lnT w="6350" cap="flat" cmpd="sng" algn="ctr">
+                    <a:lnT w="5080" cap="flat" cmpd="sng" algn="ctr">
                       <a:solidFill>
-                        <a:srgbClr val="D1D5DB"/>
+                        <a:srgbClr val="D8D3CB"/>
                       </a:solidFill>
                       <a:prstDash val="solid"/>
                       <a:round/>
                       <a:headEnd type="none" w="med" len="med"/>
                       <a:tailEnd type="none" w="med" len="med"/>
                     </a:lnT>
-                    <a:lnB w="6350" cap="flat" cmpd="sng" algn="ctr">
+                    <a:lnB w="5080" cap="flat" cmpd="sng" algn="ctr">
                       <a:solidFill>
-                        <a:srgbClr val="D1D5DB"/>
+                        <a:srgbClr val="D8D3CB"/>
                       </a:solidFill>
                       <a:prstDash val="solid"/>
                       <a:round/>
@@ -6694,7 +6980,7 @@
                       <a:tailEnd type="none" w="med" len="med"/>
                     </a:lnB>
                     <a:solidFill>
-                      <a:srgbClr val="F9FAFB"/>
+                      <a:srgbClr val="FFFFFF"/>
                     </a:solidFill>
                   </a:tcPr>
                 </a:tc>
@@ -6709,45 +6995,52 @@
                       <a:r>
                         <a:rPr lang="en-US" sz="1100" dirty="0">
                           <a:solidFill>
-                            <a:srgbClr val="374151"/>
+                            <a:srgbClr val="23282E"/>
                           </a:solidFill>
+                          <a:latin typeface="Corbel" pitchFamily="34" charset="0"/>
+                          <a:ea typeface="Corbel" pitchFamily="34" charset="-122"/>
+                          <a:cs typeface="Corbel" pitchFamily="34" charset="-120"/>
                         </a:rPr>
-                        <a:t>Ecological fallacy</a:t>
+                        <a:t>Cost, attrition</a:t>
                       </a:r>
-                      <a:endParaRPr lang="en-US" sz="1100" dirty="0"/>
+                      <a:endParaRPr lang="en-US" sz="1100" dirty="0">
+                        <a:latin typeface="Corbel" charset="0"/>
+                        <a:ea typeface="Corbel" charset="0"/>
+                        <a:cs typeface="Corbel" charset="0"/>
+                      </a:endParaRPr>
                     </a:p>
                   </a:txBody>
-                  <a:tcPr marL="91440" marR="91440" marT="45720" marB="45720" anchor="t">
-                    <a:lnL w="6350" cap="flat" cmpd="sng" algn="ctr">
+                  <a:tcPr marL="76200" marR="76200" marT="76200" marB="76200" anchor="t">
+                    <a:lnL w="5080" cap="flat" cmpd="sng" algn="ctr">
                       <a:solidFill>
-                        <a:srgbClr val="D1D5DB"/>
+                        <a:srgbClr val="D8D3CB"/>
                       </a:solidFill>
                       <a:prstDash val="solid"/>
                       <a:round/>
                       <a:headEnd type="none" w="med" len="med"/>
                       <a:tailEnd type="none" w="med" len="med"/>
                     </a:lnL>
-                    <a:lnR w="6350" cap="flat" cmpd="sng" algn="ctr">
+                    <a:lnR w="5080" cap="flat" cmpd="sng" algn="ctr">
                       <a:solidFill>
-                        <a:srgbClr val="D1D5DB"/>
+                        <a:srgbClr val="D8D3CB"/>
                       </a:solidFill>
                       <a:prstDash val="solid"/>
                       <a:round/>
                       <a:headEnd type="none" w="med" len="med"/>
                       <a:tailEnd type="none" w="med" len="med"/>
                     </a:lnR>
-                    <a:lnT w="6350" cap="flat" cmpd="sng" algn="ctr">
+                    <a:lnT w="5080" cap="flat" cmpd="sng" algn="ctr">
                       <a:solidFill>
-                        <a:srgbClr val="D1D5DB"/>
+                        <a:srgbClr val="D8D3CB"/>
                       </a:solidFill>
                       <a:prstDash val="solid"/>
                       <a:round/>
                       <a:headEnd type="none" w="med" len="med"/>
                       <a:tailEnd type="none" w="med" len="med"/>
                     </a:lnT>
-                    <a:lnB w="6350" cap="flat" cmpd="sng" algn="ctr">
+                    <a:lnB w="5080" cap="flat" cmpd="sng" algn="ctr">
                       <a:solidFill>
-                        <a:srgbClr val="D1D5DB"/>
+                        <a:srgbClr val="D8D3CB"/>
                       </a:solidFill>
                       <a:prstDash val="solid"/>
                       <a:round/>
@@ -6755,7 +7048,281 @@
                       <a:tailEnd type="none" w="med" len="med"/>
                     </a:lnB>
                     <a:solidFill>
-                      <a:srgbClr val="F9FAFB"/>
+                      <a:srgbClr val="FFFFFF"/>
+                    </a:solidFill>
+                  </a:tcPr>
+                </a:tc>
+              </a:tr>
+              <a:tr h="0">
+                <a:tc>
+                  <a:txBody>
+                    <a:bodyPr/>
+                    <a:lstStyle/>
+                    <a:p>
+                      <a:pPr indent="0" marL="0">
+                        <a:buNone/>
+                      </a:pPr>
+                      <a:r>
+                        <a:rPr lang="en-US" sz="1100" dirty="0">
+                          <a:solidFill>
+                            <a:srgbClr val="23282E"/>
+                          </a:solidFill>
+                          <a:latin typeface="Corbel" pitchFamily="34" charset="0"/>
+                          <a:ea typeface="Corbel" pitchFamily="34" charset="-122"/>
+                          <a:cs typeface="Corbel" pitchFamily="34" charset="-120"/>
+                        </a:rPr>
+                        <a:t>Ecological</a:t>
+                      </a:r>
+                      <a:endParaRPr lang="en-US" sz="1100" dirty="0">
+                        <a:latin typeface="Corbel" charset="0"/>
+                        <a:ea typeface="Corbel" charset="0"/>
+                        <a:cs typeface="Corbel" charset="0"/>
+                      </a:endParaRPr>
+                    </a:p>
+                  </a:txBody>
+                  <a:tcPr marL="76200" marR="76200" marT="76200" marB="76200" anchor="t">
+                    <a:lnL w="5080" cap="flat" cmpd="sng" algn="ctr">
+                      <a:solidFill>
+                        <a:srgbClr val="D8D3CB"/>
+                      </a:solidFill>
+                      <a:prstDash val="solid"/>
+                      <a:round/>
+                      <a:headEnd type="none" w="med" len="med"/>
+                      <a:tailEnd type="none" w="med" len="med"/>
+                    </a:lnL>
+                    <a:lnR w="5080" cap="flat" cmpd="sng" algn="ctr">
+                      <a:solidFill>
+                        <a:srgbClr val="D8D3CB"/>
+                      </a:solidFill>
+                      <a:prstDash val="solid"/>
+                      <a:round/>
+                      <a:headEnd type="none" w="med" len="med"/>
+                      <a:tailEnd type="none" w="med" len="med"/>
+                    </a:lnR>
+                    <a:lnT w="5080" cap="flat" cmpd="sng" algn="ctr">
+                      <a:solidFill>
+                        <a:srgbClr val="D8D3CB"/>
+                      </a:solidFill>
+                      <a:prstDash val="solid"/>
+                      <a:round/>
+                      <a:headEnd type="none" w="med" len="med"/>
+                      <a:tailEnd type="none" w="med" len="med"/>
+                    </a:lnT>
+                    <a:lnB w="5080" cap="flat" cmpd="sng" algn="ctr">
+                      <a:solidFill>
+                        <a:srgbClr val="D8D3CB"/>
+                      </a:solidFill>
+                      <a:prstDash val="solid"/>
+                      <a:round/>
+                      <a:headEnd type="none" w="med" len="med"/>
+                      <a:tailEnd type="none" w="med" len="med"/>
+                    </a:lnB>
+                    <a:solidFill>
+                      <a:srgbClr val="FFFFFF"/>
+                    </a:solidFill>
+                  </a:tcPr>
+                </a:tc>
+                <a:tc>
+                  <a:txBody>
+                    <a:bodyPr/>
+                    <a:lstStyle/>
+                    <a:p>
+                      <a:pPr indent="0" marL="0">
+                        <a:buNone/>
+                      </a:pPr>
+                      <a:r>
+                        <a:rPr lang="en-US" sz="1100" dirty="0">
+                          <a:solidFill>
+                            <a:srgbClr val="23282E"/>
+                          </a:solidFill>
+                          <a:latin typeface="Corbel" pitchFamily="34" charset="0"/>
+                          <a:ea typeface="Corbel" pitchFamily="34" charset="-122"/>
+                          <a:cs typeface="Corbel" pitchFamily="34" charset="-120"/>
+                        </a:rPr>
+                        <a:t>Groups</a:t>
+                      </a:r>
+                      <a:endParaRPr lang="en-US" sz="1100" dirty="0">
+                        <a:latin typeface="Corbel" charset="0"/>
+                        <a:ea typeface="Corbel" charset="0"/>
+                        <a:cs typeface="Corbel" charset="0"/>
+                      </a:endParaRPr>
+                    </a:p>
+                  </a:txBody>
+                  <a:tcPr marL="76200" marR="76200" marT="76200" marB="76200" anchor="t">
+                    <a:lnL w="5080" cap="flat" cmpd="sng" algn="ctr">
+                      <a:solidFill>
+                        <a:srgbClr val="D8D3CB"/>
+                      </a:solidFill>
+                      <a:prstDash val="solid"/>
+                      <a:round/>
+                      <a:headEnd type="none" w="med" len="med"/>
+                      <a:tailEnd type="none" w="med" len="med"/>
+                    </a:lnL>
+                    <a:lnR w="5080" cap="flat" cmpd="sng" algn="ctr">
+                      <a:solidFill>
+                        <a:srgbClr val="D8D3CB"/>
+                      </a:solidFill>
+                      <a:prstDash val="solid"/>
+                      <a:round/>
+                      <a:headEnd type="none" w="med" len="med"/>
+                      <a:tailEnd type="none" w="med" len="med"/>
+                    </a:lnR>
+                    <a:lnT w="5080" cap="flat" cmpd="sng" algn="ctr">
+                      <a:solidFill>
+                        <a:srgbClr val="D8D3CB"/>
+                      </a:solidFill>
+                      <a:prstDash val="solid"/>
+                      <a:round/>
+                      <a:headEnd type="none" w="med" len="med"/>
+                      <a:tailEnd type="none" w="med" len="med"/>
+                    </a:lnT>
+                    <a:lnB w="5080" cap="flat" cmpd="sng" algn="ctr">
+                      <a:solidFill>
+                        <a:srgbClr val="D8D3CB"/>
+                      </a:solidFill>
+                      <a:prstDash val="solid"/>
+                      <a:round/>
+                      <a:headEnd type="none" w="med" len="med"/>
+                      <a:tailEnd type="none" w="med" len="med"/>
+                    </a:lnB>
+                    <a:solidFill>
+                      <a:srgbClr val="FFFFFF"/>
+                    </a:solidFill>
+                  </a:tcPr>
+                </a:tc>
+                <a:tc>
+                  <a:txBody>
+                    <a:bodyPr/>
+                    <a:lstStyle/>
+                    <a:p>
+                      <a:pPr indent="0" marL="0">
+                        <a:buNone/>
+                      </a:pPr>
+                      <a:r>
+                        <a:rPr lang="en-US" sz="1100" dirty="0">
+                          <a:solidFill>
+                            <a:srgbClr val="23282E"/>
+                          </a:solidFill>
+                          <a:latin typeface="Corbel" pitchFamily="34" charset="0"/>
+                          <a:ea typeface="Corbel" pitchFamily="34" charset="-122"/>
+                          <a:cs typeface="Corbel" pitchFamily="34" charset="-120"/>
+                        </a:rPr>
+                        <a:t>Population-level hypotheses</a:t>
+                      </a:r>
+                      <a:endParaRPr lang="en-US" sz="1100" dirty="0">
+                        <a:latin typeface="Corbel" charset="0"/>
+                        <a:ea typeface="Corbel" charset="0"/>
+                        <a:cs typeface="Corbel" charset="0"/>
+                      </a:endParaRPr>
+                    </a:p>
+                  </a:txBody>
+                  <a:tcPr marL="76200" marR="76200" marT="76200" marB="76200" anchor="t">
+                    <a:lnL w="5080" cap="flat" cmpd="sng" algn="ctr">
+                      <a:solidFill>
+                        <a:srgbClr val="D8D3CB"/>
+                      </a:solidFill>
+                      <a:prstDash val="solid"/>
+                      <a:round/>
+                      <a:headEnd type="none" w="med" len="med"/>
+                      <a:tailEnd type="none" w="med" len="med"/>
+                    </a:lnL>
+                    <a:lnR w="5080" cap="flat" cmpd="sng" algn="ctr">
+                      <a:solidFill>
+                        <a:srgbClr val="D8D3CB"/>
+                      </a:solidFill>
+                      <a:prstDash val="solid"/>
+                      <a:round/>
+                      <a:headEnd type="none" w="med" len="med"/>
+                      <a:tailEnd type="none" w="med" len="med"/>
+                    </a:lnR>
+                    <a:lnT w="5080" cap="flat" cmpd="sng" algn="ctr">
+                      <a:solidFill>
+                        <a:srgbClr val="D8D3CB"/>
+                      </a:solidFill>
+                      <a:prstDash val="solid"/>
+                      <a:round/>
+                      <a:headEnd type="none" w="med" len="med"/>
+                      <a:tailEnd type="none" w="med" len="med"/>
+                    </a:lnT>
+                    <a:lnB w="5080" cap="flat" cmpd="sng" algn="ctr">
+                      <a:solidFill>
+                        <a:srgbClr val="D8D3CB"/>
+                      </a:solidFill>
+                      <a:prstDash val="solid"/>
+                      <a:round/>
+                      <a:headEnd type="none" w="med" len="med"/>
+                      <a:tailEnd type="none" w="med" len="med"/>
+                    </a:lnB>
+                    <a:solidFill>
+                      <a:srgbClr val="FFFFFF"/>
+                    </a:solidFill>
+                  </a:tcPr>
+                </a:tc>
+                <a:tc>
+                  <a:txBody>
+                    <a:bodyPr/>
+                    <a:lstStyle/>
+                    <a:p>
+                      <a:pPr indent="0" marL="0">
+                        <a:buNone/>
+                      </a:pPr>
+                      <a:r>
+                        <a:rPr lang="en-US" sz="1100" dirty="0">
+                          <a:solidFill>
+                            <a:srgbClr val="23282E"/>
+                          </a:solidFill>
+                          <a:latin typeface="Corbel" pitchFamily="34" charset="0"/>
+                          <a:ea typeface="Corbel" pitchFamily="34" charset="-122"/>
+                          <a:cs typeface="Corbel" pitchFamily="34" charset="-120"/>
+                        </a:rPr>
+                        <a:t>Ecological fallacy</a:t>
+                      </a:r>
+                      <a:endParaRPr lang="en-US" sz="1100" dirty="0">
+                        <a:latin typeface="Corbel" charset="0"/>
+                        <a:ea typeface="Corbel" charset="0"/>
+                        <a:cs typeface="Corbel" charset="0"/>
+                      </a:endParaRPr>
+                    </a:p>
+                  </a:txBody>
+                  <a:tcPr marL="76200" marR="76200" marT="76200" marB="76200" anchor="t">
+                    <a:lnL w="5080" cap="flat" cmpd="sng" algn="ctr">
+                      <a:solidFill>
+                        <a:srgbClr val="D8D3CB"/>
+                      </a:solidFill>
+                      <a:prstDash val="solid"/>
+                      <a:round/>
+                      <a:headEnd type="none" w="med" len="med"/>
+                      <a:tailEnd type="none" w="med" len="med"/>
+                    </a:lnL>
+                    <a:lnR w="5080" cap="flat" cmpd="sng" algn="ctr">
+                      <a:solidFill>
+                        <a:srgbClr val="D8D3CB"/>
+                      </a:solidFill>
+                      <a:prstDash val="solid"/>
+                      <a:round/>
+                      <a:headEnd type="none" w="med" len="med"/>
+                      <a:tailEnd type="none" w="med" len="med"/>
+                    </a:lnR>
+                    <a:lnT w="5080" cap="flat" cmpd="sng" algn="ctr">
+                      <a:solidFill>
+                        <a:srgbClr val="D8D3CB"/>
+                      </a:solidFill>
+                      <a:prstDash val="solid"/>
+                      <a:round/>
+                      <a:headEnd type="none" w="med" len="med"/>
+                      <a:tailEnd type="none" w="med" len="med"/>
+                    </a:lnT>
+                    <a:lnB w="5080" cap="flat" cmpd="sng" algn="ctr">
+                      <a:solidFill>
+                        <a:srgbClr val="D8D3CB"/>
+                      </a:solidFill>
+                      <a:prstDash val="solid"/>
+                      <a:round/>
+                      <a:headEnd type="none" w="med" len="med"/>
+                      <a:tailEnd type="none" w="med" len="med"/>
+                    </a:lnB>
+                    <a:solidFill>
+                      <a:srgbClr val="FFFFFF"/>
                     </a:solidFill>
                   </a:tcPr>
                 </a:tc>
@@ -6776,8 +7343,8 @@
         </p:nvSpPr>
         <p:spPr>
           <a:xfrm>
-            <a:off x="8503920" y="4709160"/>
-            <a:ext cx="800000" cy="300000"/>
+            <a:off x="566928" y="4700016"/>
+            <a:ext cx="914400" cy="274320"/>
           </a:xfrm>
           <a:prstGeom prst="rect">
             <a:avLst/>
@@ -6792,10 +7359,13 @@
           <a:bodyPr/>
           <a:lstStyle>
             <a:lvl1pPr>
-              <a:defRPr sz="1000">
-                <a:solidFill>
-                  <a:srgbClr val="6B7280"/>
-                </a:solidFill>
+              <a:defRPr sz="900">
+                <a:solidFill>
+                  <a:srgbClr val="5F6B76"/>
+                </a:solidFill>
+                <a:latin typeface="Corbel"/>
+                <a:ea typeface="Corbel"/>
+                <a:cs typeface="Corbel"/>
               </a:defRPr>
             </a:lvl1pPr>
           </a:lstStyle>
@@ -6842,8 +7412,8 @@
         </p:nvSpPr>
         <p:spPr>
           <a:xfrm>
-            <a:off x="502920" y="292608"/>
-            <a:ext cx="8046720" cy="228600"/>
+            <a:off x="566928" y="384048"/>
+            <a:ext cx="7772400" cy="237744"/>
           </a:xfrm>
           <a:prstGeom prst="rect">
             <a:avLst/>
@@ -6859,14 +7429,17 @@
               <a:buNone/>
             </a:pPr>
             <a:r>
-              <a:rPr lang="en-US" sz="1100" b="1" spc="150" kern="0" dirty="0">
-                <a:solidFill>
-                  <a:srgbClr val="0066CC"/>
-                </a:solidFill>
+              <a:rPr lang="en-US" sz="1000" spc="200" kern="0" dirty="0">
+                <a:solidFill>
+                  <a:srgbClr val="9A6A3C"/>
+                </a:solidFill>
+                <a:latin typeface="Corbel" pitchFamily="34" charset="0"/>
+                <a:ea typeface="Corbel" pitchFamily="34" charset="-122"/>
+                <a:cs typeface="Corbel" pitchFamily="34" charset="-120"/>
               </a:rPr>
               <a:t>UNIT 5</a:t>
             </a:r>
-            <a:endParaRPr lang="en-US" sz="1100" dirty="0"/>
+            <a:endParaRPr lang="en-US" sz="1000" dirty="0"/>
           </a:p>
         </p:txBody>
       </p:sp>
@@ -6878,8 +7451,8 @@
         </p:nvSpPr>
         <p:spPr>
           <a:xfrm>
-            <a:off x="502920" y="548640"/>
-            <a:ext cx="8046720" cy="640080"/>
+            <a:off x="566928" y="658368"/>
+            <a:ext cx="7772400" cy="658368"/>
           </a:xfrm>
           <a:prstGeom prst="rect">
             <a:avLst/>
@@ -6892,30 +7465,56 @@
           <a:lstStyle/>
           <a:p>
             <a:pPr indent="0" marL="0">
+              <a:lnSpc>
+                <a:spcPct val="100000"/>
+              </a:lnSpc>
               <a:buNone/>
             </a:pPr>
             <a:r>
-              <a:rPr lang="en-US" sz="2400" b="1" dirty="0">
-                <a:solidFill>
-                  <a:srgbClr val="111827"/>
-                </a:solidFill>
+              <a:rPr lang="en-US" sz="2500" dirty="0">
+                <a:solidFill>
+                  <a:srgbClr val="1C3140"/>
+                </a:solidFill>
+                <a:latin typeface="Constantia" pitchFamily="34" charset="0"/>
+                <a:ea typeface="Constantia" pitchFamily="34" charset="-122"/>
+                <a:cs typeface="Constantia" pitchFamily="34" charset="-120"/>
               </a:rPr>
               <a:t>Experimental designs (1/2)</a:t>
             </a:r>
-            <a:endParaRPr lang="en-US" sz="2400" dirty="0"/>
-          </a:p>
-        </p:txBody>
-      </p:sp>
-      <p:sp>
-        <p:nvSpPr>
-          <p:cNvPr id="4" name="Text 2"/>
+            <a:endParaRPr lang="en-US" sz="2500" dirty="0"/>
+          </a:p>
+        </p:txBody>
+      </p:sp>
+      <p:sp>
+        <p:nvSpPr>
+          <p:cNvPr id="4" name="Shape 2"/>
           <p:cNvSpPr/>
           <p:nvPr/>
         </p:nvSpPr>
         <p:spPr>
           <a:xfrm>
-            <a:off x="685800" y="1325880"/>
-            <a:ext cx="7772400" cy="3200400"/>
+            <a:off x="566928" y="1335024"/>
+            <a:ext cx="566928" cy="20117"/>
+          </a:xfrm>
+          <a:prstGeom prst="rect">
+            <a:avLst/>
+          </a:prstGeom>
+          <a:solidFill>
+            <a:srgbClr val="9A6A3C"/>
+          </a:solidFill>
+          <a:ln/>
+        </p:spPr>
+      </p:sp>
+      <p:sp>
+        <p:nvSpPr>
+          <p:cNvPr id="5" name="Text 3"/>
+          <p:cNvSpPr/>
+          <p:nvPr/>
+        </p:nvSpPr>
+        <p:spPr>
+          <a:xfrm>
+            <a:off x="713232" y="1664208"/>
+            <a:ext cx="7498080" cy="2788920"/>
           </a:xfrm>
           <a:prstGeom prst="rect">
             <a:avLst/>
@@ -6929,19 +7528,22 @@
           <a:p>
             <a:pPr marL="342900" indent="-342900">
               <a:lnSpc>
-                <a:spcPct val="125000"/>
+                <a:spcPct val="130000"/>
               </a:lnSpc>
               <a:spcAft>
-                <a:spcPts val="800"/>
+                <a:spcPts val="1100"/>
               </a:spcAft>
               <a:buSzPct val="100000"/>
-              <a:buChar char="•"/>
+              <a:buChar char="–"/>
             </a:pPr>
             <a:r>
               <a:rPr lang="en-US" sz="1500" dirty="0">
                 <a:solidFill>
-                  <a:srgbClr val="374151"/>
-                </a:solidFill>
+                  <a:srgbClr val="23282E"/>
+                </a:solidFill>
+                <a:latin typeface="Corbel" pitchFamily="34" charset="0"/>
+                <a:ea typeface="Corbel" pitchFamily="34" charset="-122"/>
+                <a:cs typeface="Corbel" pitchFamily="34" charset="-120"/>
               </a:rPr>
               <a:t>The investigator assigns the exposure, which is what permits causal inference</a:t>
             </a:r>
@@ -6950,19 +7552,22 @@
           <a:p>
             <a:pPr marL="342900" indent="-342900">
               <a:lnSpc>
-                <a:spcPct val="125000"/>
+                <a:spcPct val="130000"/>
               </a:lnSpc>
               <a:spcAft>
-                <a:spcPts val="800"/>
+                <a:spcPts val="1100"/>
               </a:spcAft>
               <a:buSzPct val="100000"/>
-              <a:buChar char="•"/>
+              <a:buChar char="–"/>
             </a:pPr>
             <a:r>
               <a:rPr lang="en-US" sz="1500" dirty="0">
                 <a:solidFill>
-                  <a:srgbClr val="374151"/>
-                </a:solidFill>
+                  <a:srgbClr val="23282E"/>
+                </a:solidFill>
+                <a:latin typeface="Corbel" pitchFamily="34" charset="0"/>
+                <a:ea typeface="Corbel" pitchFamily="34" charset="-122"/>
+                <a:cs typeface="Corbel" pitchFamily="34" charset="-120"/>
               </a:rPr>
               <a:t>Randomisation distributes both known and unknown confounders across arms — its unique strength</a:t>
             </a:r>
@@ -6971,19 +7576,22 @@
           <a:p>
             <a:pPr marL="342900" indent="-342900">
               <a:lnSpc>
-                <a:spcPct val="125000"/>
+                <a:spcPct val="130000"/>
               </a:lnSpc>
               <a:spcAft>
-                <a:spcPts val="800"/>
+                <a:spcPts val="1100"/>
               </a:spcAft>
               <a:buSzPct val="100000"/>
-              <a:buChar char="•"/>
+              <a:buChar char="–"/>
             </a:pPr>
             <a:r>
               <a:rPr lang="en-US" sz="1500" dirty="0">
                 <a:solidFill>
-                  <a:srgbClr val="374151"/>
-                </a:solidFill>
+                  <a:srgbClr val="23282E"/>
+                </a:solidFill>
+                <a:latin typeface="Corbel" pitchFamily="34" charset="0"/>
+                <a:ea typeface="Corbel" pitchFamily="34" charset="-122"/>
+                <a:cs typeface="Corbel" pitchFamily="34" charset="-120"/>
               </a:rPr>
               <a:t>Allocation concealment stops the recruiter from knowing the next assignment, preventing selection bias at entry</a:t>
             </a:r>
@@ -6992,19 +7600,22 @@
           <a:p>
             <a:pPr marL="342900" indent="-342900">
               <a:lnSpc>
-                <a:spcPct val="125000"/>
+                <a:spcPct val="130000"/>
               </a:lnSpc>
               <a:spcAft>
-                <a:spcPts val="800"/>
+                <a:spcPts val="1100"/>
               </a:spcAft>
               <a:buSzPct val="100000"/>
-              <a:buChar char="•"/>
+              <a:buChar char="–"/>
             </a:pPr>
             <a:r>
               <a:rPr lang="en-US" sz="1500" dirty="0">
                 <a:solidFill>
-                  <a:srgbClr val="374151"/>
-                </a:solidFill>
+                  <a:srgbClr val="23282E"/>
+                </a:solidFill>
+                <a:latin typeface="Corbel" pitchFamily="34" charset="0"/>
+                <a:ea typeface="Corbel" pitchFamily="34" charset="-122"/>
+                <a:cs typeface="Corbel" pitchFamily="34" charset="-120"/>
               </a:rPr>
               <a:t>Blinding stops participants, providers or assessors from knowing the assignment, preventing performance and detection bias</a:t>
             </a:r>
@@ -7024,8 +7635,8 @@
         </p:nvSpPr>
         <p:spPr>
           <a:xfrm>
-            <a:off x="8503920" y="4709160"/>
-            <a:ext cx="800000" cy="300000"/>
+            <a:off x="566928" y="4700016"/>
+            <a:ext cx="914400" cy="274320"/>
           </a:xfrm>
           <a:prstGeom prst="rect">
             <a:avLst/>
@@ -7040,10 +7651,13 @@
           <a:bodyPr/>
           <a:lstStyle>
             <a:lvl1pPr>
-              <a:defRPr sz="1000">
-                <a:solidFill>
-                  <a:srgbClr val="6B7280"/>
-                </a:solidFill>
+              <a:defRPr sz="900">
+                <a:solidFill>
+                  <a:srgbClr val="5F6B76"/>
+                </a:solidFill>
+                <a:latin typeface="Corbel"/>
+                <a:ea typeface="Corbel"/>
+                <a:cs typeface="Corbel"/>
               </a:defRPr>
             </a:lvl1pPr>
           </a:lstStyle>
@@ -7090,8 +7704,8 @@
         </p:nvSpPr>
         <p:spPr>
           <a:xfrm>
-            <a:off x="502920" y="292608"/>
-            <a:ext cx="8046720" cy="228600"/>
+            <a:off x="566928" y="384048"/>
+            <a:ext cx="7772400" cy="237744"/>
           </a:xfrm>
           <a:prstGeom prst="rect">
             <a:avLst/>
@@ -7107,14 +7721,17 @@
               <a:buNone/>
             </a:pPr>
             <a:r>
-              <a:rPr lang="en-US" sz="1100" b="1" spc="150" kern="0" dirty="0">
-                <a:solidFill>
-                  <a:srgbClr val="0066CC"/>
-                </a:solidFill>
+              <a:rPr lang="en-US" sz="1000" spc="200" kern="0" dirty="0">
+                <a:solidFill>
+                  <a:srgbClr val="9A6A3C"/>
+                </a:solidFill>
+                <a:latin typeface="Corbel" pitchFamily="34" charset="0"/>
+                <a:ea typeface="Corbel" pitchFamily="34" charset="-122"/>
+                <a:cs typeface="Corbel" pitchFamily="34" charset="-120"/>
               </a:rPr>
               <a:t>UNIT 5</a:t>
             </a:r>
-            <a:endParaRPr lang="en-US" sz="1100" dirty="0"/>
+            <a:endParaRPr lang="en-US" sz="1000" dirty="0"/>
           </a:p>
         </p:txBody>
       </p:sp>
@@ -7126,8 +7743,8 @@
         </p:nvSpPr>
         <p:spPr>
           <a:xfrm>
-            <a:off x="502920" y="548640"/>
-            <a:ext cx="8046720" cy="640080"/>
+            <a:off x="566928" y="658368"/>
+            <a:ext cx="7772400" cy="658368"/>
           </a:xfrm>
           <a:prstGeom prst="rect">
             <a:avLst/>
@@ -7140,30 +7757,56 @@
           <a:lstStyle/>
           <a:p>
             <a:pPr indent="0" marL="0">
+              <a:lnSpc>
+                <a:spcPct val="100000"/>
+              </a:lnSpc>
               <a:buNone/>
             </a:pPr>
             <a:r>
-              <a:rPr lang="en-US" sz="2400" b="1" dirty="0">
-                <a:solidFill>
-                  <a:srgbClr val="111827"/>
-                </a:solidFill>
+              <a:rPr lang="en-US" sz="2500" dirty="0">
+                <a:solidFill>
+                  <a:srgbClr val="1C3140"/>
+                </a:solidFill>
+                <a:latin typeface="Constantia" pitchFamily="34" charset="0"/>
+                <a:ea typeface="Constantia" pitchFamily="34" charset="-122"/>
+                <a:cs typeface="Constantia" pitchFamily="34" charset="-120"/>
               </a:rPr>
               <a:t>Experimental designs (2/2)</a:t>
             </a:r>
-            <a:endParaRPr lang="en-US" sz="2400" dirty="0"/>
-          </a:p>
-        </p:txBody>
-      </p:sp>
-      <p:sp>
-        <p:nvSpPr>
-          <p:cNvPr id="4" name="Text 2"/>
+            <a:endParaRPr lang="en-US" sz="2500" dirty="0"/>
+          </a:p>
+        </p:txBody>
+      </p:sp>
+      <p:sp>
+        <p:nvSpPr>
+          <p:cNvPr id="4" name="Shape 2"/>
           <p:cNvSpPr/>
           <p:nvPr/>
         </p:nvSpPr>
         <p:spPr>
           <a:xfrm>
-            <a:off x="685800" y="1325880"/>
-            <a:ext cx="7772400" cy="3200400"/>
+            <a:off x="566928" y="1335024"/>
+            <a:ext cx="566928" cy="20117"/>
+          </a:xfrm>
+          <a:prstGeom prst="rect">
+            <a:avLst/>
+          </a:prstGeom>
+          <a:solidFill>
+            <a:srgbClr val="9A6A3C"/>
+          </a:solidFill>
+          <a:ln/>
+        </p:spPr>
+      </p:sp>
+      <p:sp>
+        <p:nvSpPr>
+          <p:cNvPr id="5" name="Text 3"/>
+          <p:cNvSpPr/>
+          <p:nvPr/>
+        </p:nvSpPr>
+        <p:spPr>
+          <a:xfrm>
+            <a:off x="713232" y="1664208"/>
+            <a:ext cx="7498080" cy="2788920"/>
           </a:xfrm>
           <a:prstGeom prst="rect">
             <a:avLst/>
@@ -7177,19 +7820,22 @@
           <a:p>
             <a:pPr marL="342900" indent="-342900">
               <a:lnSpc>
-                <a:spcPct val="125000"/>
+                <a:spcPct val="130000"/>
               </a:lnSpc>
               <a:spcAft>
-                <a:spcPts val="800"/>
+                <a:spcPts val="1100"/>
               </a:spcAft>
               <a:buSzPct val="100000"/>
-              <a:buChar char="•"/>
+              <a:buChar char="–"/>
             </a:pPr>
             <a:r>
               <a:rPr lang="en-US" sz="1500" dirty="0">
                 <a:solidFill>
-                  <a:srgbClr val="374151"/>
-                </a:solidFill>
+                  <a:srgbClr val="23282E"/>
+                </a:solidFill>
+                <a:latin typeface="Corbel" pitchFamily="34" charset="0"/>
+                <a:ea typeface="Corbel" pitchFamily="34" charset="-122"/>
+                <a:cs typeface="Corbel" pitchFamily="34" charset="-120"/>
               </a:rPr>
               <a:t>Randomised controlled trials may be parallel, crossover, factorial or cluster-randomised</a:t>
             </a:r>
@@ -7198,19 +7844,22 @@
           <a:p>
             <a:pPr marL="342900" indent="-342900">
               <a:lnSpc>
-                <a:spcPct val="125000"/>
+                <a:spcPct val="130000"/>
               </a:lnSpc>
               <a:spcAft>
-                <a:spcPts val="800"/>
+                <a:spcPts val="1100"/>
               </a:spcAft>
               <a:buSzPct val="100000"/>
-              <a:buChar char="•"/>
+              <a:buChar char="–"/>
             </a:pPr>
             <a:r>
               <a:rPr lang="en-US" sz="1500" dirty="0">
                 <a:solidFill>
-                  <a:srgbClr val="374151"/>
-                </a:solidFill>
+                  <a:srgbClr val="23282E"/>
+                </a:solidFill>
+                <a:latin typeface="Corbel" pitchFamily="34" charset="0"/>
+                <a:ea typeface="Corbel" pitchFamily="34" charset="-122"/>
+                <a:cs typeface="Corbel" pitchFamily="34" charset="-120"/>
               </a:rPr>
               <a:t>Cluster randomisation assigns groups (schools, clinics, villages) and requires a larger sample because responses within a cluster are correlated</a:t>
             </a:r>
@@ -7219,19 +7868,22 @@
           <a:p>
             <a:pPr marL="342900" indent="-342900">
               <a:lnSpc>
-                <a:spcPct val="125000"/>
+                <a:spcPct val="130000"/>
               </a:lnSpc>
               <a:spcAft>
-                <a:spcPts val="800"/>
+                <a:spcPts val="1100"/>
               </a:spcAft>
               <a:buSzPct val="100000"/>
-              <a:buChar char="•"/>
+              <a:buChar char="–"/>
             </a:pPr>
             <a:r>
               <a:rPr lang="en-US" sz="1500" dirty="0">
                 <a:solidFill>
-                  <a:srgbClr val="374151"/>
-                </a:solidFill>
+                  <a:srgbClr val="23282E"/>
+                </a:solidFill>
+                <a:latin typeface="Corbel" pitchFamily="34" charset="0"/>
+                <a:ea typeface="Corbel" pitchFamily="34" charset="-122"/>
+                <a:cs typeface="Corbel" pitchFamily="34" charset="-120"/>
               </a:rPr>
               <a:t>Analyse by intention to treat: participants are analysed in the arm to which they were assigned, whatever they actually received</a:t>
             </a:r>
@@ -7251,8 +7903,8 @@
         </p:nvSpPr>
         <p:spPr>
           <a:xfrm>
-            <a:off x="8503920" y="4709160"/>
-            <a:ext cx="800000" cy="300000"/>
+            <a:off x="566928" y="4700016"/>
+            <a:ext cx="914400" cy="274320"/>
           </a:xfrm>
           <a:prstGeom prst="rect">
             <a:avLst/>
@@ -7267,10 +7919,13 @@
           <a:bodyPr/>
           <a:lstStyle>
             <a:lvl1pPr>
-              <a:defRPr sz="1000">
-                <a:solidFill>
-                  <a:srgbClr val="6B7280"/>
-                </a:solidFill>
+              <a:defRPr sz="900">
+                <a:solidFill>
+                  <a:srgbClr val="5F6B76"/>
+                </a:solidFill>
+                <a:latin typeface="Corbel"/>
+                <a:ea typeface="Corbel"/>
+                <a:cs typeface="Corbel"/>
               </a:defRPr>
             </a:lvl1pPr>
           </a:lstStyle>
@@ -7317,8 +7972,8 @@
         </p:nvSpPr>
         <p:spPr>
           <a:xfrm>
-            <a:off x="502920" y="292608"/>
-            <a:ext cx="8046720" cy="228600"/>
+            <a:off x="566928" y="384048"/>
+            <a:ext cx="7772400" cy="237744"/>
           </a:xfrm>
           <a:prstGeom prst="rect">
             <a:avLst/>
@@ -7334,14 +7989,17 @@
               <a:buNone/>
             </a:pPr>
             <a:r>
-              <a:rPr lang="en-US" sz="1100" b="1" spc="150" kern="0" dirty="0">
-                <a:solidFill>
-                  <a:srgbClr val="00A86B"/>
-                </a:solidFill>
+              <a:rPr lang="en-US" sz="1000" spc="200" kern="0" dirty="0">
+                <a:solidFill>
+                  <a:srgbClr val="9A6A3C"/>
+                </a:solidFill>
+                <a:latin typeface="Corbel" pitchFamily="34" charset="0"/>
+                <a:ea typeface="Corbel" pitchFamily="34" charset="-122"/>
+                <a:cs typeface="Corbel" pitchFamily="34" charset="-120"/>
               </a:rPr>
               <a:t>UNIT 5</a:t>
             </a:r>
-            <a:endParaRPr lang="en-US" sz="1100" dirty="0"/>
+            <a:endParaRPr lang="en-US" sz="1000" dirty="0"/>
           </a:p>
         </p:txBody>
       </p:sp>
@@ -7353,8 +8011,8 @@
         </p:nvSpPr>
         <p:spPr>
           <a:xfrm>
-            <a:off x="502920" y="548640"/>
-            <a:ext cx="8046720" cy="548640"/>
+            <a:off x="566928" y="658368"/>
+            <a:ext cx="7772400" cy="658368"/>
           </a:xfrm>
           <a:prstGeom prst="rect">
             <a:avLst/>
@@ -7363,21 +8021,27 @@
           <a:ln/>
         </p:spPr>
         <p:txBody>
-          <a:bodyPr wrap="square" rtlCol="0" anchor="ctr"/>
+          <a:bodyPr wrap="square" rtlCol="0" anchor="t"/>
           <a:lstStyle/>
           <a:p>
             <a:pPr indent="0" marL="0">
+              <a:lnSpc>
+                <a:spcPct val="100000"/>
+              </a:lnSpc>
               <a:buNone/>
             </a:pPr>
             <a:r>
-              <a:rPr lang="en-US" sz="2400" b="1" dirty="0">
-                <a:solidFill>
-                  <a:srgbClr val="111827"/>
-                </a:solidFill>
+              <a:rPr lang="en-US" sz="2500" dirty="0">
+                <a:solidFill>
+                  <a:srgbClr val="1C3140"/>
+                </a:solidFill>
+                <a:latin typeface="Constantia" pitchFamily="34" charset="0"/>
+                <a:ea typeface="Constantia" pitchFamily="34" charset="-122"/>
+                <a:cs typeface="Constantia" pitchFamily="34" charset="-120"/>
               </a:rPr>
               <a:t>In practice</a:t>
             </a:r>
-            <a:endParaRPr lang="en-US" sz="2400" dirty="0"/>
+            <a:endParaRPr lang="en-US" sz="2500" dirty="0"/>
           </a:p>
         </p:txBody>
       </p:sp>
@@ -7389,28 +8053,48 @@
         </p:nvSpPr>
         <p:spPr>
           <a:xfrm>
-            <a:off x="502920" y="1280160"/>
-            <a:ext cx="54864" cy="2377440"/>
+            <a:off x="566928" y="1335024"/>
+            <a:ext cx="566928" cy="20117"/>
           </a:xfrm>
           <a:prstGeom prst="rect">
             <a:avLst/>
           </a:prstGeom>
           <a:solidFill>
-            <a:srgbClr val="00A86B"/>
+            <a:srgbClr val="9A6A3C"/>
           </a:solidFill>
           <a:ln/>
         </p:spPr>
       </p:sp>
       <p:sp>
         <p:nvSpPr>
-          <p:cNvPr id="5" name="Text 3"/>
+          <p:cNvPr id="5" name="Shape 3"/>
           <p:cNvSpPr/>
           <p:nvPr/>
         </p:nvSpPr>
         <p:spPr>
           <a:xfrm>
-            <a:off x="777240" y="1280160"/>
-            <a:ext cx="7589520" cy="2377440"/>
+            <a:off x="566928" y="1664208"/>
+            <a:ext cx="8010144" cy="2395728"/>
+          </a:xfrm>
+          <a:prstGeom prst="rect">
+            <a:avLst/>
+          </a:prstGeom>
+          <a:solidFill>
+            <a:srgbClr val="F6F4F0"/>
+          </a:solidFill>
+          <a:ln/>
+        </p:spPr>
+      </p:sp>
+      <p:sp>
+        <p:nvSpPr>
+          <p:cNvPr id="6" name="Text 4"/>
+          <p:cNvSpPr/>
+          <p:nvPr/>
+        </p:nvSpPr>
+        <p:spPr>
+          <a:xfrm>
+            <a:off x="932688" y="1847088"/>
+            <a:ext cx="7278624" cy="2029968"/>
           </a:xfrm>
           <a:prstGeom prst="rect">
             <a:avLst/>
@@ -7424,15 +8108,18 @@
           <a:p>
             <a:pPr indent="0" marL="0">
               <a:lnSpc>
-                <a:spcPct val="130000"/>
+                <a:spcPct val="132000"/>
               </a:lnSpc>
               <a:buNone/>
             </a:pPr>
             <a:r>
-              <a:rPr lang="en-US" sz="1600" dirty="0">
-                <a:solidFill>
-                  <a:srgbClr val="374151"/>
-                </a:solidFill>
+              <a:rPr lang="en-US" sz="1600" i="1" dirty="0">
+                <a:solidFill>
+                  <a:srgbClr val="1C3140"/>
+                </a:solidFill>
+                <a:latin typeface="Constantia" pitchFamily="34" charset="0"/>
+                <a:ea typeface="Constantia" pitchFamily="34" charset="-122"/>
+                <a:cs typeface="Constantia" pitchFamily="34" charset="-120"/>
               </a:rPr>
               <a:t>Per-protocol analysis, which counts only those who complied, quietly destroys randomisation and reintroduces confounding. Report it as a secondary analysis if at all.</a:t>
             </a:r>
@@ -7452,8 +8139,8 @@
         </p:nvSpPr>
         <p:spPr>
           <a:xfrm>
-            <a:off x="8503920" y="4709160"/>
-            <a:ext cx="800000" cy="300000"/>
+            <a:off x="566928" y="4700016"/>
+            <a:ext cx="914400" cy="274320"/>
           </a:xfrm>
           <a:prstGeom prst="rect">
             <a:avLst/>
@@ -7468,10 +8155,13 @@
           <a:bodyPr/>
           <a:lstStyle>
             <a:lvl1pPr>
-              <a:defRPr sz="1000">
-                <a:solidFill>
-                  <a:srgbClr val="6B7280"/>
-                </a:solidFill>
+              <a:defRPr sz="900">
+                <a:solidFill>
+                  <a:srgbClr val="5F6B76"/>
+                </a:solidFill>
+                <a:latin typeface="Corbel"/>
+                <a:ea typeface="Corbel"/>
+                <a:cs typeface="Corbel"/>
               </a:defRPr>
             </a:lvl1pPr>
           </a:lstStyle>
@@ -7518,8 +8208,8 @@
         </p:nvSpPr>
         <p:spPr>
           <a:xfrm>
-            <a:off x="502920" y="292608"/>
-            <a:ext cx="8046720" cy="228600"/>
+            <a:off x="566928" y="384048"/>
+            <a:ext cx="7772400" cy="237744"/>
           </a:xfrm>
           <a:prstGeom prst="rect">
             <a:avLst/>
@@ -7535,14 +8225,17 @@
               <a:buNone/>
             </a:pPr>
             <a:r>
-              <a:rPr lang="en-US" sz="1100" b="1" spc="150" kern="0" dirty="0">
-                <a:solidFill>
-                  <a:srgbClr val="0066CC"/>
-                </a:solidFill>
+              <a:rPr lang="en-US" sz="1000" spc="200" kern="0" dirty="0">
+                <a:solidFill>
+                  <a:srgbClr val="9A6A3C"/>
+                </a:solidFill>
+                <a:latin typeface="Corbel" pitchFamily="34" charset="0"/>
+                <a:ea typeface="Corbel" pitchFamily="34" charset="-122"/>
+                <a:cs typeface="Corbel" pitchFamily="34" charset="-120"/>
               </a:rPr>
               <a:t>UNIT 5</a:t>
             </a:r>
-            <a:endParaRPr lang="en-US" sz="1100" dirty="0"/>
+            <a:endParaRPr lang="en-US" sz="1000" dirty="0"/>
           </a:p>
         </p:txBody>
       </p:sp>
@@ -7554,8 +8247,8 @@
         </p:nvSpPr>
         <p:spPr>
           <a:xfrm>
-            <a:off x="502920" y="548640"/>
-            <a:ext cx="8046720" cy="640080"/>
+            <a:off x="566928" y="658368"/>
+            <a:ext cx="7772400" cy="658368"/>
           </a:xfrm>
           <a:prstGeom prst="rect">
             <a:avLst/>
@@ -7568,30 +8261,56 @@
           <a:lstStyle/>
           <a:p>
             <a:pPr indent="0" marL="0">
+              <a:lnSpc>
+                <a:spcPct val="100000"/>
+              </a:lnSpc>
               <a:buNone/>
             </a:pPr>
             <a:r>
-              <a:rPr lang="en-US" sz="2400" b="1" dirty="0">
-                <a:solidFill>
-                  <a:srgbClr val="111827"/>
-                </a:solidFill>
+              <a:rPr lang="en-US" sz="2500" dirty="0">
+                <a:solidFill>
+                  <a:srgbClr val="1C3140"/>
+                </a:solidFill>
+                <a:latin typeface="Constantia" pitchFamily="34" charset="0"/>
+                <a:ea typeface="Constantia" pitchFamily="34" charset="-122"/>
+                <a:cs typeface="Constantia" pitchFamily="34" charset="-120"/>
               </a:rPr>
               <a:t>Quasi-experimental designs (1/2)</a:t>
             </a:r>
-            <a:endParaRPr lang="en-US" sz="2400" dirty="0"/>
-          </a:p>
-        </p:txBody>
-      </p:sp>
-      <p:sp>
-        <p:nvSpPr>
-          <p:cNvPr id="4" name="Text 2"/>
+            <a:endParaRPr lang="en-US" sz="2500" dirty="0"/>
+          </a:p>
+        </p:txBody>
+      </p:sp>
+      <p:sp>
+        <p:nvSpPr>
+          <p:cNvPr id="4" name="Shape 2"/>
           <p:cNvSpPr/>
           <p:nvPr/>
         </p:nvSpPr>
         <p:spPr>
           <a:xfrm>
-            <a:off x="685800" y="1325880"/>
-            <a:ext cx="7772400" cy="3200400"/>
+            <a:off x="566928" y="1335024"/>
+            <a:ext cx="566928" cy="20117"/>
+          </a:xfrm>
+          <a:prstGeom prst="rect">
+            <a:avLst/>
+          </a:prstGeom>
+          <a:solidFill>
+            <a:srgbClr val="9A6A3C"/>
+          </a:solidFill>
+          <a:ln/>
+        </p:spPr>
+      </p:sp>
+      <p:sp>
+        <p:nvSpPr>
+          <p:cNvPr id="5" name="Text 3"/>
+          <p:cNvSpPr/>
+          <p:nvPr/>
+        </p:nvSpPr>
+        <p:spPr>
+          <a:xfrm>
+            <a:off x="713232" y="1664208"/>
+            <a:ext cx="7498080" cy="2788920"/>
           </a:xfrm>
           <a:prstGeom prst="rect">
             <a:avLst/>
@@ -7605,19 +8324,22 @@
           <a:p>
             <a:pPr marL="342900" indent="-342900">
               <a:lnSpc>
-                <a:spcPct val="125000"/>
+                <a:spcPct val="130000"/>
               </a:lnSpc>
               <a:spcAft>
-                <a:spcPts val="800"/>
+                <a:spcPts val="1100"/>
               </a:spcAft>
               <a:buSzPct val="100000"/>
-              <a:buChar char="•"/>
+              <a:buChar char="–"/>
             </a:pPr>
             <a:r>
               <a:rPr lang="en-US" sz="1500" dirty="0">
                 <a:solidFill>
-                  <a:srgbClr val="374151"/>
-                </a:solidFill>
+                  <a:srgbClr val="23282E"/>
+                </a:solidFill>
+                <a:latin typeface="Corbel" pitchFamily="34" charset="0"/>
+                <a:ea typeface="Corbel" pitchFamily="34" charset="-122"/>
+                <a:cs typeface="Corbel" pitchFamily="34" charset="-120"/>
               </a:rPr>
               <a:t>Used when randomisation is impossible, unethical or politically unacceptable</a:t>
             </a:r>
@@ -7626,19 +8348,22 @@
           <a:p>
             <a:pPr marL="342900" indent="-342900">
               <a:lnSpc>
-                <a:spcPct val="125000"/>
+                <a:spcPct val="130000"/>
               </a:lnSpc>
               <a:spcAft>
-                <a:spcPts val="800"/>
+                <a:spcPts val="1100"/>
               </a:spcAft>
               <a:buSzPct val="100000"/>
-              <a:buChar char="•"/>
+              <a:buChar char="–"/>
             </a:pPr>
             <a:r>
               <a:rPr lang="en-US" sz="1500" dirty="0">
                 <a:solidFill>
-                  <a:srgbClr val="374151"/>
-                </a:solidFill>
+                  <a:srgbClr val="23282E"/>
+                </a:solidFill>
+                <a:latin typeface="Corbel" pitchFamily="34" charset="0"/>
+                <a:ea typeface="Corbel" pitchFamily="34" charset="-122"/>
+                <a:cs typeface="Corbel" pitchFamily="34" charset="-120"/>
               </a:rPr>
               <a:t>Non-equivalent control group — an untreated comparison group not formed by randomisation</a:t>
             </a:r>
@@ -7647,19 +8372,22 @@
           <a:p>
             <a:pPr marL="342900" indent="-342900">
               <a:lnSpc>
-                <a:spcPct val="125000"/>
+                <a:spcPct val="130000"/>
               </a:lnSpc>
               <a:spcAft>
-                <a:spcPts val="800"/>
+                <a:spcPts val="1100"/>
               </a:spcAft>
               <a:buSzPct val="100000"/>
-              <a:buChar char="•"/>
+              <a:buChar char="–"/>
             </a:pPr>
             <a:r>
               <a:rPr lang="en-US" sz="1500" dirty="0">
                 <a:solidFill>
-                  <a:srgbClr val="374151"/>
-                </a:solidFill>
+                  <a:srgbClr val="23282E"/>
+                </a:solidFill>
+                <a:latin typeface="Corbel" pitchFamily="34" charset="0"/>
+                <a:ea typeface="Corbel" pitchFamily="34" charset="-122"/>
+                <a:cs typeface="Corbel" pitchFamily="34" charset="-120"/>
               </a:rPr>
               <a:t>Interrupted time series — repeated measures before and after an intervention, strong when many time points exist</a:t>
             </a:r>
@@ -7668,19 +8396,22 @@
           <a:p>
             <a:pPr marL="342900" indent="-342900">
               <a:lnSpc>
-                <a:spcPct val="125000"/>
+                <a:spcPct val="130000"/>
               </a:lnSpc>
               <a:spcAft>
-                <a:spcPts val="800"/>
+                <a:spcPts val="1100"/>
               </a:spcAft>
               <a:buSzPct val="100000"/>
-              <a:buChar char="•"/>
+              <a:buChar char="–"/>
             </a:pPr>
             <a:r>
               <a:rPr lang="en-US" sz="1500" dirty="0">
                 <a:solidFill>
-                  <a:srgbClr val="374151"/>
-                </a:solidFill>
+                  <a:srgbClr val="23282E"/>
+                </a:solidFill>
+                <a:latin typeface="Corbel" pitchFamily="34" charset="0"/>
+                <a:ea typeface="Corbel" pitchFamily="34" charset="-122"/>
+                <a:cs typeface="Corbel" pitchFamily="34" charset="-120"/>
               </a:rPr>
               <a:t>Difference-in-differences — compares change over time between exposed and unexposed groups</a:t>
             </a:r>
@@ -7700,8 +8431,8 @@
         </p:nvSpPr>
         <p:spPr>
           <a:xfrm>
-            <a:off x="8503920" y="4709160"/>
-            <a:ext cx="800000" cy="300000"/>
+            <a:off x="566928" y="4700016"/>
+            <a:ext cx="914400" cy="274320"/>
           </a:xfrm>
           <a:prstGeom prst="rect">
             <a:avLst/>
@@ -7716,10 +8447,13 @@
           <a:bodyPr/>
           <a:lstStyle>
             <a:lvl1pPr>
-              <a:defRPr sz="1000">
-                <a:solidFill>
-                  <a:srgbClr val="6B7280"/>
-                </a:solidFill>
+              <a:defRPr sz="900">
+                <a:solidFill>
+                  <a:srgbClr val="5F6B76"/>
+                </a:solidFill>
+                <a:latin typeface="Corbel"/>
+                <a:ea typeface="Corbel"/>
+                <a:cs typeface="Corbel"/>
               </a:defRPr>
             </a:lvl1pPr>
           </a:lstStyle>
@@ -7784,7 +8518,7 @@
     </a:clrScheme>
     <a:fontScheme name="Office">
       <a:majorFont>
-        <a:latin typeface="Calibri Light" panose="020F0302020204030204"/>
+        <a:latin typeface="Constantia"/>
         <a:ea typeface=""/>
         <a:cs typeface=""/>
         <a:font script="Jpan" typeface="游ゴシック Light"/>
@@ -7836,7 +8570,7 @@
         <a:font script="Tfng" typeface="Ebrima"/>
       </a:majorFont>
       <a:minorFont>
-        <a:latin typeface="Calibri" panose="020F0502020204030204"/>
+        <a:latin typeface="Corbel"/>
         <a:ea typeface=""/>
         <a:cs typeface=""/>
         <a:font script="Jpan" typeface="游ゴシック"/>
